--- a/report/presentation.pptx
+++ b/report/presentation.pptx
@@ -121,13 +121,13 @@
   <p:extLst>
     <p:ext uri="{521415D9-36F7-43E2-AB2F-B90AF26B5E84}">
       <p14:sectionLst xmlns:p14="http://schemas.microsoft.com/office/powerpoint/2010/main">
-        <p14:section name="Introduction" id="{577b1046-36e8-c614-6bf2-95e1d006db89}">
+        <p14:section name="Introduction" id="{60562039-4d3c-6e44-a3e1-ac7fa15de7da}">
           <p14:sldIdLst>
             <p14:sldId id="256"/>
             <p14:sldId id="257"/>
           </p14:sldIdLst>
         </p14:section>
-        <p14:section name="Method" id="{48c4d108-f3dd-5354-7783-1ba23f8f9e9a}">
+        <p14:section name="Method" id="{506ac5b4-6e68-e2fe-2ca6-e301668567c9}">
           <p14:sldIdLst>
             <p14:sldId id="258"/>
             <p14:sldId id="259"/>
@@ -136,17 +136,17 @@
             <p14:sldId id="262"/>
             <p14:sldId id="263"/>
             <p14:sldId id="264"/>
+            <p14:sldId id="265"/>
           </p14:sldIdLst>
         </p14:section>
-        <p14:section name="Results" id="{2286cfc0-7149-86e6-2620-0b720c520664}">
+        <p14:section name="Results" id="{6c102ff0-88d8-ee51-1325-efc29e2fec5c}">
           <p14:sldIdLst>
-            <p14:sldId id="265"/>
             <p14:sldId id="266"/>
             <p14:sldId id="267"/>
             <p14:sldId id="268"/>
           </p14:sldIdLst>
         </p14:section>
-        <p14:section name="Close" id="{df5f2b0d-79e5-331a-b538-714156bb2f2e}">
+        <p14:section name="Close" id="{a98e9f1f-b110-3830-cfa0-482124de47a9}">
           <p14:sldIdLst>
             <p14:sldId id="269"/>
             <p14:sldId id="270"/>
@@ -396,6 +396,298 @@
   <c:date1904 val="0"/>
   <c:roundedCorners val="1"/>
   <c:chart>
+    <c:title>
+      <c:tx>
+        <c:rich>
+          <a:bodyPr/>
+          <a:lstStyle/>
+          <a:p>
+            <a:pPr>
+              <a:defRPr sz="1200" b="0" i="0" u="none" strike="noStrike">
+                <a:solidFill>
+                  <a:srgbClr val="1B2333"/>
+                </a:solidFill>
+                <a:latin typeface="+mn-lt"/>
+              </a:defRPr>
+            </a:pPr>
+            <a:r>
+              <a:rPr sz="1200" b="0" i="0" u="none" strike="noStrike">
+                <a:solidFill>
+                  <a:srgbClr val="1B2333"/>
+                </a:solidFill>
+                <a:latin typeface="+mn-lt"/>
+              </a:rPr>
+              <a:t>Audit of 100 random accepted headlines</a:t>
+            </a:r>
+          </a:p>
+        </c:rich>
+      </c:tx>
+      <c:layout/>
+      <c:overlay val="0"/>
+    </c:title>
+    <c:autoTitleDeleted val="0"/>
+    <c:plotArea>
+      <c:layout/>
+      <c:barChart>
+        <c:barDir val="bar"/>
+        <c:grouping val="clustered"/>
+        <c:varyColors val="0"/>
+        <c:ser>
+          <c:idx val="0"/>
+          <c:order val="0"/>
+          <c:tx>
+            <c:strRef>
+              <c:f>Sheet1!$B$1</c:f>
+              <c:strCache>
+                <c:ptCount val="1"/>
+                <c:pt idx="0">
+                  <c:v>Headlines</c:v>
+                </c:pt>
+              </c:strCache>
+            </c:strRef>
+          </c:tx>
+          <c:spPr>
+            <a:solidFill>
+              <a:srgbClr val="1F9E74"/>
+            </a:solidFill>
+            <a:effectLst/>
+          </c:spPr>
+          <c:invertIfNegative val="0"/>
+          <c:dLbls>
+            <c:numFmt formatCode="0&quot;%&quot;" sourceLinked="0"/>
+            <c:txPr>
+              <a:bodyPr/>
+              <a:lstStyle/>
+              <a:p>
+                <a:pPr>
+                  <a:defRPr b="0" i="0" strike="noStrike" sz="1100" u="none">
+                    <a:solidFill>
+                      <a:srgbClr val="1B2333"/>
+                    </a:solidFill>
+                    <a:latin typeface="+mn-lt"/>
+                  </a:defRPr>
+                </a:pPr>
+              </a:p>
+            </c:txPr>
+            <c:showLegendKey val="0"/>
+            <c:showVal val="1"/>
+            <c:showCatName val="0"/>
+            <c:showSerName val="0"/>
+            <c:showPercent val="0"/>
+            <c:showBubbleSize val="0"/>
+            <c:showLeaderLines val="0"/>
+          </c:dLbls>
+          <c:dPt>
+            <c:idx val="0"/>
+            <c:invertIfNegative val="0"/>
+            <c:bubble3D val="0"/>
+            <c:spPr>
+              <a:solidFill>
+                <a:srgbClr val="1F9E74"/>
+              </a:solidFill>
+              <a:effectLst/>
+            </c:spPr>
+          </c:dPt>
+          <c:dPt>
+            <c:idx val="1"/>
+            <c:invertIfNegative val="0"/>
+            <c:bubble3D val="0"/>
+            <c:spPr>
+              <a:solidFill>
+                <a:srgbClr val="F2B33D"/>
+              </a:solidFill>
+              <a:effectLst/>
+            </c:spPr>
+          </c:dPt>
+          <c:dPt>
+            <c:idx val="2"/>
+            <c:invertIfNegative val="0"/>
+            <c:bubble3D val="0"/>
+            <c:spPr>
+              <a:solidFill>
+                <a:srgbClr val="E2574C"/>
+              </a:solidFill>
+              <a:effectLst/>
+            </c:spPr>
+          </c:dPt>
+          <c:cat>
+            <c:multiLvlStrRef>
+              <c:f>Sheet1!$A$2:$A$4</c:f>
+              <c:multiLvlStrCache>
+                <c:ptCount val="3"/>
+                <c:lvl>
+                  <c:pt idx="0">
+                    <c:v>About the company</c:v>
+                  </c:pt>
+                  <c:pt idx="1">
+                    <c:v>Mentions its platform</c:v>
+                  </c:pt>
+                  <c:pt idx="2">
+                    <c:v>Different entity</c:v>
+                  </c:pt>
+                </c:lvl>
+              </c:multiLvlStrCache>
+            </c:multiLvlStrRef>
+          </c:cat>
+          <c:val>
+            <c:numRef>
+              <c:f>Sheet1!$B$2:$B$4</c:f>
+              <c:numCache>
+                <c:formatCode>General</c:formatCode>
+                <c:ptCount val="3"/>
+                <c:pt idx="0">
+                  <c:v>29</c:v>
+                </c:pt>
+                <c:pt idx="1">
+                  <c:v>38</c:v>
+                </c:pt>
+                <c:pt idx="2">
+                  <c:v>33</c:v>
+                </c:pt>
+              </c:numCache>
+            </c:numRef>
+          </c:val>
+        </c:ser>
+        <c:dLbls>
+          <c:numFmt formatCode="0&quot;%&quot;" sourceLinked="0"/>
+          <c:txPr>
+            <a:bodyPr/>
+            <a:lstStyle/>
+            <a:p>
+              <a:pPr>
+                <a:defRPr b="0" i="0" strike="noStrike" sz="1100" u="none">
+                  <a:solidFill>
+                    <a:srgbClr val="1B2333"/>
+                  </a:solidFill>
+                  <a:latin typeface="+mn-lt"/>
+                </a:defRPr>
+              </a:pPr>
+            </a:p>
+          </c:txPr>
+          <c:showLegendKey val="0"/>
+          <c:showVal val="1"/>
+          <c:showCatName val="0"/>
+          <c:showSerName val="0"/>
+          <c:showPercent val="0"/>
+          <c:showBubbleSize val="0"/>
+          <c:showLeaderLines val="0"/>
+        </c:dLbls>
+        <c:gapWidth val="150"/>
+        <c:overlap val="0"/>
+        <c:axId val="2094734554"/>
+        <c:axId val="2094734552"/>
+        <c:axId val="2094734556"/>
+      </c:barChart>
+      <c:catAx>
+        <c:axId val="2094734554"/>
+        <c:scaling>
+          <c:orientation val="maxMin"/>
+        </c:scaling>
+        <c:delete val="0"/>
+        <c:axPos val="l"/>
+        <c:numFmt formatCode="General" sourceLinked="1"/>
+        <c:majorTickMark val="out"/>
+        <c:minorTickMark val="none"/>
+        <c:tickLblPos val="nextTo"/>
+        <c:spPr>
+          <a:ln w="12700" cap="flat">
+            <a:solidFill>
+              <a:srgbClr val="888888"/>
+            </a:solidFill>
+            <a:prstDash val="solid"/>
+            <a:round/>
+          </a:ln>
+        </c:spPr>
+        <c:txPr>
+          <a:bodyPr/>
+          <a:lstStyle/>
+          <a:p>
+            <a:pPr>
+              <a:defRPr sz="1100" b="0" i="0" u="none" strike="noStrike">
+                <a:solidFill>
+                  <a:srgbClr val="1B2333"/>
+                </a:solidFill>
+                <a:latin typeface="+mn-lt"/>
+              </a:defRPr>
+            </a:pPr>
+            <a:endParaRPr lang="en-US"/>
+          </a:p>
+        </c:txPr>
+        <c:crossAx val="2094734552"/>
+        <c:crosses val="autoZero"/>
+        <c:auto val="1"/>
+        <c:lblAlgn val="ctr"/>
+        <c:noMultiLvlLbl val="1"/>
+      </c:catAx>
+      <c:valAx>
+        <c:axId val="2094734552"/>
+        <c:scaling>
+          <c:orientation val="minMax"/>
+          <c:max val="50"/>
+        </c:scaling>
+        <c:delete val="1"/>
+        <c:axPos val="b"/>
+        <c:numFmt formatCode="General" sourceLinked="0"/>
+        <c:majorTickMark val="out"/>
+        <c:minorTickMark val="none"/>
+        <c:tickLblPos val="low"/>
+        <c:spPr>
+          <a:ln w="12700" cap="flat">
+            <a:solidFill>
+              <a:srgbClr val="888888"/>
+            </a:solidFill>
+            <a:prstDash val="solid"/>
+            <a:round/>
+          </a:ln>
+        </c:spPr>
+        <c:txPr>
+          <a:bodyPr/>
+          <a:lstStyle/>
+          <a:p>
+            <a:pPr>
+              <a:defRPr sz="1000" b="0" i="0" u="none" strike="noStrike">
+                <a:solidFill>
+                  <a:srgbClr val="8A97A8"/>
+                </a:solidFill>
+                <a:latin typeface="+mn-lt"/>
+              </a:defRPr>
+            </a:pPr>
+            <a:endParaRPr lang="en-US"/>
+          </a:p>
+        </c:txPr>
+        <c:crossAx val="2094734554"/>
+        <c:crosses val="autoZero"/>
+        <c:crossBetween val="between"/>
+      </c:valAx>
+      <c:spPr>
+        <a:noFill/>
+        <a:ln>
+          <a:noFill/>
+        </a:ln>
+        <a:effectLst/>
+      </c:spPr>
+    </c:plotArea>
+    <c:plotVisOnly val="1"/>
+    <c:dispBlanksAs val="span"/>
+  </c:chart>
+  <c:spPr>
+    <a:noFill/>
+    <a:ln>
+      <a:noFill/>
+    </a:ln>
+    <a:effectLst/>
+  </c:spPr>
+  <c:externalData r:id="rId1">
+    <c:autoUpdate val="0"/>
+  </c:externalData>
+</c:chartSpace>
+</file>
+
+<file path=ppt/charts/chart3.xml><?xml version="1.0" encoding="utf-8"?>
+<c:chartSpace xmlns:c="http://schemas.openxmlformats.org/drawingml/2006/chart" xmlns:a="http://schemas.openxmlformats.org/drawingml/2006/main" xmlns:r="http://schemas.openxmlformats.org/officeDocument/2006/relationships">
+  <c:date1904 val="0"/>
+  <c:roundedCorners val="1"/>
+  <c:chart>
     <c:autoTitleDeleted val="1"/>
     <c:plotArea>
       <c:layout/>
@@ -412,7 +704,7 @@
               <c:strCache>
                 <c:ptCount val="1"/>
                 <c:pt idx="0">
-                  <c:v>AUC-ROC</c:v>
+                  <c:v>Logistic Regression</c:v>
                 </c:pt>
               </c:strCache>
             </c:strRef>
@@ -425,13 +717,13 @@
           </c:spPr>
           <c:invertIfNegative val="0"/>
           <c:dLbls>
-            <c:numFmt formatCode="0.00" sourceLinked="0"/>
+            <c:numFmt formatCode="0.000" sourceLinked="0"/>
             <c:txPr>
               <a:bodyPr/>
               <a:lstStyle/>
               <a:p>
                 <a:pPr>
-                  <a:defRPr b="0" i="0" strike="noStrike" sz="900" u="none">
+                  <a:defRPr b="0" i="0" strike="noStrike" sz="1000" u="none">
                     <a:solidFill>
                       <a:srgbClr val="1B2333"/>
                     </a:solidFill>
@@ -450,21 +742,15 @@
           </c:dLbls>
           <c:cat>
             <c:multiLvlStrRef>
-              <c:f>Sheet1!$A$2:$A$5</c:f>
+              <c:f>Sheet1!$A$2:$A$3</c:f>
               <c:multiLvlStrCache>
-                <c:ptCount val="4"/>
+                <c:ptCount val="2"/>
                 <c:lvl>
                   <c:pt idx="0">
-                    <c:v>E1 LR · Fin</c:v>
+                    <c:v>Original features</c:v>
                   </c:pt>
                   <c:pt idx="1">
-                    <c:v>E3 LR · Fin+Sent</c:v>
-                  </c:pt>
-                  <c:pt idx="2">
-                    <c:v>E2 SVM · Fin</c:v>
-                  </c:pt>
-                  <c:pt idx="3">
-                    <c:v>E4 SVM · Fin+Sent</c:v>
+                    <c:v>Leak-free features</c:v>
                   </c:pt>
                 </c:lvl>
               </c:multiLvlStrCache>
@@ -472,21 +758,15 @@
           </c:cat>
           <c:val>
             <c:numRef>
-              <c:f>Sheet1!$B$2:$B$5</c:f>
+              <c:f>Sheet1!$B$2:$B$3</c:f>
               <c:numCache>
                 <c:formatCode>General</c:formatCode>
-                <c:ptCount val="4"/>
+                <c:ptCount val="2"/>
                 <c:pt idx="0">
-                  <c:v>0.7081</c:v>
+                  <c:v>0.7241</c:v>
                 </c:pt>
                 <c:pt idx="1">
-                  <c:v>0.7081</c:v>
-                </c:pt>
-                <c:pt idx="2">
-                  <c:v>0.7256</c:v>
-                </c:pt>
-                <c:pt idx="3">
-                  <c:v>0.7261</c:v>
+                  <c:v>0.6792</c:v>
                 </c:pt>
               </c:numCache>
             </c:numRef>
@@ -501,26 +781,26 @@
               <c:strCache>
                 <c:ptCount val="1"/>
                 <c:pt idx="0">
-                  <c:v>F1 (closed)</c:v>
+                  <c:v>Linear SVM</c:v>
                 </c:pt>
               </c:strCache>
             </c:strRef>
           </c:tx>
           <c:spPr>
             <a:solidFill>
-              <a:srgbClr val="E2574C"/>
+              <a:srgbClr val="5B4B8A"/>
             </a:solidFill>
             <a:effectLst/>
           </c:spPr>
           <c:invertIfNegative val="0"/>
           <c:dLbls>
-            <c:numFmt formatCode="0.00" sourceLinked="0"/>
+            <c:numFmt formatCode="0.000" sourceLinked="0"/>
             <c:txPr>
               <a:bodyPr/>
               <a:lstStyle/>
               <a:p>
                 <a:pPr>
-                  <a:defRPr b="0" i="0" strike="noStrike" sz="900" u="none">
+                  <a:defRPr b="0" i="0" strike="noStrike" sz="1000" u="none">
                     <a:solidFill>
                       <a:srgbClr val="1B2333"/>
                     </a:solidFill>
@@ -539,21 +819,15 @@
           </c:dLbls>
           <c:cat>
             <c:multiLvlStrRef>
-              <c:f>Sheet1!$A$2:$A$5</c:f>
+              <c:f>Sheet1!$A$2:$A$3</c:f>
               <c:multiLvlStrCache>
-                <c:ptCount val="4"/>
+                <c:ptCount val="2"/>
                 <c:lvl>
                   <c:pt idx="0">
-                    <c:v>E1 LR · Fin</c:v>
+                    <c:v>Original features</c:v>
                   </c:pt>
                   <c:pt idx="1">
-                    <c:v>E3 LR · Fin+Sent</c:v>
-                  </c:pt>
-                  <c:pt idx="2">
-                    <c:v>E2 SVM · Fin</c:v>
-                  </c:pt>
-                  <c:pt idx="3">
-                    <c:v>E4 SVM · Fin+Sent</c:v>
+                    <c:v>Leak-free features</c:v>
                   </c:pt>
                 </c:lvl>
               </c:multiLvlStrCache>
@@ -561,123 +835,28 @@
           </c:cat>
           <c:val>
             <c:numRef>
-              <c:f>Sheet1!$C$2:$C$5</c:f>
+              <c:f>Sheet1!$C$2:$C$3</c:f>
               <c:numCache>
                 <c:formatCode>General</c:formatCode>
-                <c:ptCount val="4"/>
+                <c:ptCount val="2"/>
                 <c:pt idx="0">
-                  <c:v>0.3136</c:v>
+                  <c:v>0.727</c:v>
                 </c:pt>
                 <c:pt idx="1">
-                  <c:v>0.3131</c:v>
-                </c:pt>
-                <c:pt idx="2">
-                  <c:v>0.2858</c:v>
-                </c:pt>
-                <c:pt idx="3">
-                  <c:v>0.2858</c:v>
-                </c:pt>
-              </c:numCache>
-            </c:numRef>
-          </c:val>
-        </c:ser>
-        <c:ser>
-          <c:idx val="2"/>
-          <c:order val="2"/>
-          <c:tx>
-            <c:strRef>
-              <c:f>Sheet1!$D$1</c:f>
-              <c:strCache>
-                <c:ptCount val="1"/>
-                <c:pt idx="0">
-                  <c:v>Recall (closed)</c:v>
-                </c:pt>
-              </c:strCache>
-            </c:strRef>
-          </c:tx>
-          <c:spPr>
-            <a:solidFill>
-              <a:srgbClr val="1F9E74"/>
-            </a:solidFill>
-            <a:effectLst/>
-          </c:spPr>
-          <c:invertIfNegative val="0"/>
-          <c:dLbls>
-            <c:numFmt formatCode="0.00" sourceLinked="0"/>
-            <c:txPr>
-              <a:bodyPr/>
-              <a:lstStyle/>
-              <a:p>
-                <a:pPr>
-                  <a:defRPr b="0" i="0" strike="noStrike" sz="900" u="none">
-                    <a:solidFill>
-                      <a:srgbClr val="1B2333"/>
-                    </a:solidFill>
-                    <a:latin typeface="+mn-lt"/>
-                  </a:defRPr>
-                </a:pPr>
-              </a:p>
-            </c:txPr>
-            <c:showLegendKey val="0"/>
-            <c:showVal val="1"/>
-            <c:showCatName val="0"/>
-            <c:showSerName val="0"/>
-            <c:showPercent val="0"/>
-            <c:showBubbleSize val="0"/>
-            <c:showLeaderLines val="0"/>
-          </c:dLbls>
-          <c:cat>
-            <c:multiLvlStrRef>
-              <c:f>Sheet1!$A$2:$A$5</c:f>
-              <c:multiLvlStrCache>
-                <c:ptCount val="4"/>
-                <c:lvl>
-                  <c:pt idx="0">
-                    <c:v>E1 LR · Fin</c:v>
-                  </c:pt>
-                  <c:pt idx="1">
-                    <c:v>E3 LR · Fin+Sent</c:v>
-                  </c:pt>
-                  <c:pt idx="2">
-                    <c:v>E2 SVM · Fin</c:v>
-                  </c:pt>
-                  <c:pt idx="3">
-                    <c:v>E4 SVM · Fin+Sent</c:v>
-                  </c:pt>
-                </c:lvl>
-              </c:multiLvlStrCache>
-            </c:multiLvlStrRef>
-          </c:cat>
-          <c:val>
-            <c:numRef>
-              <c:f>Sheet1!$D$2:$D$5</c:f>
-              <c:numCache>
-                <c:formatCode>General</c:formatCode>
-                <c:ptCount val="4"/>
-                <c:pt idx="0">
-                  <c:v>0.8471</c:v>
-                </c:pt>
-                <c:pt idx="1">
-                  <c:v>0.8453</c:v>
-                </c:pt>
-                <c:pt idx="2">
-                  <c:v>0.9173</c:v>
-                </c:pt>
-                <c:pt idx="3">
-                  <c:v>0.9173</c:v>
+                  <c:v>0.6794</c:v>
                 </c:pt>
               </c:numCache>
             </c:numRef>
           </c:val>
         </c:ser>
         <c:dLbls>
-          <c:numFmt formatCode="0.00" sourceLinked="0"/>
+          <c:numFmt formatCode="0.000" sourceLinked="0"/>
           <c:txPr>
             <a:bodyPr/>
             <a:lstStyle/>
             <a:p>
               <a:pPr>
-                <a:defRPr b="0" i="0" strike="noStrike" sz="900" u="none">
+                <a:defRPr b="0" i="0" strike="noStrike" sz="1000" u="none">
                   <a:solidFill>
                     <a:srgbClr val="1B2333"/>
                   </a:solidFill>
@@ -745,8 +924,8 @@
         <c:axId val="2094734552"/>
         <c:scaling>
           <c:orientation val="minMax"/>
-          <c:max val="1"/>
-          <c:min val="0"/>
+          <c:max val="0.8"/>
+          <c:min val="0.5"/>
         </c:scaling>
         <c:delete val="0"/>
         <c:axPos val="l"/>
@@ -837,7 +1016,7 @@
 </c:chartSpace>
 </file>
 
-<file path=ppt/charts/chart3.xml><?xml version="1.0" encoding="utf-8"?>
+<file path=ppt/charts/chart4.xml><?xml version="1.0" encoding="utf-8"?>
 <c:chartSpace xmlns:c="http://schemas.openxmlformats.org/drawingml/2006/chart" xmlns:a="http://schemas.openxmlformats.org/drawingml/2006/main" xmlns:r="http://schemas.openxmlformats.org/officeDocument/2006/relationships">
   <c:date1904 val="0"/>
   <c:roundedCorners val="1"/>
@@ -858,7 +1037,7 @@
               <c:strCache>
                 <c:ptCount val="1"/>
                 <c:pt idx="0">
-                  <c:v>Logistic Regression (E1)</c:v>
+                  <c:v>Logistic Regression</c:v>
                 </c:pt>
               </c:strCache>
             </c:strRef>
@@ -871,13 +1050,13 @@
           </c:spPr>
           <c:invertIfNegative val="0"/>
           <c:dLbls>
-            <c:numFmt formatCode="0.00" sourceLinked="0"/>
+            <c:numFmt formatCode="0.000" sourceLinked="0"/>
             <c:txPr>
               <a:bodyPr/>
               <a:lstStyle/>
               <a:p>
                 <a:pPr>
-                  <a:defRPr b="0" i="0" strike="noStrike" sz="900" u="none">
+                  <a:defRPr b="0" i="0" strike="noStrike" sz="1000" u="none">
                     <a:solidFill>
                       <a:srgbClr val="1B2333"/>
                     </a:solidFill>
@@ -896,24 +1075,18 @@
           </c:dLbls>
           <c:cat>
             <c:multiLvlStrRef>
-              <c:f>Sheet1!$A$2:$A$6</c:f>
+              <c:f>Sheet1!$A$2:$A$4</c:f>
               <c:multiLvlStrCache>
-                <c:ptCount val="5"/>
+                <c:ptCount val="3"/>
                 <c:lvl>
                   <c:pt idx="0">
-                    <c:v>AUC</c:v>
+                    <c:v>Leak-free</c:v>
                   </c:pt>
                   <c:pt idx="1">
-                    <c:v>Balanced acc.</c:v>
+                    <c:v>+ Coverage</c:v>
                   </c:pt>
                   <c:pt idx="2">
-                    <c:v>Recall closed</c:v>
-                  </c:pt>
-                  <c:pt idx="3">
-                    <c:v>Recall operating</c:v>
-                  </c:pt>
-                  <c:pt idx="4">
-                    <c:v>F1 closed</c:v>
+                    <c:v>+ Sentiment</c:v>
                   </c:pt>
                 </c:lvl>
               </c:multiLvlStrCache>
@@ -921,24 +1094,18 @@
           </c:cat>
           <c:val>
             <c:numRef>
-              <c:f>Sheet1!$B$2:$B$6</c:f>
+              <c:f>Sheet1!$B$2:$B$4</c:f>
               <c:numCache>
                 <c:formatCode>General</c:formatCode>
-                <c:ptCount val="5"/>
+                <c:ptCount val="3"/>
                 <c:pt idx="0">
-                  <c:v>0.7081</c:v>
+                  <c:v>0.6394</c:v>
                 </c:pt>
                 <c:pt idx="1">
-                  <c:v>0.6625</c:v>
+                  <c:v>0.6388</c:v>
                 </c:pt>
                 <c:pt idx="2">
-                  <c:v>0.8471</c:v>
-                </c:pt>
-                <c:pt idx="3">
-                  <c:v>0.478</c:v>
-                </c:pt>
-                <c:pt idx="4">
-                  <c:v>0.3136</c:v>
+                  <c:v>0.6504</c:v>
                 </c:pt>
               </c:numCache>
             </c:numRef>
@@ -953,7 +1120,7 @@
               <c:strCache>
                 <c:ptCount val="1"/>
                 <c:pt idx="0">
-                  <c:v>Linear SVM (E2)</c:v>
+                  <c:v>Linear SVM</c:v>
                 </c:pt>
               </c:strCache>
             </c:strRef>
@@ -966,13 +1133,13 @@
           </c:spPr>
           <c:invertIfNegative val="0"/>
           <c:dLbls>
-            <c:numFmt formatCode="0.00" sourceLinked="0"/>
+            <c:numFmt formatCode="0.000" sourceLinked="0"/>
             <c:txPr>
               <a:bodyPr/>
               <a:lstStyle/>
               <a:p>
                 <a:pPr>
-                  <a:defRPr b="0" i="0" strike="noStrike" sz="900" u="none">
+                  <a:defRPr b="0" i="0" strike="noStrike" sz="1000" u="none">
                     <a:solidFill>
                       <a:srgbClr val="1B2333"/>
                     </a:solidFill>
@@ -991,24 +1158,18 @@
           </c:dLbls>
           <c:cat>
             <c:multiLvlStrRef>
-              <c:f>Sheet1!$A$2:$A$6</c:f>
+              <c:f>Sheet1!$A$2:$A$4</c:f>
               <c:multiLvlStrCache>
-                <c:ptCount val="5"/>
+                <c:ptCount val="3"/>
                 <c:lvl>
                   <c:pt idx="0">
-                    <c:v>AUC</c:v>
+                    <c:v>Leak-free</c:v>
                   </c:pt>
                   <c:pt idx="1">
-                    <c:v>Balanced acc.</c:v>
+                    <c:v>+ Coverage</c:v>
                   </c:pt>
                   <c:pt idx="2">
-                    <c:v>Recall closed</c:v>
-                  </c:pt>
-                  <c:pt idx="3">
-                    <c:v>Recall operating</c:v>
-                  </c:pt>
-                  <c:pt idx="4">
-                    <c:v>F1 closed</c:v>
+                    <c:v>+ Sentiment</c:v>
                   </c:pt>
                 </c:lvl>
               </c:multiLvlStrCache>
@@ -1016,37 +1177,31 @@
           </c:cat>
           <c:val>
             <c:numRef>
-              <c:f>Sheet1!$C$2:$C$6</c:f>
+              <c:f>Sheet1!$C$2:$C$4</c:f>
               <c:numCache>
                 <c:formatCode>General</c:formatCode>
-                <c:ptCount val="5"/>
+                <c:ptCount val="3"/>
                 <c:pt idx="0">
-                  <c:v>0.7256</c:v>
+                  <c:v>0.6246</c:v>
                 </c:pt>
                 <c:pt idx="1">
-                  <c:v>0.6282</c:v>
+                  <c:v>0.6252</c:v>
                 </c:pt>
                 <c:pt idx="2">
-                  <c:v>0.9173</c:v>
-                </c:pt>
-                <c:pt idx="3">
-                  <c:v>0.3391</c:v>
-                </c:pt>
-                <c:pt idx="4">
-                  <c:v>0.2858</c:v>
+                  <c:v>0.6337</c:v>
                 </c:pt>
               </c:numCache>
             </c:numRef>
           </c:val>
         </c:ser>
         <c:dLbls>
-          <c:numFmt formatCode="0.00" sourceLinked="0"/>
+          <c:numFmt formatCode="0.000" sourceLinked="0"/>
           <c:txPr>
             <a:bodyPr/>
             <a:lstStyle/>
             <a:p>
               <a:pPr>
-                <a:defRPr b="0" i="0" strike="noStrike" sz="900" u="none">
+                <a:defRPr b="0" i="0" strike="noStrike" sz="1000" u="none">
                   <a:solidFill>
                     <a:srgbClr val="1B2333"/>
                   </a:solidFill>
@@ -1094,7 +1249,7 @@
           <a:lstStyle/>
           <a:p>
             <a:pPr>
-              <a:defRPr sz="1000" b="0" i="0" u="none" strike="noStrike">
+              <a:defRPr sz="1100" b="0" i="0" u="none" strike="noStrike">
                 <a:solidFill>
                   <a:srgbClr val="1B2333"/>
                 </a:solidFill>
@@ -1114,8 +1269,8 @@
         <c:axId val="2094734552"/>
         <c:scaling>
           <c:orientation val="minMax"/>
-          <c:max val="1"/>
-          <c:min val="0"/>
+          <c:max val="0.7"/>
+          <c:min val="0.5"/>
         </c:scaling>
         <c:delete val="0"/>
         <c:axPos val="l"/>
@@ -1601,7 +1756,7 @@
           <a:p>
             <a:r>
               <a:rPr lang="en-US" dirty="0"/>
-              <a:t>Introduce the team and the question. We test whether public news sentiment adds predictive value over funding data, and we build the whole thing on the course's Big Data stack.</a:t>
+              <a:t>Introduce the team and the question: does what the news says about a startup help predict whether it survives, beyond its structured data? Everything runs on the course's Big Data stack.</a:t>
             </a:r>
             <a:endParaRPr lang="en-US" dirty="0"/>
           </a:p>
@@ -1689,7 +1844,7 @@
           <a:p>
             <a:r>
               <a:rPr lang="en-US" dirty="0"/>
-              <a:t>Within each model, adding sentiment gives near-identical bars: E1 equals E3 and E2 equals E4. Between models there is a real difference. The SVM catches more closures with a slightly higher AUC, and LR has a better F1.</a:t>
+              <a:t>Accuracy is useless with 87% operating, so AUC is primary. Balanced class weights come from training data only. We first tuned the threshold for F1, saw it degenerate on the balanced cohort, and switched to balanced accuracy.</a:t>
             </a:r>
             <a:endParaRPr lang="en-US" dirty="0"/>
           </a:p>
@@ -1777,7 +1932,7 @@
           <a:p>
             <a:r>
               <a:rPr lang="en-US" dirty="0"/>
-              <a:t>This is the most important slide to explain carefully. The null difference does not mean sentiment is useless. With only 3 startups covered, sentiment had nothing to contribute. The fix is batch collection.</a:t>
+              <a:t>All 22,075 startups, 5-fold CV. Raise this before the examiner does: we found it ourselves from the coefficients and measured it.</a:t>
             </a:r>
             <a:endParaRPr lang="en-US" dirty="0"/>
           </a:p>
@@ -1865,7 +2020,7 @@
           <a:p>
             <a:r>
               <a:rPr lang="en-US" dirty="0"/>
-              <a:t>AUC measures ranking across all thresholds, while accuracy and F1 measure one threshold. The SVM ranks slightly better, but its default threshold is too aggressive. We deliberately did not tune on the test set.</a:t>
+              <a:t>815-startup balanced cohort, 5-fold CV, paired bootstrap. Volume adds nothing. Tone adds about 0.01 for both models. Call it borderline, suggestive evidence.</a:t>
             </a:r>
             <a:endParaRPr lang="en-US" dirty="0"/>
           </a:p>
@@ -1953,7 +2108,7 @@
           <a:p>
             <a:r>
               <a:rPr lang="en-US" dirty="0"/>
-              <a:t>Raise this before the examiner does. The leakage-safe flag itself tells the model that a funding round happened after the cutoff. We spotted it from the coefficients and documented the fix.</a:t>
+              <a:t>These three limits compound: few startups have news, most matched news isn't about the company, and most headlines are neutral. A large effect was never possible, which is why the result is suggestive rather than conclusive.</a:t>
             </a:r>
             <a:endParaRPr lang="en-US" dirty="0"/>
           </a:p>
@@ -2041,7 +2196,7 @@
           <a:p>
             <a:r>
               <a:rPr lang="en-US" dirty="0"/>
-              <a:t>Every limitation has a matching next step. The first next step, batch collection, is what turns this from a verified pipeline into an answered research question.</a:t>
+              <a:t>Every limitation has a matching next step. The infrastructure is in place; what's missing is cleaner and more plentiful news.</a:t>
             </a:r>
             <a:endParaRPr lang="en-US" dirty="0"/>
           </a:p>
@@ -2129,7 +2284,7 @@
           <a:p>
             <a:r>
               <a:rPr lang="en-US" dirty="0"/>
-              <a:t>Close by summarising. The whole stack works end to end on real data, we were honest about what the results can and cannot show, and the path to answering the question is clear.</a:t>
+              <a:t>Close: the whole stack works end to end and is tested; we removed a real leak; sentiment shows at most a small signal at this data quality; and the pipeline can answer the question better as data improves.</a:t>
             </a:r>
             <a:endParaRPr lang="en-US" dirty="0"/>
           </a:p>
@@ -2217,7 +2372,7 @@
           <a:p>
             <a:r>
               <a:rPr lang="en-US" dirty="0"/>
-              <a:t>Give the conclusion first. Financial data gives AUC around 0.71 to 0.73. Adding sentiment changed 2 of 8,686 test predictions. That is inconclusive because only 3 startups had news. LR versus SVM is a trade-off.</a:t>
+              <a:t>Give the conclusion first. One: we found a leak worth 0.044 AUC and removed it. Two: the honest leak-free baseline is 0.679. Three: news tone adds about 0.01 AUC with both models, borderline significant. Volume adds nothing.</a:t>
             </a:r>
             <a:endParaRPr lang="en-US" dirty="0"/>
           </a:p>
@@ -2305,7 +2460,7 @@
           <a:p>
             <a:r>
               <a:rPr lang="en-US" dirty="0"/>
-              <a:t>Labels date from about 2014. If we collect news today, articles saying a company shut down give away the answer. So one cutoff, January 1, 2013, governs everything. News is filtered at collection and again at aggregation.</a:t>
+              <a:t>Labels date from about 2014. News collected today would contain the answer, so one cutoff, January 1 2013, governs everything.</a:t>
             </a:r>
             <a:endParaRPr lang="en-US" dirty="0"/>
           </a:p>
@@ -2393,7 +2548,7 @@
           <a:p>
             <a:r>
               <a:rPr lang="en-US" dirty="0"/>
-              <a:t>66,368 raw rows. Acquired and IPO companies are excluded because an acquisition can mean success or failure. Requiring founding and first funding before the cutoff leaves 22,075 startups, 13% closed. That imbalance matters later.</a:t>
+              <a:t>Acquired and IPO are excluded because an acquisition can be success or failure. Founded and first funded before the cutoff leaves 22,075 startups, 13% closed.</a:t>
             </a:r>
             <a:endParaRPr lang="en-US" dirty="0"/>
           </a:p>
@@ -2481,7 +2636,7 @@
           <a:p>
             <a:r>
               <a:rPr lang="en-US" dirty="0"/>
-              <a:t>Each technology maps to a real stage. HDFS stores data, Hive gives the structured table, Scala does the functional text processing, Spark joins and aggregates, and MLlib trains the models.</a:t>
+              <a:t>Each technology maps to a real stage. Spark and Hive read the same HDFS files.</a:t>
             </a:r>
             <a:endParaRPr lang="en-US" dirty="0"/>
           </a:p>
@@ -2569,7 +2724,7 @@
           <a:p>
             <a:r>
               <a:rPr lang="en-US" dirty="0"/>
-              <a:t>Set B is exactly set A plus 12 sentiment features, so any difference between experiments is due to sentiment alone. Missing values are imputed as 0 and always paired with an indicator flag.</a:t>
+              <a:t>Free news APIs can't reach 2013, so we used Google News RSS. Rate limits meant we couldn't query all 22,075 startups, so we sampled closed and operating startups 1:1. AUC doesn't depend on class balance.</a:t>
             </a:r>
             <a:endParaRPr lang="en-US" dirty="0"/>
           </a:p>
@@ -2657,7 +2812,7 @@
           <a:p>
             <a:r>
               <a:rPr lang="en-US" dirty="0"/>
-              <a:t>Every score can be explained by the matched words: raises, funding and expands give plus 3. It is built from immutable sets, foldLeft and pattern matching. Be upfront about the negation and stemming limits.</a:t>
+              <a:t>Matching is the hardest part. After three fixes, a hand audit still shows only 29% of matched headlines are company news; 38% are things like crimes on Craigslist. This limits what sentiment can show.</a:t>
             </a:r>
             <a:endParaRPr lang="en-US" dirty="0"/>
           </a:p>
@@ -2745,7 +2900,7 @@
           <a:p>
             <a:r>
               <a:rPr lang="en-US" dirty="0"/>
-              <a:t>An inner join would keep only the 3 startups with news. A left outer join keeps everyone. We persist the joined RDD because both feature sets reuse it, so Spark doesn't recompute the lineage from HDFS twice.</a:t>
+              <a:t>Built from immutable sets, foldLeft and pattern matching. Be upfront that most headlines are neutral, which limits the tone signal.</a:t>
             </a:r>
             <a:endParaRPr lang="en-US" dirty="0"/>
           </a:p>
@@ -2833,7 +2988,7 @@
           <a:p>
             <a:r>
               <a:rPr lang="en-US" dirty="0"/>
-              <a:t>With 87% operating, a model that always says operating looks good and is useless, and our first run did exactly that. Balanced class weights fix it. They are computed on the training split only, to avoid leakage.</a:t>
+              <a:t>Coverage tracks funding, because famous companies get news. Separating volume from tone stops a 'famous startups survive' effect being mistaken for a sentiment effect.</a:t>
             </a:r>
             <a:endParaRPr lang="en-US" dirty="0"/>
           </a:p>
@@ -3689,7 +3844,7 @@
                   <a:schemeClr val="bg2"/>
                 </a:solidFill>
               </a:rPr>
-              <a:t>A controlled 2×2 experiment on 22,075 startups with HDFS, Hive, Scala, Spark RDDs and MLlib</a:t>
+              <a:t>A leakage-controlled experiment on 22,075 startups with HDFS, Hive, Scala, Spark RDDs and MLlib</a:t>
             </a:r>
             <a:endParaRPr lang="en-US" sz="1600" dirty="0"/>
           </a:p>
@@ -3766,28 +3921,420 @@
                   <a:schemeClr val="tx2"/>
                 </a:solidFill>
               </a:rPr>
-              <a:t>Four experiments, two clear pairs</a:t>
+              <a:t>How we evaluate</a:t>
             </a:r>
             <a:endParaRPr lang="en-US" sz="2800" dirty="0"/>
           </a:p>
         </p:txBody>
       </p:sp>
-      <p:graphicFrame>
-        <p:nvGraphicFramePr>
-          <p:cNvPr id="3" name="Results chart" descr=""/>
-          <p:cNvGraphicFramePr/>
-          <p:nvPr/>
-        </p:nvGraphicFramePr>
-        <p:xfrm>
-          <a:off x="457200" y="1051560"/>
-          <a:ext cx="8229600" cy="3611880"/>
-        </p:xfrm>
-        <a:graphic xmlns:a="http://schemas.openxmlformats.org/drawingml/2006/main">
-          <a:graphicData uri="http://schemas.openxmlformats.org/drawingml/2006/chart">
-            <c:chart xmlns:c="http://schemas.openxmlformats.org/drawingml/2006/chart" r:id="rId1"/>
-          </a:graphicData>
-        </a:graphic>
-      </p:graphicFrame>
+      <p:sp>
+        <p:nvSpPr>
+          <p:cNvPr id="3" name="Eval 5-fold CV"/>
+          <p:cNvSpPr/>
+          <p:nvPr/>
+        </p:nvSpPr>
+        <p:spPr>
+          <a:xfrm>
+            <a:off x="457200" y="1188720"/>
+            <a:ext cx="4023360" cy="1417320"/>
+          </a:xfrm>
+          <a:prstGeom prst="roundRect">
+            <a:avLst>
+              <a:gd name="adj" fmla="val 5161"/>
+            </a:avLst>
+          </a:prstGeom>
+          <a:solidFill>
+            <a:schemeClr val="bg2"/>
+          </a:solidFill>
+          <a:ln w="12700">
+            <a:solidFill>
+              <a:schemeClr val="bg2"/>
+            </a:solidFill>
+            <a:prstDash val="solid"/>
+          </a:ln>
+        </p:spPr>
+      </p:sp>
+      <p:sp>
+        <p:nvSpPr>
+          <p:cNvPr id="4" name="Eval title 1"/>
+          <p:cNvSpPr txBox="1"/>
+          <p:nvPr/>
+        </p:nvSpPr>
+        <p:spPr>
+          <a:xfrm>
+            <a:off x="685800" y="1371600"/>
+            <a:ext cx="3566160" cy="365760"/>
+          </a:xfrm>
+          <a:prstGeom prst="rect">
+            <a:avLst/>
+          </a:prstGeom>
+          <a:noFill/>
+          <a:ln/>
+        </p:spPr>
+        <p:txBody>
+          <a:bodyPr wrap="square" lIns="0" tIns="0" rIns="0" bIns="0" rtlCol="0" anchor="t"/>
+          <a:lstStyle/>
+          <a:p>
+            <a:pPr indent="0" marL="0">
+              <a:buNone/>
+            </a:pPr>
+            <a:r>
+              <a:rPr lang="en-US" sz="1700" b="1" dirty="0">
+                <a:solidFill>
+                  <a:schemeClr val="tx2"/>
+                </a:solidFill>
+                <a:latin typeface="Cambria" pitchFamily="34" charset="0"/>
+                <a:ea typeface="Cambria" pitchFamily="34" charset="-122"/>
+                <a:cs typeface="Cambria" pitchFamily="34" charset="-120"/>
+              </a:rPr>
+              <a:t>5-fold CV</a:t>
+            </a:r>
+            <a:endParaRPr lang="en-US" sz="1700" dirty="0"/>
+          </a:p>
+        </p:txBody>
+      </p:sp>
+      <p:sp>
+        <p:nvSpPr>
+          <p:cNvPr id="5" name="Eval desc 1"/>
+          <p:cNvSpPr txBox="1"/>
+          <p:nvPr/>
+        </p:nvSpPr>
+        <p:spPr>
+          <a:xfrm>
+            <a:off x="685800" y="1810512"/>
+            <a:ext cx="3566160" cy="685800"/>
+          </a:xfrm>
+          <a:prstGeom prst="rect">
+            <a:avLst/>
+          </a:prstGeom>
+          <a:noFill/>
+          <a:ln/>
+        </p:spPr>
+        <p:txBody>
+          <a:bodyPr wrap="square" lIns="0" tIns="0" rIns="0" bIns="0" rtlCol="0" anchor="t"/>
+          <a:lstStyle/>
+          <a:p>
+            <a:pPr indent="0" marL="0">
+              <a:buNone/>
+            </a:pPr>
+            <a:r>
+              <a:rPr lang="en-US" sz="1300" dirty="0">
+                <a:solidFill>
+                  <a:schemeClr val="tx1"/>
+                </a:solidFill>
+              </a:rPr>
+              <a:t>stratified; the same folds for every experiment, so comparisons are paired</a:t>
+            </a:r>
+            <a:endParaRPr lang="en-US" sz="1300" dirty="0"/>
+          </a:p>
+        </p:txBody>
+      </p:sp>
+      <p:sp>
+        <p:nvSpPr>
+          <p:cNvPr id="6" name="Eval Tuned threshold"/>
+          <p:cNvSpPr/>
+          <p:nvPr/>
+        </p:nvSpPr>
+        <p:spPr>
+          <a:xfrm>
+            <a:off x="4663440" y="1188720"/>
+            <a:ext cx="4023360" cy="1417320"/>
+          </a:xfrm>
+          <a:prstGeom prst="roundRect">
+            <a:avLst>
+              <a:gd name="adj" fmla="val 5161"/>
+            </a:avLst>
+          </a:prstGeom>
+          <a:solidFill>
+            <a:schemeClr val="bg2"/>
+          </a:solidFill>
+          <a:ln w="12700">
+            <a:solidFill>
+              <a:schemeClr val="bg2"/>
+            </a:solidFill>
+            <a:prstDash val="solid"/>
+          </a:ln>
+        </p:spPr>
+      </p:sp>
+      <p:sp>
+        <p:nvSpPr>
+          <p:cNvPr id="7" name="Eval title 2"/>
+          <p:cNvSpPr txBox="1"/>
+          <p:nvPr/>
+        </p:nvSpPr>
+        <p:spPr>
+          <a:xfrm>
+            <a:off x="4892040" y="1371600"/>
+            <a:ext cx="3566160" cy="365760"/>
+          </a:xfrm>
+          <a:prstGeom prst="rect">
+            <a:avLst/>
+          </a:prstGeom>
+          <a:noFill/>
+          <a:ln/>
+        </p:spPr>
+        <p:txBody>
+          <a:bodyPr wrap="square" lIns="0" tIns="0" rIns="0" bIns="0" rtlCol="0" anchor="t"/>
+          <a:lstStyle/>
+          <a:p>
+            <a:pPr indent="0" marL="0">
+              <a:buNone/>
+            </a:pPr>
+            <a:r>
+              <a:rPr lang="en-US" sz="1700" b="1" dirty="0">
+                <a:solidFill>
+                  <a:schemeClr val="tx2"/>
+                </a:solidFill>
+                <a:latin typeface="Cambria" pitchFamily="34" charset="0"/>
+                <a:ea typeface="Cambria" pitchFamily="34" charset="-122"/>
+                <a:cs typeface="Cambria" pitchFamily="34" charset="-120"/>
+              </a:rPr>
+              <a:t>Tuned threshold</a:t>
+            </a:r>
+            <a:endParaRPr lang="en-US" sz="1700" dirty="0"/>
+          </a:p>
+        </p:txBody>
+      </p:sp>
+      <p:sp>
+        <p:nvSpPr>
+          <p:cNvPr id="8" name="Eval desc 2"/>
+          <p:cNvSpPr txBox="1"/>
+          <p:nvPr/>
+        </p:nvSpPr>
+        <p:spPr>
+          <a:xfrm>
+            <a:off x="4892040" y="1810512"/>
+            <a:ext cx="3566160" cy="685800"/>
+          </a:xfrm>
+          <a:prstGeom prst="rect">
+            <a:avLst/>
+          </a:prstGeom>
+          <a:noFill/>
+          <a:ln/>
+        </p:spPr>
+        <p:txBody>
+          <a:bodyPr wrap="square" lIns="0" tIns="0" rIns="0" bIns="0" rtlCol="0" anchor="t"/>
+          <a:lstStyle/>
+          <a:p>
+            <a:pPr indent="0" marL="0">
+              <a:buNone/>
+            </a:pPr>
+            <a:r>
+              <a:rPr lang="en-US" sz="1300" dirty="0">
+                <a:solidFill>
+                  <a:schemeClr val="tx1"/>
+                </a:solidFill>
+              </a:rPr>
+              <a:t>picked on an inner validation split; the test fold is never used</a:t>
+            </a:r>
+            <a:endParaRPr lang="en-US" sz="1300" dirty="0"/>
+          </a:p>
+        </p:txBody>
+      </p:sp>
+      <p:sp>
+        <p:nvSpPr>
+          <p:cNvPr id="9" name="Eval Paired bootstrap"/>
+          <p:cNvSpPr/>
+          <p:nvPr/>
+        </p:nvSpPr>
+        <p:spPr>
+          <a:xfrm>
+            <a:off x="457200" y="2788920"/>
+            <a:ext cx="4023360" cy="1417320"/>
+          </a:xfrm>
+          <a:prstGeom prst="roundRect">
+            <a:avLst>
+              <a:gd name="adj" fmla="val 5161"/>
+            </a:avLst>
+          </a:prstGeom>
+          <a:solidFill>
+            <a:schemeClr val="bg2"/>
+          </a:solidFill>
+          <a:ln w="12700">
+            <a:solidFill>
+              <a:schemeClr val="bg2"/>
+            </a:solidFill>
+            <a:prstDash val="solid"/>
+          </a:ln>
+        </p:spPr>
+      </p:sp>
+      <p:sp>
+        <p:nvSpPr>
+          <p:cNvPr id="10" name="Eval title 3"/>
+          <p:cNvSpPr txBox="1"/>
+          <p:nvPr/>
+        </p:nvSpPr>
+        <p:spPr>
+          <a:xfrm>
+            <a:off x="685800" y="2971800"/>
+            <a:ext cx="3566160" cy="365760"/>
+          </a:xfrm>
+          <a:prstGeom prst="rect">
+            <a:avLst/>
+          </a:prstGeom>
+          <a:noFill/>
+          <a:ln/>
+        </p:spPr>
+        <p:txBody>
+          <a:bodyPr wrap="square" lIns="0" tIns="0" rIns="0" bIns="0" rtlCol="0" anchor="t"/>
+          <a:lstStyle/>
+          <a:p>
+            <a:pPr indent="0" marL="0">
+              <a:buNone/>
+            </a:pPr>
+            <a:r>
+              <a:rPr lang="en-US" sz="1700" b="1" dirty="0">
+                <a:solidFill>
+                  <a:schemeClr val="tx2"/>
+                </a:solidFill>
+                <a:latin typeface="Cambria" pitchFamily="34" charset="0"/>
+                <a:ea typeface="Cambria" pitchFamily="34" charset="-122"/>
+                <a:cs typeface="Cambria" pitchFamily="34" charset="-120"/>
+              </a:rPr>
+              <a:t>Paired bootstrap</a:t>
+            </a:r>
+            <a:endParaRPr lang="en-US" sz="1700" dirty="0"/>
+          </a:p>
+        </p:txBody>
+      </p:sp>
+      <p:sp>
+        <p:nvSpPr>
+          <p:cNvPr id="11" name="Eval desc 3"/>
+          <p:cNvSpPr txBox="1"/>
+          <p:nvPr/>
+        </p:nvSpPr>
+        <p:spPr>
+          <a:xfrm>
+            <a:off x="685800" y="3410712"/>
+            <a:ext cx="3566160" cy="685800"/>
+          </a:xfrm>
+          <a:prstGeom prst="rect">
+            <a:avLst/>
+          </a:prstGeom>
+          <a:noFill/>
+          <a:ln/>
+        </p:spPr>
+        <p:txBody>
+          <a:bodyPr wrap="square" lIns="0" tIns="0" rIns="0" bIns="0" rtlCol="0" anchor="t"/>
+          <a:lstStyle/>
+          <a:p>
+            <a:pPr indent="0" marL="0">
+              <a:buNone/>
+            </a:pPr>
+            <a:r>
+              <a:rPr lang="en-US" sz="1300" dirty="0">
+                <a:solidFill>
+                  <a:schemeClr val="tx1"/>
+                </a:solidFill>
+              </a:rPr>
+              <a:t>2,000 resamples give a 95% CI and p-value for every “does X help?”</a:t>
+            </a:r>
+            <a:endParaRPr lang="en-US" sz="1300" dirty="0"/>
+          </a:p>
+        </p:txBody>
+      </p:sp>
+      <p:sp>
+        <p:nvSpPr>
+          <p:cNvPr id="12" name="Eval AUC first"/>
+          <p:cNvSpPr/>
+          <p:nvPr/>
+        </p:nvSpPr>
+        <p:spPr>
+          <a:xfrm>
+            <a:off x="4663440" y="2788920"/>
+            <a:ext cx="4023360" cy="1417320"/>
+          </a:xfrm>
+          <a:prstGeom prst="roundRect">
+            <a:avLst>
+              <a:gd name="adj" fmla="val 5161"/>
+            </a:avLst>
+          </a:prstGeom>
+          <a:solidFill>
+            <a:schemeClr val="bg2"/>
+          </a:solidFill>
+          <a:ln w="12700">
+            <a:solidFill>
+              <a:schemeClr val="bg2"/>
+            </a:solidFill>
+            <a:prstDash val="solid"/>
+          </a:ln>
+        </p:spPr>
+      </p:sp>
+      <p:sp>
+        <p:nvSpPr>
+          <p:cNvPr id="13" name="Eval title 4"/>
+          <p:cNvSpPr txBox="1"/>
+          <p:nvPr/>
+        </p:nvSpPr>
+        <p:spPr>
+          <a:xfrm>
+            <a:off x="4892040" y="2971800"/>
+            <a:ext cx="3566160" cy="365760"/>
+          </a:xfrm>
+          <a:prstGeom prst="rect">
+            <a:avLst/>
+          </a:prstGeom>
+          <a:noFill/>
+          <a:ln/>
+        </p:spPr>
+        <p:txBody>
+          <a:bodyPr wrap="square" lIns="0" tIns="0" rIns="0" bIns="0" rtlCol="0" anchor="t"/>
+          <a:lstStyle/>
+          <a:p>
+            <a:pPr indent="0" marL="0">
+              <a:buNone/>
+            </a:pPr>
+            <a:r>
+              <a:rPr lang="en-US" sz="1700" b="1" dirty="0">
+                <a:solidFill>
+                  <a:schemeClr val="tx2"/>
+                </a:solidFill>
+                <a:latin typeface="Cambria" pitchFamily="34" charset="0"/>
+                <a:ea typeface="Cambria" pitchFamily="34" charset="-122"/>
+                <a:cs typeface="Cambria" pitchFamily="34" charset="-120"/>
+              </a:rPr>
+              <a:t>AUC first</a:t>
+            </a:r>
+            <a:endParaRPr lang="en-US" sz="1700" dirty="0"/>
+          </a:p>
+        </p:txBody>
+      </p:sp>
+      <p:sp>
+        <p:nvSpPr>
+          <p:cNvPr id="14" name="Eval desc 4"/>
+          <p:cNvSpPr txBox="1"/>
+          <p:nvPr/>
+        </p:nvSpPr>
+        <p:spPr>
+          <a:xfrm>
+            <a:off x="4892040" y="3410712"/>
+            <a:ext cx="3566160" cy="685800"/>
+          </a:xfrm>
+          <a:prstGeom prst="rect">
+            <a:avLst/>
+          </a:prstGeom>
+          <a:noFill/>
+          <a:ln/>
+        </p:spPr>
+        <p:txBody>
+          <a:bodyPr wrap="square" lIns="0" tIns="0" rIns="0" bIns="0" rtlCol="0" anchor="t"/>
+          <a:lstStyle/>
+          <a:p>
+            <a:pPr indent="0" marL="0">
+              <a:buNone/>
+            </a:pPr>
+            <a:r>
+              <a:rPr lang="en-US" sz="1300" dirty="0">
+                <a:solidFill>
+                  <a:schemeClr val="tx1"/>
+                </a:solidFill>
+              </a:rPr>
+              <a:t>independent of class balance; our AUC matches Spark's to 6 decimals</a:t>
+            </a:r>
+            <a:endParaRPr lang="en-US" sz="1300" dirty="0"/>
+          </a:p>
+        </p:txBody>
+      </p:sp>
       <p:sp>
         <p:nvSpPr>
           <p:cNvPr id="25" name="Slide Number Placeholder 0"/>
@@ -3890,22 +4437,38 @@
                   <a:schemeClr val="tx2"/>
                 </a:solidFill>
               </a:rPr>
-              <a:t>Sentiment changed almost nothing</a:t>
+              <a:t>Finding 1: a leak worth 0.044 AUC</a:t>
             </a:r>
             <a:endParaRPr lang="en-US" sz="2800" dirty="0"/>
           </a:p>
         </p:txBody>
       </p:sp>
-      <p:sp>
-        <p:nvSpPr>
-          <p:cNvPr id="3" name="Stat dLR number"/>
+      <p:graphicFrame>
+        <p:nvGraphicFramePr>
+          <p:cNvPr id="3" name="Leakage chart" descr=""/>
+          <p:cNvGraphicFramePr/>
+          <p:nvPr/>
+        </p:nvGraphicFramePr>
+        <p:xfrm>
+          <a:off x="457200" y="1051560"/>
+          <a:ext cx="4754880" cy="3611880"/>
+        </p:xfrm>
+        <a:graphic xmlns:a="http://schemas.openxmlformats.org/drawingml/2006/main">
+          <a:graphicData uri="http://schemas.openxmlformats.org/drawingml/2006/chart">
+            <c:chart xmlns:c="http://schemas.openxmlformats.org/drawingml/2006/chart" r:id="rId1"/>
+          </a:graphicData>
+        </a:graphic>
+      </p:graphicFrame>
+      <p:sp>
+        <p:nvSpPr>
+          <p:cNvPr id="4" name="Text 1"/>
           <p:cNvSpPr txBox="1"/>
           <p:nvPr/>
         </p:nvSpPr>
         <p:spPr>
           <a:xfrm>
-            <a:off x="457200" y="1234440"/>
-            <a:ext cx="2651760" cy="685800"/>
+            <a:off x="5440680" y="1188720"/>
+            <a:ext cx="3246120" cy="3383280"/>
           </a:xfrm>
           <a:prstGeom prst="rect">
             <a:avLst/>
@@ -3914,309 +4477,79 @@
           <a:ln/>
         </p:spPr>
         <p:txBody>
-          <a:bodyPr wrap="square" lIns="0" tIns="0" rIns="0" bIns="0" rtlCol="0" anchor="t"/>
-          <a:lstStyle/>
-          <a:p>
-            <a:pPr indent="0" marL="0">
-              <a:buNone/>
-            </a:pPr>
-            <a:r>
-              <a:rPr lang="en-US" sz="2400" b="1" dirty="0">
-                <a:solidFill>
-                  <a:schemeClr val="accent3"/>
-                </a:solidFill>
-                <a:latin typeface="Cambria" pitchFamily="34" charset="0"/>
-                <a:ea typeface="Cambria" pitchFamily="34" charset="-122"/>
-                <a:cs typeface="Cambria" pitchFamily="34" charset="-120"/>
-              </a:rPr>
-              <a:t>ΔAUC −0.00003</a:t>
-            </a:r>
-            <a:endParaRPr lang="en-US" sz="2400" dirty="0"/>
-          </a:p>
-        </p:txBody>
-      </p:sp>
-      <p:sp>
-        <p:nvSpPr>
-          <p:cNvPr id="4" name="Stat dLR label"/>
-          <p:cNvSpPr txBox="1"/>
-          <p:nvPr/>
-        </p:nvSpPr>
-        <p:spPr>
-          <a:xfrm>
-            <a:off x="457200" y="1947672"/>
-            <a:ext cx="2651760" cy="548640"/>
-          </a:xfrm>
-          <a:prstGeom prst="rect">
-            <a:avLst/>
-          </a:prstGeom>
-          <a:noFill/>
-          <a:ln/>
-        </p:spPr>
-        <p:txBody>
-          <a:bodyPr wrap="square" lIns="0" tIns="0" rIns="0" bIns="0" rtlCol="0" anchor="t"/>
-          <a:lstStyle/>
-          <a:p>
-            <a:pPr indent="0" marL="0">
-              <a:buNone/>
-            </a:pPr>
-            <a:r>
-              <a:rPr lang="en-US" sz="1200" dirty="0">
+          <a:bodyPr wrap="square" rtlCol="0" anchor="t"/>
+          <a:lstStyle/>
+          <a:p>
+            <a:pPr marL="342900" indent="-342900">
+              <a:spcAft>
+                <a:spcPts val="800"/>
+              </a:spcAft>
+              <a:buSzPct val="100000"/>
+              <a:buChar char="•"/>
+            </a:pPr>
+            <a:r>
+              <a:rPr lang="en-US" sz="1300" dirty="0">
                 <a:solidFill>
                   <a:schemeClr val="tx1"/>
                 </a:solidFill>
               </a:rPr>
-              <a:t>Logistic Regression (E3 − E1)</a:t>
-            </a:r>
-            <a:endParaRPr lang="en-US" sz="1200" dirty="0"/>
-          </a:p>
-        </p:txBody>
-      </p:sp>
-      <p:sp>
-        <p:nvSpPr>
-          <p:cNvPr id="5" name="Stat dSVM number"/>
-          <p:cNvSpPr txBox="1"/>
-          <p:nvPr/>
-        </p:nvSpPr>
-        <p:spPr>
-          <a:xfrm>
-            <a:off x="3246120" y="1234440"/>
-            <a:ext cx="2651760" cy="685800"/>
-          </a:xfrm>
-          <a:prstGeom prst="rect">
-            <a:avLst/>
-          </a:prstGeom>
-          <a:noFill/>
-          <a:ln/>
-        </p:spPr>
-        <p:txBody>
-          <a:bodyPr wrap="square" lIns="0" tIns="0" rIns="0" bIns="0" rtlCol="0" anchor="t"/>
-          <a:lstStyle/>
-          <a:p>
-            <a:pPr indent="0" marL="0">
-              <a:buNone/>
-            </a:pPr>
-            <a:r>
-              <a:rPr lang="en-US" sz="2400" b="1" dirty="0">
-                <a:solidFill>
-                  <a:schemeClr val="accent3"/>
-                </a:solidFill>
-                <a:latin typeface="Cambria" pitchFamily="34" charset="0"/>
-                <a:ea typeface="Cambria" pitchFamily="34" charset="-122"/>
-                <a:cs typeface="Cambria" pitchFamily="34" charset="-120"/>
-              </a:rPr>
-              <a:t>ΔAUC +0.0005</a:t>
-            </a:r>
-            <a:endParaRPr lang="en-US" sz="2400" dirty="0"/>
-          </a:p>
-        </p:txBody>
-      </p:sp>
-      <p:sp>
-        <p:nvSpPr>
-          <p:cNvPr id="6" name="Stat dSVM label"/>
-          <p:cNvSpPr txBox="1"/>
-          <p:nvPr/>
-        </p:nvSpPr>
-        <p:spPr>
-          <a:xfrm>
-            <a:off x="3246120" y="1947672"/>
-            <a:ext cx="2651760" cy="548640"/>
-          </a:xfrm>
-          <a:prstGeom prst="rect">
-            <a:avLst/>
-          </a:prstGeom>
-          <a:noFill/>
-          <a:ln/>
-        </p:spPr>
-        <p:txBody>
-          <a:bodyPr wrap="square" lIns="0" tIns="0" rIns="0" bIns="0" rtlCol="0" anchor="t"/>
-          <a:lstStyle/>
-          <a:p>
-            <a:pPr indent="0" marL="0">
-              <a:buNone/>
-            </a:pPr>
-            <a:r>
-              <a:rPr lang="en-US" sz="1200" dirty="0">
+              <a:t>fundingDataLeakageSafe = 0 meant “raised money after 2013”, and it was the largest coefficient</a:t>
+            </a:r>
+            <a:endParaRPr lang="en-US" sz="1300" dirty="0"/>
+          </a:p>
+          <a:p>
+            <a:pPr marL="342900" indent="-342900">
+              <a:spcAft>
+                <a:spcPts val="800"/>
+              </a:spcAft>
+              <a:buSzPct val="100000"/>
+              <a:buChar char="•"/>
+            </a:pPr>
+            <a:r>
+              <a:rPr lang="en-US" sz="1300" dirty="0">
                 <a:solidFill>
                   <a:schemeClr val="tx1"/>
                 </a:solidFill>
               </a:rPr>
-              <a:t>Linear SVM (E4 − E2): identical predictions</a:t>
-            </a:r>
-            <a:endParaRPr lang="en-US" sz="1200" dirty="0"/>
-          </a:p>
-        </p:txBody>
-      </p:sp>
-      <p:sp>
-        <p:nvSpPr>
-          <p:cNvPr id="7" name="Stat coverage number"/>
-          <p:cNvSpPr txBox="1"/>
-          <p:nvPr/>
-        </p:nvSpPr>
-        <p:spPr>
-          <a:xfrm>
-            <a:off x="6035040" y="1234440"/>
-            <a:ext cx="2651760" cy="685800"/>
-          </a:xfrm>
-          <a:prstGeom prst="rect">
-            <a:avLst/>
-          </a:prstGeom>
-          <a:noFill/>
-          <a:ln/>
-        </p:spPr>
-        <p:txBody>
-          <a:bodyPr wrap="square" lIns="0" tIns="0" rIns="0" bIns="0" rtlCol="0" anchor="t"/>
-          <a:lstStyle/>
-          <a:p>
-            <a:pPr indent="0" marL="0">
-              <a:buNone/>
-            </a:pPr>
-            <a:r>
-              <a:rPr lang="en-US" sz="3000" b="1" dirty="0">
-                <a:solidFill>
-                  <a:schemeClr val="accent2"/>
-                </a:solidFill>
-                <a:latin typeface="Cambria" pitchFamily="34" charset="0"/>
-                <a:ea typeface="Cambria" pitchFamily="34" charset="-122"/>
-                <a:cs typeface="Cambria" pitchFamily="34" charset="-120"/>
-              </a:rPr>
-              <a:t>3 / 22,075</a:t>
-            </a:r>
-            <a:endParaRPr lang="en-US" sz="3000" dirty="0"/>
-          </a:p>
-        </p:txBody>
-      </p:sp>
-      <p:sp>
-        <p:nvSpPr>
-          <p:cNvPr id="8" name="Stat coverage label"/>
-          <p:cNvSpPr txBox="1"/>
-          <p:nvPr/>
-        </p:nvSpPr>
-        <p:spPr>
-          <a:xfrm>
-            <a:off x="6035040" y="1947672"/>
-            <a:ext cx="2651760" cy="548640"/>
-          </a:xfrm>
-          <a:prstGeom prst="rect">
-            <a:avLst/>
-          </a:prstGeom>
-          <a:noFill/>
-          <a:ln/>
-        </p:spPr>
-        <p:txBody>
-          <a:bodyPr wrap="square" lIns="0" tIns="0" rIns="0" bIns="0" rtlCol="0" anchor="t"/>
-          <a:lstStyle/>
-          <a:p>
-            <a:pPr indent="0" marL="0">
-              <a:buNone/>
-            </a:pPr>
-            <a:r>
-              <a:rPr lang="en-US" sz="1200" dirty="0">
+              <a:t>LR ΔAUC −0.044 [−0.054, −0.034], SVM −0.028; both p &lt; 0.001</a:t>
+            </a:r>
+            <a:endParaRPr lang="en-US" sz="1300" dirty="0"/>
+          </a:p>
+          <a:p>
+            <a:pPr marL="342900" indent="-342900">
+              <a:spcAft>
+                <a:spcPts val="800"/>
+              </a:spcAft>
+              <a:buSzPct val="100000"/>
+              <a:buChar char="•"/>
+            </a:pPr>
+            <a:r>
+              <a:rPr lang="en-US" sz="1300" dirty="0">
                 <a:solidFill>
                   <a:schemeClr val="tx1"/>
                 </a:solidFill>
               </a:rPr>
-              <a:t>startups with any matched news (0.014%)</a:t>
-            </a:r>
-            <a:endParaRPr lang="en-US" sz="1200" dirty="0"/>
-          </a:p>
-        </p:txBody>
-      </p:sp>
-      <p:sp>
-        <p:nvSpPr>
-          <p:cNvPr id="9" name="Interpretation card"/>
-          <p:cNvSpPr/>
-          <p:nvPr/>
-        </p:nvSpPr>
-        <p:spPr>
-          <a:xfrm>
-            <a:off x="457200" y="2834640"/>
-            <a:ext cx="8229600" cy="1691640"/>
-          </a:xfrm>
-          <a:prstGeom prst="roundRect">
-            <a:avLst>
-              <a:gd name="adj" fmla="val 4324"/>
-            </a:avLst>
-          </a:prstGeom>
-          <a:solidFill>
-            <a:schemeClr val="bg2"/>
-          </a:solidFill>
-          <a:ln w="12700">
-            <a:solidFill>
-              <a:schemeClr val="bg2"/>
-            </a:solidFill>
-            <a:prstDash val="solid"/>
-          </a:ln>
-        </p:spPr>
-      </p:sp>
-      <p:sp>
-        <p:nvSpPr>
-          <p:cNvPr id="10" name="Interpretation title"/>
-          <p:cNvSpPr txBox="1"/>
-          <p:nvPr/>
-        </p:nvSpPr>
-        <p:spPr>
-          <a:xfrm>
-            <a:off x="685800" y="2971800"/>
-            <a:ext cx="7772400" cy="365760"/>
-          </a:xfrm>
-          <a:prstGeom prst="rect">
-            <a:avLst/>
-          </a:prstGeom>
-          <a:noFill/>
-          <a:ln/>
-        </p:spPr>
-        <p:txBody>
-          <a:bodyPr wrap="square" lIns="0" tIns="0" rIns="0" bIns="0" rtlCol="0" anchor="t"/>
-          <a:lstStyle/>
-          <a:p>
-            <a:pPr indent="0" marL="0">
-              <a:buNone/>
-            </a:pPr>
-            <a:r>
-              <a:rPr lang="en-US" sz="1700" b="1" dirty="0">
-                <a:solidFill>
-                  <a:schemeClr val="tx2"/>
-                </a:solidFill>
-              </a:rPr>
-              <a:t>Inconclusive, not negative</a:t>
-            </a:r>
-            <a:endParaRPr lang="en-US" sz="1700" dirty="0"/>
-          </a:p>
-        </p:txBody>
-      </p:sp>
-      <p:sp>
-        <p:nvSpPr>
-          <p:cNvPr id="11" name="Interpretation body"/>
-          <p:cNvSpPr txBox="1"/>
-          <p:nvPr/>
-        </p:nvSpPr>
-        <p:spPr>
-          <a:xfrm>
-            <a:off x="685800" y="3383280"/>
-            <a:ext cx="7772400" cy="1051560"/>
-          </a:xfrm>
-          <a:prstGeom prst="rect">
-            <a:avLst/>
-          </a:prstGeom>
-          <a:noFill/>
-          <a:ln/>
-        </p:spPr>
-        <p:txBody>
-          <a:bodyPr wrap="square" lIns="0" tIns="0" rIns="0" bIns="0" rtlCol="0" anchor="t"/>
-          <a:lstStyle/>
-          <a:p>
-            <a:pPr indent="0" marL="0">
-              <a:buNone/>
-            </a:pPr>
-            <a:r>
-              <a:rPr lang="en-US" sz="1400" dirty="0">
+              <a:t>Leak-free features still give AUC 0.679</a:t>
+            </a:r>
+            <a:endParaRPr lang="en-US" sz="1300" dirty="0"/>
+          </a:p>
+          <a:p>
+            <a:pPr marL="342900" indent="-342900">
+              <a:spcAft>
+                <a:spcPts val="800"/>
+              </a:spcAft>
+              <a:buSzPct val="100000"/>
+              <a:buChar char="•"/>
+            </a:pPr>
+            <a:r>
+              <a:rPr lang="en-US" sz="1300" dirty="0">
                 <a:solidFill>
                   <a:schemeClr val="tx1"/>
                 </a:solidFill>
               </a:rPr>
-              <a:t>For 22,072 startups, every sentiment feature is a constant zero baseline, so the two feature sets are effectively identical. The experiment had no power to detect a sentiment effect. Batch news collection was planned but never run.</a:t>
-            </a:r>
-            <a:endParaRPr lang="en-US" sz="1400" dirty="0"/>
+              <a:t>Lesson: a missing-value flag is itself a feature</a:t>
+            </a:r>
+            <a:endParaRPr lang="en-US" sz="1300" dirty="0"/>
           </a:p>
         </p:txBody>
       </p:sp>
@@ -4322,7 +4655,7 @@
                   <a:schemeClr val="tx2"/>
                 </a:solidFill>
               </a:rPr>
-              <a:t>Logistic Regression vs SVM: a threshold trade-off</a:t>
+              <a:t>Finding 2: tone helps a little, volume doesn't</a:t>
             </a:r>
             <a:endParaRPr lang="en-US" sz="2800" dirty="0"/>
           </a:p>
@@ -4330,13 +4663,13 @@
       </p:sp>
       <p:graphicFrame>
         <p:nvGraphicFramePr>
-          <p:cNvPr id="3" name="Model chart" descr=""/>
+          <p:cNvPr id="3" name="Ablation chart" descr=""/>
           <p:cNvGraphicFramePr/>
           <p:nvPr/>
         </p:nvGraphicFramePr>
         <p:xfrm>
           <a:off x="457200" y="1051560"/>
-          <a:ext cx="5120640" cy="3611880"/>
+          <a:ext cx="4754880" cy="3611880"/>
         </p:xfrm>
         <a:graphic xmlns:a="http://schemas.openxmlformats.org/drawingml/2006/main">
           <a:graphicData uri="http://schemas.openxmlformats.org/drawingml/2006/chart">
@@ -4344,16 +4677,1418 @@
           </a:graphicData>
         </a:graphic>
       </p:graphicFrame>
-      <p:sp>
-        <p:nvSpPr>
-          <p:cNvPr id="4" name="Text 1"/>
+      <p:graphicFrame>
+        <p:nvGraphicFramePr>
+          <p:cNvPr id="13" name="Significance table"/>
+          <p:cNvGraphicFramePr>
+            <a:graphicFrameLocks noGrp="1"/>
+          </p:cNvGraphicFramePr>
+          <p:nvPr>
+            <p:extLst>
+              <p:ext uri="{D42A27DB-BD31-4B8C-83A1-F6EECF244321}">
+                <p14:modId xmlns:p14="http://schemas.microsoft.com/office/powerpoint/2010/main" val="1579011935"/>
+              </p:ext>
+            </p:extLst>
+          </p:nvPr>
+        </p:nvGraphicFramePr>
+        <p:xfrm>
+          <a:off x="5349240" y="1234440"/>
+          <a:ext cx="3337560" cy="914400"/>
+        </p:xfrm>
+        <a:graphic>
+          <a:graphicData uri="http://schemas.openxmlformats.org/drawingml/2006/table">
+            <a:tbl>
+              <a:tblPr/>
+              <a:tblGrid>
+                <a:gridCol w="621792"/>
+                <a:gridCol w="566928"/>
+                <a:gridCol w="1554480"/>
+                <a:gridCol w="594360"/>
+              </a:tblGrid>
+              <a:tr h="0">
+                <a:tc>
+                  <a:txBody>
+                    <a:bodyPr/>
+                    <a:lstStyle/>
+                    <a:p>
+                      <a:pPr indent="0" marL="0">
+                        <a:buNone/>
+                      </a:pPr>
+                      <a:r>
+                        <a:rPr lang="en-US" sz="1000" b="1" dirty="0">
+                          <a:solidFill>
+                            <a:srgbClr val="1B2333"/>
+                          </a:solidFill>
+                          <a:latin typeface="+mn-lt" pitchFamily="34" charset="0"/>
+                          <a:ea typeface="+mn-lt" pitchFamily="34" charset="-122"/>
+                          <a:cs typeface="+mn-lt" pitchFamily="34" charset="-120"/>
+                        </a:rPr>
+                        <a:t>Added</a:t>
+                      </a:r>
+                      <a:endParaRPr lang="en-US" sz="1000" dirty="0">
+                        <a:latin typeface="+mn-lt" charset="0"/>
+                        <a:ea typeface="+mn-lt" charset="0"/>
+                        <a:cs typeface="+mn-lt" charset="0"/>
+                      </a:endParaRPr>
+                    </a:p>
+                  </a:txBody>
+                  <a:tcPr marL="91440" marR="91440" marT="45720" marB="45720">
+                    <a:lnL w="6350" cap="flat" cmpd="sng" algn="ctr">
+                      <a:solidFill>
+                        <a:srgbClr val="D9DEE5"/>
+                      </a:solidFill>
+                      <a:prstDash val="solid"/>
+                      <a:round/>
+                      <a:headEnd type="none" w="med" len="med"/>
+                      <a:tailEnd type="none" w="med" len="med"/>
+                    </a:lnL>
+                    <a:lnR w="6350" cap="flat" cmpd="sng" algn="ctr">
+                      <a:solidFill>
+                        <a:srgbClr val="D9DEE5"/>
+                      </a:solidFill>
+                      <a:prstDash val="solid"/>
+                      <a:round/>
+                      <a:headEnd type="none" w="med" len="med"/>
+                      <a:tailEnd type="none" w="med" len="med"/>
+                    </a:lnR>
+                    <a:lnT w="6350" cap="flat" cmpd="sng" algn="ctr">
+                      <a:solidFill>
+                        <a:srgbClr val="D9DEE5"/>
+                      </a:solidFill>
+                      <a:prstDash val="solid"/>
+                      <a:round/>
+                      <a:headEnd type="none" w="med" len="med"/>
+                      <a:tailEnd type="none" w="med" len="med"/>
+                    </a:lnT>
+                    <a:lnB w="6350" cap="flat" cmpd="sng" algn="ctr">
+                      <a:solidFill>
+                        <a:srgbClr val="D9DEE5"/>
+                      </a:solidFill>
+                      <a:prstDash val="solid"/>
+                      <a:round/>
+                      <a:headEnd type="none" w="med" len="med"/>
+                      <a:tailEnd type="none" w="med" len="med"/>
+                    </a:lnB>
+                    <a:solidFill>
+                      <a:srgbClr val="FFFFFF"/>
+                    </a:solidFill>
+                  </a:tcPr>
+                </a:tc>
+                <a:tc>
+                  <a:txBody>
+                    <a:bodyPr/>
+                    <a:lstStyle/>
+                    <a:p>
+                      <a:pPr indent="0" marL="0">
+                        <a:buNone/>
+                      </a:pPr>
+                      <a:r>
+                        <a:rPr lang="en-US" sz="1000" b="1" dirty="0">
+                          <a:solidFill>
+                            <a:srgbClr val="1B2333"/>
+                          </a:solidFill>
+                          <a:latin typeface="+mn-lt" pitchFamily="34" charset="0"/>
+                          <a:ea typeface="+mn-lt" pitchFamily="34" charset="-122"/>
+                          <a:cs typeface="+mn-lt" pitchFamily="34" charset="-120"/>
+                        </a:rPr>
+                        <a:t>Model</a:t>
+                      </a:r>
+                      <a:endParaRPr lang="en-US" sz="1000" dirty="0">
+                        <a:latin typeface="+mn-lt" charset="0"/>
+                        <a:ea typeface="+mn-lt" charset="0"/>
+                        <a:cs typeface="+mn-lt" charset="0"/>
+                      </a:endParaRPr>
+                    </a:p>
+                  </a:txBody>
+                  <a:tcPr marL="91440" marR="91440" marT="45720" marB="45720">
+                    <a:lnL w="6350" cap="flat" cmpd="sng" algn="ctr">
+                      <a:solidFill>
+                        <a:srgbClr val="D9DEE5"/>
+                      </a:solidFill>
+                      <a:prstDash val="solid"/>
+                      <a:round/>
+                      <a:headEnd type="none" w="med" len="med"/>
+                      <a:tailEnd type="none" w="med" len="med"/>
+                    </a:lnL>
+                    <a:lnR w="6350" cap="flat" cmpd="sng" algn="ctr">
+                      <a:solidFill>
+                        <a:srgbClr val="D9DEE5"/>
+                      </a:solidFill>
+                      <a:prstDash val="solid"/>
+                      <a:round/>
+                      <a:headEnd type="none" w="med" len="med"/>
+                      <a:tailEnd type="none" w="med" len="med"/>
+                    </a:lnR>
+                    <a:lnT w="6350" cap="flat" cmpd="sng" algn="ctr">
+                      <a:solidFill>
+                        <a:srgbClr val="D9DEE5"/>
+                      </a:solidFill>
+                      <a:prstDash val="solid"/>
+                      <a:round/>
+                      <a:headEnd type="none" w="med" len="med"/>
+                      <a:tailEnd type="none" w="med" len="med"/>
+                    </a:lnT>
+                    <a:lnB w="6350" cap="flat" cmpd="sng" algn="ctr">
+                      <a:solidFill>
+                        <a:srgbClr val="D9DEE5"/>
+                      </a:solidFill>
+                      <a:prstDash val="solid"/>
+                      <a:round/>
+                      <a:headEnd type="none" w="med" len="med"/>
+                      <a:tailEnd type="none" w="med" len="med"/>
+                    </a:lnB>
+                    <a:solidFill>
+                      <a:srgbClr val="FFFFFF"/>
+                    </a:solidFill>
+                  </a:tcPr>
+                </a:tc>
+                <a:tc>
+                  <a:txBody>
+                    <a:bodyPr/>
+                    <a:lstStyle/>
+                    <a:p>
+                      <a:pPr indent="0" marL="0">
+                        <a:buNone/>
+                      </a:pPr>
+                      <a:r>
+                        <a:rPr lang="en-US" sz="1000" b="1" dirty="0">
+                          <a:solidFill>
+                            <a:srgbClr val="1B2333"/>
+                          </a:solidFill>
+                          <a:latin typeface="+mn-lt" pitchFamily="34" charset="0"/>
+                          <a:ea typeface="+mn-lt" pitchFamily="34" charset="-122"/>
+                          <a:cs typeface="+mn-lt" pitchFamily="34" charset="-120"/>
+                        </a:rPr>
+                        <a:t>ΔAUC [95% CI]</a:t>
+                      </a:r>
+                      <a:endParaRPr lang="en-US" sz="1000" dirty="0">
+                        <a:latin typeface="+mn-lt" charset="0"/>
+                        <a:ea typeface="+mn-lt" charset="0"/>
+                        <a:cs typeface="+mn-lt" charset="0"/>
+                      </a:endParaRPr>
+                    </a:p>
+                  </a:txBody>
+                  <a:tcPr marL="91440" marR="91440" marT="45720" marB="45720">
+                    <a:lnL w="6350" cap="flat" cmpd="sng" algn="ctr">
+                      <a:solidFill>
+                        <a:srgbClr val="D9DEE5"/>
+                      </a:solidFill>
+                      <a:prstDash val="solid"/>
+                      <a:round/>
+                      <a:headEnd type="none" w="med" len="med"/>
+                      <a:tailEnd type="none" w="med" len="med"/>
+                    </a:lnL>
+                    <a:lnR w="6350" cap="flat" cmpd="sng" algn="ctr">
+                      <a:solidFill>
+                        <a:srgbClr val="D9DEE5"/>
+                      </a:solidFill>
+                      <a:prstDash val="solid"/>
+                      <a:round/>
+                      <a:headEnd type="none" w="med" len="med"/>
+                      <a:tailEnd type="none" w="med" len="med"/>
+                    </a:lnR>
+                    <a:lnT w="6350" cap="flat" cmpd="sng" algn="ctr">
+                      <a:solidFill>
+                        <a:srgbClr val="D9DEE5"/>
+                      </a:solidFill>
+                      <a:prstDash val="solid"/>
+                      <a:round/>
+                      <a:headEnd type="none" w="med" len="med"/>
+                      <a:tailEnd type="none" w="med" len="med"/>
+                    </a:lnT>
+                    <a:lnB w="6350" cap="flat" cmpd="sng" algn="ctr">
+                      <a:solidFill>
+                        <a:srgbClr val="D9DEE5"/>
+                      </a:solidFill>
+                      <a:prstDash val="solid"/>
+                      <a:round/>
+                      <a:headEnd type="none" w="med" len="med"/>
+                      <a:tailEnd type="none" w="med" len="med"/>
+                    </a:lnB>
+                    <a:solidFill>
+                      <a:srgbClr val="FFFFFF"/>
+                    </a:solidFill>
+                  </a:tcPr>
+                </a:tc>
+                <a:tc>
+                  <a:txBody>
+                    <a:bodyPr/>
+                    <a:lstStyle/>
+                    <a:p>
+                      <a:pPr indent="0" marL="0">
+                        <a:buNone/>
+                      </a:pPr>
+                      <a:r>
+                        <a:rPr lang="en-US" sz="1000" b="1" dirty="0">
+                          <a:solidFill>
+                            <a:srgbClr val="1B2333"/>
+                          </a:solidFill>
+                          <a:latin typeface="+mn-lt" pitchFamily="34" charset="0"/>
+                          <a:ea typeface="+mn-lt" pitchFamily="34" charset="-122"/>
+                          <a:cs typeface="+mn-lt" pitchFamily="34" charset="-120"/>
+                        </a:rPr>
+                        <a:t>p</a:t>
+                      </a:r>
+                      <a:endParaRPr lang="en-US" sz="1000" dirty="0">
+                        <a:latin typeface="+mn-lt" charset="0"/>
+                        <a:ea typeface="+mn-lt" charset="0"/>
+                        <a:cs typeface="+mn-lt" charset="0"/>
+                      </a:endParaRPr>
+                    </a:p>
+                  </a:txBody>
+                  <a:tcPr marL="91440" marR="91440" marT="45720" marB="45720">
+                    <a:lnL w="6350" cap="flat" cmpd="sng" algn="ctr">
+                      <a:solidFill>
+                        <a:srgbClr val="D9DEE5"/>
+                      </a:solidFill>
+                      <a:prstDash val="solid"/>
+                      <a:round/>
+                      <a:headEnd type="none" w="med" len="med"/>
+                      <a:tailEnd type="none" w="med" len="med"/>
+                    </a:lnL>
+                    <a:lnR w="6350" cap="flat" cmpd="sng" algn="ctr">
+                      <a:solidFill>
+                        <a:srgbClr val="D9DEE5"/>
+                      </a:solidFill>
+                      <a:prstDash val="solid"/>
+                      <a:round/>
+                      <a:headEnd type="none" w="med" len="med"/>
+                      <a:tailEnd type="none" w="med" len="med"/>
+                    </a:lnR>
+                    <a:lnT w="6350" cap="flat" cmpd="sng" algn="ctr">
+                      <a:solidFill>
+                        <a:srgbClr val="D9DEE5"/>
+                      </a:solidFill>
+                      <a:prstDash val="solid"/>
+                      <a:round/>
+                      <a:headEnd type="none" w="med" len="med"/>
+                      <a:tailEnd type="none" w="med" len="med"/>
+                    </a:lnT>
+                    <a:lnB w="6350" cap="flat" cmpd="sng" algn="ctr">
+                      <a:solidFill>
+                        <a:srgbClr val="D9DEE5"/>
+                      </a:solidFill>
+                      <a:prstDash val="solid"/>
+                      <a:round/>
+                      <a:headEnd type="none" w="med" len="med"/>
+                      <a:tailEnd type="none" w="med" len="med"/>
+                    </a:lnB>
+                    <a:solidFill>
+                      <a:srgbClr val="FFFFFF"/>
+                    </a:solidFill>
+                  </a:tcPr>
+                </a:tc>
+              </a:tr>
+              <a:tr h="0">
+                <a:tc>
+                  <a:txBody>
+                    <a:bodyPr/>
+                    <a:lstStyle/>
+                    <a:p>
+                      <a:pPr indent="0" marL="0">
+                        <a:buNone/>
+                      </a:pPr>
+                      <a:r>
+                        <a:rPr lang="en-US" sz="1000" dirty="0">
+                          <a:solidFill>
+                            <a:srgbClr val="1B2333"/>
+                          </a:solidFill>
+                          <a:latin typeface="+mn-lt" pitchFamily="34" charset="0"/>
+                          <a:ea typeface="+mn-lt" pitchFamily="34" charset="-122"/>
+                          <a:cs typeface="+mn-lt" pitchFamily="34" charset="-120"/>
+                        </a:rPr>
+                        <a:t>Volume</a:t>
+                      </a:r>
+                      <a:endParaRPr lang="en-US" sz="1000" dirty="0">
+                        <a:latin typeface="+mn-lt" charset="0"/>
+                        <a:ea typeface="+mn-lt" charset="0"/>
+                        <a:cs typeface="+mn-lt" charset="0"/>
+                      </a:endParaRPr>
+                    </a:p>
+                  </a:txBody>
+                  <a:tcPr marL="91440" marR="91440" marT="45720" marB="45720">
+                    <a:lnL w="6350" cap="flat" cmpd="sng" algn="ctr">
+                      <a:solidFill>
+                        <a:srgbClr val="D9DEE5"/>
+                      </a:solidFill>
+                      <a:prstDash val="solid"/>
+                      <a:round/>
+                      <a:headEnd type="none" w="med" len="med"/>
+                      <a:tailEnd type="none" w="med" len="med"/>
+                    </a:lnL>
+                    <a:lnR w="6350" cap="flat" cmpd="sng" algn="ctr">
+                      <a:solidFill>
+                        <a:srgbClr val="D9DEE5"/>
+                      </a:solidFill>
+                      <a:prstDash val="solid"/>
+                      <a:round/>
+                      <a:headEnd type="none" w="med" len="med"/>
+                      <a:tailEnd type="none" w="med" len="med"/>
+                    </a:lnR>
+                    <a:lnT w="6350" cap="flat" cmpd="sng" algn="ctr">
+                      <a:solidFill>
+                        <a:srgbClr val="D9DEE5"/>
+                      </a:solidFill>
+                      <a:prstDash val="solid"/>
+                      <a:round/>
+                      <a:headEnd type="none" w="med" len="med"/>
+                      <a:tailEnd type="none" w="med" len="med"/>
+                    </a:lnT>
+                    <a:lnB w="6350" cap="flat" cmpd="sng" algn="ctr">
+                      <a:solidFill>
+                        <a:srgbClr val="D9DEE5"/>
+                      </a:solidFill>
+                      <a:prstDash val="solid"/>
+                      <a:round/>
+                      <a:headEnd type="none" w="med" len="med"/>
+                      <a:tailEnd type="none" w="med" len="med"/>
+                    </a:lnB>
+                    <a:solidFill>
+                      <a:srgbClr val="FFFFFF"/>
+                    </a:solidFill>
+                  </a:tcPr>
+                </a:tc>
+                <a:tc>
+                  <a:txBody>
+                    <a:bodyPr/>
+                    <a:lstStyle/>
+                    <a:p>
+                      <a:pPr indent="0" marL="0">
+                        <a:buNone/>
+                      </a:pPr>
+                      <a:r>
+                        <a:rPr lang="en-US" sz="1000" dirty="0">
+                          <a:solidFill>
+                            <a:srgbClr val="1B2333"/>
+                          </a:solidFill>
+                          <a:latin typeface="+mn-lt" pitchFamily="34" charset="0"/>
+                          <a:ea typeface="+mn-lt" pitchFamily="34" charset="-122"/>
+                          <a:cs typeface="+mn-lt" pitchFamily="34" charset="-120"/>
+                        </a:rPr>
+                        <a:t>LR</a:t>
+                      </a:r>
+                      <a:endParaRPr lang="en-US" sz="1000" dirty="0">
+                        <a:latin typeface="+mn-lt" charset="0"/>
+                        <a:ea typeface="+mn-lt" charset="0"/>
+                        <a:cs typeface="+mn-lt" charset="0"/>
+                      </a:endParaRPr>
+                    </a:p>
+                  </a:txBody>
+                  <a:tcPr marL="91440" marR="91440" marT="45720" marB="45720">
+                    <a:lnL w="6350" cap="flat" cmpd="sng" algn="ctr">
+                      <a:solidFill>
+                        <a:srgbClr val="D9DEE5"/>
+                      </a:solidFill>
+                      <a:prstDash val="solid"/>
+                      <a:round/>
+                      <a:headEnd type="none" w="med" len="med"/>
+                      <a:tailEnd type="none" w="med" len="med"/>
+                    </a:lnL>
+                    <a:lnR w="6350" cap="flat" cmpd="sng" algn="ctr">
+                      <a:solidFill>
+                        <a:srgbClr val="D9DEE5"/>
+                      </a:solidFill>
+                      <a:prstDash val="solid"/>
+                      <a:round/>
+                      <a:headEnd type="none" w="med" len="med"/>
+                      <a:tailEnd type="none" w="med" len="med"/>
+                    </a:lnR>
+                    <a:lnT w="6350" cap="flat" cmpd="sng" algn="ctr">
+                      <a:solidFill>
+                        <a:srgbClr val="D9DEE5"/>
+                      </a:solidFill>
+                      <a:prstDash val="solid"/>
+                      <a:round/>
+                      <a:headEnd type="none" w="med" len="med"/>
+                      <a:tailEnd type="none" w="med" len="med"/>
+                    </a:lnT>
+                    <a:lnB w="6350" cap="flat" cmpd="sng" algn="ctr">
+                      <a:solidFill>
+                        <a:srgbClr val="D9DEE5"/>
+                      </a:solidFill>
+                      <a:prstDash val="solid"/>
+                      <a:round/>
+                      <a:headEnd type="none" w="med" len="med"/>
+                      <a:tailEnd type="none" w="med" len="med"/>
+                    </a:lnB>
+                    <a:solidFill>
+                      <a:srgbClr val="FFFFFF"/>
+                    </a:solidFill>
+                  </a:tcPr>
+                </a:tc>
+                <a:tc>
+                  <a:txBody>
+                    <a:bodyPr/>
+                    <a:lstStyle/>
+                    <a:p>
+                      <a:pPr indent="0" marL="0">
+                        <a:buNone/>
+                      </a:pPr>
+                      <a:r>
+                        <a:rPr lang="en-US" sz="1000" dirty="0">
+                          <a:solidFill>
+                            <a:srgbClr val="1B2333"/>
+                          </a:solidFill>
+                          <a:latin typeface="+mn-lt" pitchFamily="34" charset="0"/>
+                          <a:ea typeface="+mn-lt" pitchFamily="34" charset="-122"/>
+                          <a:cs typeface="+mn-lt" pitchFamily="34" charset="-120"/>
+                        </a:rPr>
+                        <a:t>+0.001 [−0.010, 0.012]</a:t>
+                      </a:r>
+                      <a:endParaRPr lang="en-US" sz="1000" dirty="0">
+                        <a:latin typeface="+mn-lt" charset="0"/>
+                        <a:ea typeface="+mn-lt" charset="0"/>
+                        <a:cs typeface="+mn-lt" charset="0"/>
+                      </a:endParaRPr>
+                    </a:p>
+                  </a:txBody>
+                  <a:tcPr marL="91440" marR="91440" marT="45720" marB="45720">
+                    <a:lnL w="6350" cap="flat" cmpd="sng" algn="ctr">
+                      <a:solidFill>
+                        <a:srgbClr val="D9DEE5"/>
+                      </a:solidFill>
+                      <a:prstDash val="solid"/>
+                      <a:round/>
+                      <a:headEnd type="none" w="med" len="med"/>
+                      <a:tailEnd type="none" w="med" len="med"/>
+                    </a:lnL>
+                    <a:lnR w="6350" cap="flat" cmpd="sng" algn="ctr">
+                      <a:solidFill>
+                        <a:srgbClr val="D9DEE5"/>
+                      </a:solidFill>
+                      <a:prstDash val="solid"/>
+                      <a:round/>
+                      <a:headEnd type="none" w="med" len="med"/>
+                      <a:tailEnd type="none" w="med" len="med"/>
+                    </a:lnR>
+                    <a:lnT w="6350" cap="flat" cmpd="sng" algn="ctr">
+                      <a:solidFill>
+                        <a:srgbClr val="D9DEE5"/>
+                      </a:solidFill>
+                      <a:prstDash val="solid"/>
+                      <a:round/>
+                      <a:headEnd type="none" w="med" len="med"/>
+                      <a:tailEnd type="none" w="med" len="med"/>
+                    </a:lnT>
+                    <a:lnB w="6350" cap="flat" cmpd="sng" algn="ctr">
+                      <a:solidFill>
+                        <a:srgbClr val="D9DEE5"/>
+                      </a:solidFill>
+                      <a:prstDash val="solid"/>
+                      <a:round/>
+                      <a:headEnd type="none" w="med" len="med"/>
+                      <a:tailEnd type="none" w="med" len="med"/>
+                    </a:lnB>
+                    <a:solidFill>
+                      <a:srgbClr val="FFFFFF"/>
+                    </a:solidFill>
+                  </a:tcPr>
+                </a:tc>
+                <a:tc>
+                  <a:txBody>
+                    <a:bodyPr/>
+                    <a:lstStyle/>
+                    <a:p>
+                      <a:pPr indent="0" marL="0">
+                        <a:buNone/>
+                      </a:pPr>
+                      <a:r>
+                        <a:rPr lang="en-US" sz="1000" dirty="0">
+                          <a:solidFill>
+                            <a:srgbClr val="1B2333"/>
+                          </a:solidFill>
+                          <a:latin typeface="+mn-lt" pitchFamily="34" charset="0"/>
+                          <a:ea typeface="+mn-lt" pitchFamily="34" charset="-122"/>
+                          <a:cs typeface="+mn-lt" pitchFamily="34" charset="-120"/>
+                        </a:rPr>
+                        <a:t>0.80</a:t>
+                      </a:r>
+                      <a:endParaRPr lang="en-US" sz="1000" dirty="0">
+                        <a:latin typeface="+mn-lt" charset="0"/>
+                        <a:ea typeface="+mn-lt" charset="0"/>
+                        <a:cs typeface="+mn-lt" charset="0"/>
+                      </a:endParaRPr>
+                    </a:p>
+                  </a:txBody>
+                  <a:tcPr marL="91440" marR="91440" marT="45720" marB="45720">
+                    <a:lnL w="6350" cap="flat" cmpd="sng" algn="ctr">
+                      <a:solidFill>
+                        <a:srgbClr val="D9DEE5"/>
+                      </a:solidFill>
+                      <a:prstDash val="solid"/>
+                      <a:round/>
+                      <a:headEnd type="none" w="med" len="med"/>
+                      <a:tailEnd type="none" w="med" len="med"/>
+                    </a:lnL>
+                    <a:lnR w="6350" cap="flat" cmpd="sng" algn="ctr">
+                      <a:solidFill>
+                        <a:srgbClr val="D9DEE5"/>
+                      </a:solidFill>
+                      <a:prstDash val="solid"/>
+                      <a:round/>
+                      <a:headEnd type="none" w="med" len="med"/>
+                      <a:tailEnd type="none" w="med" len="med"/>
+                    </a:lnR>
+                    <a:lnT w="6350" cap="flat" cmpd="sng" algn="ctr">
+                      <a:solidFill>
+                        <a:srgbClr val="D9DEE5"/>
+                      </a:solidFill>
+                      <a:prstDash val="solid"/>
+                      <a:round/>
+                      <a:headEnd type="none" w="med" len="med"/>
+                      <a:tailEnd type="none" w="med" len="med"/>
+                    </a:lnT>
+                    <a:lnB w="6350" cap="flat" cmpd="sng" algn="ctr">
+                      <a:solidFill>
+                        <a:srgbClr val="D9DEE5"/>
+                      </a:solidFill>
+                      <a:prstDash val="solid"/>
+                      <a:round/>
+                      <a:headEnd type="none" w="med" len="med"/>
+                      <a:tailEnd type="none" w="med" len="med"/>
+                    </a:lnB>
+                    <a:solidFill>
+                      <a:srgbClr val="FFFFFF"/>
+                    </a:solidFill>
+                  </a:tcPr>
+                </a:tc>
+              </a:tr>
+              <a:tr h="0">
+                <a:tc>
+                  <a:txBody>
+                    <a:bodyPr/>
+                    <a:lstStyle/>
+                    <a:p>
+                      <a:pPr indent="0" marL="0">
+                        <a:buNone/>
+                      </a:pPr>
+                      <a:r>
+                        <a:rPr lang="en-US" sz="1000" dirty="0">
+                          <a:solidFill>
+                            <a:srgbClr val="1B2333"/>
+                          </a:solidFill>
+                          <a:latin typeface="+mn-lt" pitchFamily="34" charset="0"/>
+                          <a:ea typeface="+mn-lt" pitchFamily="34" charset="-122"/>
+                          <a:cs typeface="+mn-lt" pitchFamily="34" charset="-120"/>
+                        </a:rPr>
+                        <a:t>Volume</a:t>
+                      </a:r>
+                      <a:endParaRPr lang="en-US" sz="1000" dirty="0">
+                        <a:latin typeface="+mn-lt" charset="0"/>
+                        <a:ea typeface="+mn-lt" charset="0"/>
+                        <a:cs typeface="+mn-lt" charset="0"/>
+                      </a:endParaRPr>
+                    </a:p>
+                  </a:txBody>
+                  <a:tcPr marL="91440" marR="91440" marT="45720" marB="45720">
+                    <a:lnL w="6350" cap="flat" cmpd="sng" algn="ctr">
+                      <a:solidFill>
+                        <a:srgbClr val="D9DEE5"/>
+                      </a:solidFill>
+                      <a:prstDash val="solid"/>
+                      <a:round/>
+                      <a:headEnd type="none" w="med" len="med"/>
+                      <a:tailEnd type="none" w="med" len="med"/>
+                    </a:lnL>
+                    <a:lnR w="6350" cap="flat" cmpd="sng" algn="ctr">
+                      <a:solidFill>
+                        <a:srgbClr val="D9DEE5"/>
+                      </a:solidFill>
+                      <a:prstDash val="solid"/>
+                      <a:round/>
+                      <a:headEnd type="none" w="med" len="med"/>
+                      <a:tailEnd type="none" w="med" len="med"/>
+                    </a:lnR>
+                    <a:lnT w="6350" cap="flat" cmpd="sng" algn="ctr">
+                      <a:solidFill>
+                        <a:srgbClr val="D9DEE5"/>
+                      </a:solidFill>
+                      <a:prstDash val="solid"/>
+                      <a:round/>
+                      <a:headEnd type="none" w="med" len="med"/>
+                      <a:tailEnd type="none" w="med" len="med"/>
+                    </a:lnT>
+                    <a:lnB w="6350" cap="flat" cmpd="sng" algn="ctr">
+                      <a:solidFill>
+                        <a:srgbClr val="D9DEE5"/>
+                      </a:solidFill>
+                      <a:prstDash val="solid"/>
+                      <a:round/>
+                      <a:headEnd type="none" w="med" len="med"/>
+                      <a:tailEnd type="none" w="med" len="med"/>
+                    </a:lnB>
+                    <a:solidFill>
+                      <a:srgbClr val="FFFFFF"/>
+                    </a:solidFill>
+                  </a:tcPr>
+                </a:tc>
+                <a:tc>
+                  <a:txBody>
+                    <a:bodyPr/>
+                    <a:lstStyle/>
+                    <a:p>
+                      <a:pPr indent="0" marL="0">
+                        <a:buNone/>
+                      </a:pPr>
+                      <a:r>
+                        <a:rPr lang="en-US" sz="1000" dirty="0">
+                          <a:solidFill>
+                            <a:srgbClr val="1B2333"/>
+                          </a:solidFill>
+                          <a:latin typeface="+mn-lt" pitchFamily="34" charset="0"/>
+                          <a:ea typeface="+mn-lt" pitchFamily="34" charset="-122"/>
+                          <a:cs typeface="+mn-lt" pitchFamily="34" charset="-120"/>
+                        </a:rPr>
+                        <a:t>SVM</a:t>
+                      </a:r>
+                      <a:endParaRPr lang="en-US" sz="1000" dirty="0">
+                        <a:latin typeface="+mn-lt" charset="0"/>
+                        <a:ea typeface="+mn-lt" charset="0"/>
+                        <a:cs typeface="+mn-lt" charset="0"/>
+                      </a:endParaRPr>
+                    </a:p>
+                  </a:txBody>
+                  <a:tcPr marL="91440" marR="91440" marT="45720" marB="45720">
+                    <a:lnL w="6350" cap="flat" cmpd="sng" algn="ctr">
+                      <a:solidFill>
+                        <a:srgbClr val="D9DEE5"/>
+                      </a:solidFill>
+                      <a:prstDash val="solid"/>
+                      <a:round/>
+                      <a:headEnd type="none" w="med" len="med"/>
+                      <a:tailEnd type="none" w="med" len="med"/>
+                    </a:lnL>
+                    <a:lnR w="6350" cap="flat" cmpd="sng" algn="ctr">
+                      <a:solidFill>
+                        <a:srgbClr val="D9DEE5"/>
+                      </a:solidFill>
+                      <a:prstDash val="solid"/>
+                      <a:round/>
+                      <a:headEnd type="none" w="med" len="med"/>
+                      <a:tailEnd type="none" w="med" len="med"/>
+                    </a:lnR>
+                    <a:lnT w="6350" cap="flat" cmpd="sng" algn="ctr">
+                      <a:solidFill>
+                        <a:srgbClr val="D9DEE5"/>
+                      </a:solidFill>
+                      <a:prstDash val="solid"/>
+                      <a:round/>
+                      <a:headEnd type="none" w="med" len="med"/>
+                      <a:tailEnd type="none" w="med" len="med"/>
+                    </a:lnT>
+                    <a:lnB w="6350" cap="flat" cmpd="sng" algn="ctr">
+                      <a:solidFill>
+                        <a:srgbClr val="D9DEE5"/>
+                      </a:solidFill>
+                      <a:prstDash val="solid"/>
+                      <a:round/>
+                      <a:headEnd type="none" w="med" len="med"/>
+                      <a:tailEnd type="none" w="med" len="med"/>
+                    </a:lnB>
+                    <a:solidFill>
+                      <a:srgbClr val="FFFFFF"/>
+                    </a:solidFill>
+                  </a:tcPr>
+                </a:tc>
+                <a:tc>
+                  <a:txBody>
+                    <a:bodyPr/>
+                    <a:lstStyle/>
+                    <a:p>
+                      <a:pPr indent="0" marL="0">
+                        <a:buNone/>
+                      </a:pPr>
+                      <a:r>
+                        <a:rPr lang="en-US" sz="1000" dirty="0">
+                          <a:solidFill>
+                            <a:srgbClr val="1B2333"/>
+                          </a:solidFill>
+                          <a:latin typeface="+mn-lt" pitchFamily="34" charset="0"/>
+                          <a:ea typeface="+mn-lt" pitchFamily="34" charset="-122"/>
+                          <a:cs typeface="+mn-lt" pitchFamily="34" charset="-120"/>
+                        </a:rPr>
+                        <a:t>+0.003 [−0.008, 0.014]</a:t>
+                      </a:r>
+                      <a:endParaRPr lang="en-US" sz="1000" dirty="0">
+                        <a:latin typeface="+mn-lt" charset="0"/>
+                        <a:ea typeface="+mn-lt" charset="0"/>
+                        <a:cs typeface="+mn-lt" charset="0"/>
+                      </a:endParaRPr>
+                    </a:p>
+                  </a:txBody>
+                  <a:tcPr marL="91440" marR="91440" marT="45720" marB="45720">
+                    <a:lnL w="6350" cap="flat" cmpd="sng" algn="ctr">
+                      <a:solidFill>
+                        <a:srgbClr val="D9DEE5"/>
+                      </a:solidFill>
+                      <a:prstDash val="solid"/>
+                      <a:round/>
+                      <a:headEnd type="none" w="med" len="med"/>
+                      <a:tailEnd type="none" w="med" len="med"/>
+                    </a:lnL>
+                    <a:lnR w="6350" cap="flat" cmpd="sng" algn="ctr">
+                      <a:solidFill>
+                        <a:srgbClr val="D9DEE5"/>
+                      </a:solidFill>
+                      <a:prstDash val="solid"/>
+                      <a:round/>
+                      <a:headEnd type="none" w="med" len="med"/>
+                      <a:tailEnd type="none" w="med" len="med"/>
+                    </a:lnR>
+                    <a:lnT w="6350" cap="flat" cmpd="sng" algn="ctr">
+                      <a:solidFill>
+                        <a:srgbClr val="D9DEE5"/>
+                      </a:solidFill>
+                      <a:prstDash val="solid"/>
+                      <a:round/>
+                      <a:headEnd type="none" w="med" len="med"/>
+                      <a:tailEnd type="none" w="med" len="med"/>
+                    </a:lnT>
+                    <a:lnB w="6350" cap="flat" cmpd="sng" algn="ctr">
+                      <a:solidFill>
+                        <a:srgbClr val="D9DEE5"/>
+                      </a:solidFill>
+                      <a:prstDash val="solid"/>
+                      <a:round/>
+                      <a:headEnd type="none" w="med" len="med"/>
+                      <a:tailEnd type="none" w="med" len="med"/>
+                    </a:lnB>
+                    <a:solidFill>
+                      <a:srgbClr val="FFFFFF"/>
+                    </a:solidFill>
+                  </a:tcPr>
+                </a:tc>
+                <a:tc>
+                  <a:txBody>
+                    <a:bodyPr/>
+                    <a:lstStyle/>
+                    <a:p>
+                      <a:pPr indent="0" marL="0">
+                        <a:buNone/>
+                      </a:pPr>
+                      <a:r>
+                        <a:rPr lang="en-US" sz="1000" dirty="0">
+                          <a:solidFill>
+                            <a:srgbClr val="1B2333"/>
+                          </a:solidFill>
+                          <a:latin typeface="+mn-lt" pitchFamily="34" charset="0"/>
+                          <a:ea typeface="+mn-lt" pitchFamily="34" charset="-122"/>
+                          <a:cs typeface="+mn-lt" pitchFamily="34" charset="-120"/>
+                        </a:rPr>
+                        <a:t>0.57</a:t>
+                      </a:r>
+                      <a:endParaRPr lang="en-US" sz="1000" dirty="0">
+                        <a:latin typeface="+mn-lt" charset="0"/>
+                        <a:ea typeface="+mn-lt" charset="0"/>
+                        <a:cs typeface="+mn-lt" charset="0"/>
+                      </a:endParaRPr>
+                    </a:p>
+                  </a:txBody>
+                  <a:tcPr marL="91440" marR="91440" marT="45720" marB="45720">
+                    <a:lnL w="6350" cap="flat" cmpd="sng" algn="ctr">
+                      <a:solidFill>
+                        <a:srgbClr val="D9DEE5"/>
+                      </a:solidFill>
+                      <a:prstDash val="solid"/>
+                      <a:round/>
+                      <a:headEnd type="none" w="med" len="med"/>
+                      <a:tailEnd type="none" w="med" len="med"/>
+                    </a:lnL>
+                    <a:lnR w="6350" cap="flat" cmpd="sng" algn="ctr">
+                      <a:solidFill>
+                        <a:srgbClr val="D9DEE5"/>
+                      </a:solidFill>
+                      <a:prstDash val="solid"/>
+                      <a:round/>
+                      <a:headEnd type="none" w="med" len="med"/>
+                      <a:tailEnd type="none" w="med" len="med"/>
+                    </a:lnR>
+                    <a:lnT w="6350" cap="flat" cmpd="sng" algn="ctr">
+                      <a:solidFill>
+                        <a:srgbClr val="D9DEE5"/>
+                      </a:solidFill>
+                      <a:prstDash val="solid"/>
+                      <a:round/>
+                      <a:headEnd type="none" w="med" len="med"/>
+                      <a:tailEnd type="none" w="med" len="med"/>
+                    </a:lnT>
+                    <a:lnB w="6350" cap="flat" cmpd="sng" algn="ctr">
+                      <a:solidFill>
+                        <a:srgbClr val="D9DEE5"/>
+                      </a:solidFill>
+                      <a:prstDash val="solid"/>
+                      <a:round/>
+                      <a:headEnd type="none" w="med" len="med"/>
+                      <a:tailEnd type="none" w="med" len="med"/>
+                    </a:lnB>
+                    <a:solidFill>
+                      <a:srgbClr val="FFFFFF"/>
+                    </a:solidFill>
+                  </a:tcPr>
+                </a:tc>
+              </a:tr>
+              <a:tr h="0">
+                <a:tc>
+                  <a:txBody>
+                    <a:bodyPr/>
+                    <a:lstStyle/>
+                    <a:p>
+                      <a:pPr indent="0" marL="0">
+                        <a:buNone/>
+                      </a:pPr>
+                      <a:r>
+                        <a:rPr lang="en-US" sz="1000" dirty="0">
+                          <a:solidFill>
+                            <a:srgbClr val="1B2333"/>
+                          </a:solidFill>
+                          <a:latin typeface="+mn-lt" pitchFamily="34" charset="0"/>
+                          <a:ea typeface="+mn-lt" pitchFamily="34" charset="-122"/>
+                          <a:cs typeface="+mn-lt" pitchFamily="34" charset="-120"/>
+                        </a:rPr>
+                        <a:t>Tone</a:t>
+                      </a:r>
+                      <a:endParaRPr lang="en-US" sz="1000" dirty="0">
+                        <a:latin typeface="+mn-lt" charset="0"/>
+                        <a:ea typeface="+mn-lt" charset="0"/>
+                        <a:cs typeface="+mn-lt" charset="0"/>
+                      </a:endParaRPr>
+                    </a:p>
+                  </a:txBody>
+                  <a:tcPr marL="91440" marR="91440" marT="45720" marB="45720">
+                    <a:lnL w="6350" cap="flat" cmpd="sng" algn="ctr">
+                      <a:solidFill>
+                        <a:srgbClr val="D9DEE5"/>
+                      </a:solidFill>
+                      <a:prstDash val="solid"/>
+                      <a:round/>
+                      <a:headEnd type="none" w="med" len="med"/>
+                      <a:tailEnd type="none" w="med" len="med"/>
+                    </a:lnL>
+                    <a:lnR w="6350" cap="flat" cmpd="sng" algn="ctr">
+                      <a:solidFill>
+                        <a:srgbClr val="D9DEE5"/>
+                      </a:solidFill>
+                      <a:prstDash val="solid"/>
+                      <a:round/>
+                      <a:headEnd type="none" w="med" len="med"/>
+                      <a:tailEnd type="none" w="med" len="med"/>
+                    </a:lnR>
+                    <a:lnT w="6350" cap="flat" cmpd="sng" algn="ctr">
+                      <a:solidFill>
+                        <a:srgbClr val="D9DEE5"/>
+                      </a:solidFill>
+                      <a:prstDash val="solid"/>
+                      <a:round/>
+                      <a:headEnd type="none" w="med" len="med"/>
+                      <a:tailEnd type="none" w="med" len="med"/>
+                    </a:lnT>
+                    <a:lnB w="6350" cap="flat" cmpd="sng" algn="ctr">
+                      <a:solidFill>
+                        <a:srgbClr val="D9DEE5"/>
+                      </a:solidFill>
+                      <a:prstDash val="solid"/>
+                      <a:round/>
+                      <a:headEnd type="none" w="med" len="med"/>
+                      <a:tailEnd type="none" w="med" len="med"/>
+                    </a:lnB>
+                    <a:solidFill>
+                      <a:srgbClr val="FFFFFF"/>
+                    </a:solidFill>
+                  </a:tcPr>
+                </a:tc>
+                <a:tc>
+                  <a:txBody>
+                    <a:bodyPr/>
+                    <a:lstStyle/>
+                    <a:p>
+                      <a:pPr indent="0" marL="0">
+                        <a:buNone/>
+                      </a:pPr>
+                      <a:r>
+                        <a:rPr lang="en-US" sz="1000" dirty="0">
+                          <a:solidFill>
+                            <a:srgbClr val="1B2333"/>
+                          </a:solidFill>
+                          <a:latin typeface="+mn-lt" pitchFamily="34" charset="0"/>
+                          <a:ea typeface="+mn-lt" pitchFamily="34" charset="-122"/>
+                          <a:cs typeface="+mn-lt" pitchFamily="34" charset="-120"/>
+                        </a:rPr>
+                        <a:t>LR</a:t>
+                      </a:r>
+                      <a:endParaRPr lang="en-US" sz="1000" dirty="0">
+                        <a:latin typeface="+mn-lt" charset="0"/>
+                        <a:ea typeface="+mn-lt" charset="0"/>
+                        <a:cs typeface="+mn-lt" charset="0"/>
+                      </a:endParaRPr>
+                    </a:p>
+                  </a:txBody>
+                  <a:tcPr marL="91440" marR="91440" marT="45720" marB="45720">
+                    <a:lnL w="6350" cap="flat" cmpd="sng" algn="ctr">
+                      <a:solidFill>
+                        <a:srgbClr val="D9DEE5"/>
+                      </a:solidFill>
+                      <a:prstDash val="solid"/>
+                      <a:round/>
+                      <a:headEnd type="none" w="med" len="med"/>
+                      <a:tailEnd type="none" w="med" len="med"/>
+                    </a:lnL>
+                    <a:lnR w="6350" cap="flat" cmpd="sng" algn="ctr">
+                      <a:solidFill>
+                        <a:srgbClr val="D9DEE5"/>
+                      </a:solidFill>
+                      <a:prstDash val="solid"/>
+                      <a:round/>
+                      <a:headEnd type="none" w="med" len="med"/>
+                      <a:tailEnd type="none" w="med" len="med"/>
+                    </a:lnR>
+                    <a:lnT w="6350" cap="flat" cmpd="sng" algn="ctr">
+                      <a:solidFill>
+                        <a:srgbClr val="D9DEE5"/>
+                      </a:solidFill>
+                      <a:prstDash val="solid"/>
+                      <a:round/>
+                      <a:headEnd type="none" w="med" len="med"/>
+                      <a:tailEnd type="none" w="med" len="med"/>
+                    </a:lnT>
+                    <a:lnB w="6350" cap="flat" cmpd="sng" algn="ctr">
+                      <a:solidFill>
+                        <a:srgbClr val="D9DEE5"/>
+                      </a:solidFill>
+                      <a:prstDash val="solid"/>
+                      <a:round/>
+                      <a:headEnd type="none" w="med" len="med"/>
+                      <a:tailEnd type="none" w="med" len="med"/>
+                    </a:lnB>
+                    <a:solidFill>
+                      <a:srgbClr val="FFFFFF"/>
+                    </a:solidFill>
+                  </a:tcPr>
+                </a:tc>
+                <a:tc>
+                  <a:txBody>
+                    <a:bodyPr/>
+                    <a:lstStyle/>
+                    <a:p>
+                      <a:pPr indent="0" marL="0">
+                        <a:buNone/>
+                      </a:pPr>
+                      <a:r>
+                        <a:rPr lang="en-US" sz="1000" dirty="0">
+                          <a:solidFill>
+                            <a:srgbClr val="1B2333"/>
+                          </a:solidFill>
+                          <a:latin typeface="+mn-lt" pitchFamily="34" charset="0"/>
+                          <a:ea typeface="+mn-lt" pitchFamily="34" charset="-122"/>
+                          <a:cs typeface="+mn-lt" pitchFamily="34" charset="-120"/>
+                        </a:rPr>
+                        <a:t>+0.010 [0.000, 0.021]</a:t>
+                      </a:r>
+                      <a:endParaRPr lang="en-US" sz="1000" dirty="0">
+                        <a:latin typeface="+mn-lt" charset="0"/>
+                        <a:ea typeface="+mn-lt" charset="0"/>
+                        <a:cs typeface="+mn-lt" charset="0"/>
+                      </a:endParaRPr>
+                    </a:p>
+                  </a:txBody>
+                  <a:tcPr marL="91440" marR="91440" marT="45720" marB="45720">
+                    <a:lnL w="6350" cap="flat" cmpd="sng" algn="ctr">
+                      <a:solidFill>
+                        <a:srgbClr val="D9DEE5"/>
+                      </a:solidFill>
+                      <a:prstDash val="solid"/>
+                      <a:round/>
+                      <a:headEnd type="none" w="med" len="med"/>
+                      <a:tailEnd type="none" w="med" len="med"/>
+                    </a:lnL>
+                    <a:lnR w="6350" cap="flat" cmpd="sng" algn="ctr">
+                      <a:solidFill>
+                        <a:srgbClr val="D9DEE5"/>
+                      </a:solidFill>
+                      <a:prstDash val="solid"/>
+                      <a:round/>
+                      <a:headEnd type="none" w="med" len="med"/>
+                      <a:tailEnd type="none" w="med" len="med"/>
+                    </a:lnR>
+                    <a:lnT w="6350" cap="flat" cmpd="sng" algn="ctr">
+                      <a:solidFill>
+                        <a:srgbClr val="D9DEE5"/>
+                      </a:solidFill>
+                      <a:prstDash val="solid"/>
+                      <a:round/>
+                      <a:headEnd type="none" w="med" len="med"/>
+                      <a:tailEnd type="none" w="med" len="med"/>
+                    </a:lnT>
+                    <a:lnB w="6350" cap="flat" cmpd="sng" algn="ctr">
+                      <a:solidFill>
+                        <a:srgbClr val="D9DEE5"/>
+                      </a:solidFill>
+                      <a:prstDash val="solid"/>
+                      <a:round/>
+                      <a:headEnd type="none" w="med" len="med"/>
+                      <a:tailEnd type="none" w="med" len="med"/>
+                    </a:lnB>
+                    <a:solidFill>
+                      <a:srgbClr val="FFFFFF"/>
+                    </a:solidFill>
+                  </a:tcPr>
+                </a:tc>
+                <a:tc>
+                  <a:txBody>
+                    <a:bodyPr/>
+                    <a:lstStyle/>
+                    <a:p>
+                      <a:pPr indent="0" marL="0">
+                        <a:buNone/>
+                      </a:pPr>
+                      <a:r>
+                        <a:rPr lang="en-US" sz="1000" dirty="0">
+                          <a:solidFill>
+                            <a:srgbClr val="1B2333"/>
+                          </a:solidFill>
+                          <a:latin typeface="+mn-lt" pitchFamily="34" charset="0"/>
+                          <a:ea typeface="+mn-lt" pitchFamily="34" charset="-122"/>
+                          <a:cs typeface="+mn-lt" pitchFamily="34" charset="-120"/>
+                        </a:rPr>
+                        <a:t>0.047</a:t>
+                      </a:r>
+                      <a:endParaRPr lang="en-US" sz="1000" dirty="0">
+                        <a:latin typeface="+mn-lt" charset="0"/>
+                        <a:ea typeface="+mn-lt" charset="0"/>
+                        <a:cs typeface="+mn-lt" charset="0"/>
+                      </a:endParaRPr>
+                    </a:p>
+                  </a:txBody>
+                  <a:tcPr marL="91440" marR="91440" marT="45720" marB="45720">
+                    <a:lnL w="6350" cap="flat" cmpd="sng" algn="ctr">
+                      <a:solidFill>
+                        <a:srgbClr val="D9DEE5"/>
+                      </a:solidFill>
+                      <a:prstDash val="solid"/>
+                      <a:round/>
+                      <a:headEnd type="none" w="med" len="med"/>
+                      <a:tailEnd type="none" w="med" len="med"/>
+                    </a:lnL>
+                    <a:lnR w="6350" cap="flat" cmpd="sng" algn="ctr">
+                      <a:solidFill>
+                        <a:srgbClr val="D9DEE5"/>
+                      </a:solidFill>
+                      <a:prstDash val="solid"/>
+                      <a:round/>
+                      <a:headEnd type="none" w="med" len="med"/>
+                      <a:tailEnd type="none" w="med" len="med"/>
+                    </a:lnR>
+                    <a:lnT w="6350" cap="flat" cmpd="sng" algn="ctr">
+                      <a:solidFill>
+                        <a:srgbClr val="D9DEE5"/>
+                      </a:solidFill>
+                      <a:prstDash val="solid"/>
+                      <a:round/>
+                      <a:headEnd type="none" w="med" len="med"/>
+                      <a:tailEnd type="none" w="med" len="med"/>
+                    </a:lnT>
+                    <a:lnB w="6350" cap="flat" cmpd="sng" algn="ctr">
+                      <a:solidFill>
+                        <a:srgbClr val="D9DEE5"/>
+                      </a:solidFill>
+                      <a:prstDash val="solid"/>
+                      <a:round/>
+                      <a:headEnd type="none" w="med" len="med"/>
+                      <a:tailEnd type="none" w="med" len="med"/>
+                    </a:lnB>
+                    <a:solidFill>
+                      <a:srgbClr val="FFFFFF"/>
+                    </a:solidFill>
+                  </a:tcPr>
+                </a:tc>
+              </a:tr>
+              <a:tr h="0">
+                <a:tc>
+                  <a:txBody>
+                    <a:bodyPr/>
+                    <a:lstStyle/>
+                    <a:p>
+                      <a:pPr indent="0" marL="0">
+                        <a:buNone/>
+                      </a:pPr>
+                      <a:r>
+                        <a:rPr lang="en-US" sz="1000" dirty="0">
+                          <a:solidFill>
+                            <a:srgbClr val="1B2333"/>
+                          </a:solidFill>
+                          <a:latin typeface="+mn-lt" pitchFamily="34" charset="0"/>
+                          <a:ea typeface="+mn-lt" pitchFamily="34" charset="-122"/>
+                          <a:cs typeface="+mn-lt" pitchFamily="34" charset="-120"/>
+                        </a:rPr>
+                        <a:t>Tone</a:t>
+                      </a:r>
+                      <a:endParaRPr lang="en-US" sz="1000" dirty="0">
+                        <a:latin typeface="+mn-lt" charset="0"/>
+                        <a:ea typeface="+mn-lt" charset="0"/>
+                        <a:cs typeface="+mn-lt" charset="0"/>
+                      </a:endParaRPr>
+                    </a:p>
+                  </a:txBody>
+                  <a:tcPr marL="91440" marR="91440" marT="45720" marB="45720">
+                    <a:lnL w="6350" cap="flat" cmpd="sng" algn="ctr">
+                      <a:solidFill>
+                        <a:srgbClr val="D9DEE5"/>
+                      </a:solidFill>
+                      <a:prstDash val="solid"/>
+                      <a:round/>
+                      <a:headEnd type="none" w="med" len="med"/>
+                      <a:tailEnd type="none" w="med" len="med"/>
+                    </a:lnL>
+                    <a:lnR w="6350" cap="flat" cmpd="sng" algn="ctr">
+                      <a:solidFill>
+                        <a:srgbClr val="D9DEE5"/>
+                      </a:solidFill>
+                      <a:prstDash val="solid"/>
+                      <a:round/>
+                      <a:headEnd type="none" w="med" len="med"/>
+                      <a:tailEnd type="none" w="med" len="med"/>
+                    </a:lnR>
+                    <a:lnT w="6350" cap="flat" cmpd="sng" algn="ctr">
+                      <a:solidFill>
+                        <a:srgbClr val="D9DEE5"/>
+                      </a:solidFill>
+                      <a:prstDash val="solid"/>
+                      <a:round/>
+                      <a:headEnd type="none" w="med" len="med"/>
+                      <a:tailEnd type="none" w="med" len="med"/>
+                    </a:lnT>
+                    <a:lnB w="6350" cap="flat" cmpd="sng" algn="ctr">
+                      <a:solidFill>
+                        <a:srgbClr val="D9DEE5"/>
+                      </a:solidFill>
+                      <a:prstDash val="solid"/>
+                      <a:round/>
+                      <a:headEnd type="none" w="med" len="med"/>
+                      <a:tailEnd type="none" w="med" len="med"/>
+                    </a:lnB>
+                    <a:solidFill>
+                      <a:srgbClr val="FFFFFF"/>
+                    </a:solidFill>
+                  </a:tcPr>
+                </a:tc>
+                <a:tc>
+                  <a:txBody>
+                    <a:bodyPr/>
+                    <a:lstStyle/>
+                    <a:p>
+                      <a:pPr indent="0" marL="0">
+                        <a:buNone/>
+                      </a:pPr>
+                      <a:r>
+                        <a:rPr lang="en-US" sz="1000" dirty="0">
+                          <a:solidFill>
+                            <a:srgbClr val="1B2333"/>
+                          </a:solidFill>
+                          <a:latin typeface="+mn-lt" pitchFamily="34" charset="0"/>
+                          <a:ea typeface="+mn-lt" pitchFamily="34" charset="-122"/>
+                          <a:cs typeface="+mn-lt" pitchFamily="34" charset="-120"/>
+                        </a:rPr>
+                        <a:t>SVM</a:t>
+                      </a:r>
+                      <a:endParaRPr lang="en-US" sz="1000" dirty="0">
+                        <a:latin typeface="+mn-lt" charset="0"/>
+                        <a:ea typeface="+mn-lt" charset="0"/>
+                        <a:cs typeface="+mn-lt" charset="0"/>
+                      </a:endParaRPr>
+                    </a:p>
+                  </a:txBody>
+                  <a:tcPr marL="91440" marR="91440" marT="45720" marB="45720">
+                    <a:lnL w="6350" cap="flat" cmpd="sng" algn="ctr">
+                      <a:solidFill>
+                        <a:srgbClr val="D9DEE5"/>
+                      </a:solidFill>
+                      <a:prstDash val="solid"/>
+                      <a:round/>
+                      <a:headEnd type="none" w="med" len="med"/>
+                      <a:tailEnd type="none" w="med" len="med"/>
+                    </a:lnL>
+                    <a:lnR w="6350" cap="flat" cmpd="sng" algn="ctr">
+                      <a:solidFill>
+                        <a:srgbClr val="D9DEE5"/>
+                      </a:solidFill>
+                      <a:prstDash val="solid"/>
+                      <a:round/>
+                      <a:headEnd type="none" w="med" len="med"/>
+                      <a:tailEnd type="none" w="med" len="med"/>
+                    </a:lnR>
+                    <a:lnT w="6350" cap="flat" cmpd="sng" algn="ctr">
+                      <a:solidFill>
+                        <a:srgbClr val="D9DEE5"/>
+                      </a:solidFill>
+                      <a:prstDash val="solid"/>
+                      <a:round/>
+                      <a:headEnd type="none" w="med" len="med"/>
+                      <a:tailEnd type="none" w="med" len="med"/>
+                    </a:lnT>
+                    <a:lnB w="6350" cap="flat" cmpd="sng" algn="ctr">
+                      <a:solidFill>
+                        <a:srgbClr val="D9DEE5"/>
+                      </a:solidFill>
+                      <a:prstDash val="solid"/>
+                      <a:round/>
+                      <a:headEnd type="none" w="med" len="med"/>
+                      <a:tailEnd type="none" w="med" len="med"/>
+                    </a:lnB>
+                    <a:solidFill>
+                      <a:srgbClr val="FFFFFF"/>
+                    </a:solidFill>
+                  </a:tcPr>
+                </a:tc>
+                <a:tc>
+                  <a:txBody>
+                    <a:bodyPr/>
+                    <a:lstStyle/>
+                    <a:p>
+                      <a:pPr indent="0" marL="0">
+                        <a:buNone/>
+                      </a:pPr>
+                      <a:r>
+                        <a:rPr lang="en-US" sz="1000" dirty="0">
+                          <a:solidFill>
+                            <a:srgbClr val="1B2333"/>
+                          </a:solidFill>
+                          <a:latin typeface="+mn-lt" pitchFamily="34" charset="0"/>
+                          <a:ea typeface="+mn-lt" pitchFamily="34" charset="-122"/>
+                          <a:cs typeface="+mn-lt" pitchFamily="34" charset="-120"/>
+                        </a:rPr>
+                        <a:t>+0.006 [−0.003, 0.016]</a:t>
+                      </a:r>
+                      <a:endParaRPr lang="en-US" sz="1000" dirty="0">
+                        <a:latin typeface="+mn-lt" charset="0"/>
+                        <a:ea typeface="+mn-lt" charset="0"/>
+                        <a:cs typeface="+mn-lt" charset="0"/>
+                      </a:endParaRPr>
+                    </a:p>
+                  </a:txBody>
+                  <a:tcPr marL="91440" marR="91440" marT="45720" marB="45720">
+                    <a:lnL w="6350" cap="flat" cmpd="sng" algn="ctr">
+                      <a:solidFill>
+                        <a:srgbClr val="D9DEE5"/>
+                      </a:solidFill>
+                      <a:prstDash val="solid"/>
+                      <a:round/>
+                      <a:headEnd type="none" w="med" len="med"/>
+                      <a:tailEnd type="none" w="med" len="med"/>
+                    </a:lnL>
+                    <a:lnR w="6350" cap="flat" cmpd="sng" algn="ctr">
+                      <a:solidFill>
+                        <a:srgbClr val="D9DEE5"/>
+                      </a:solidFill>
+                      <a:prstDash val="solid"/>
+                      <a:round/>
+                      <a:headEnd type="none" w="med" len="med"/>
+                      <a:tailEnd type="none" w="med" len="med"/>
+                    </a:lnR>
+                    <a:lnT w="6350" cap="flat" cmpd="sng" algn="ctr">
+                      <a:solidFill>
+                        <a:srgbClr val="D9DEE5"/>
+                      </a:solidFill>
+                      <a:prstDash val="solid"/>
+                      <a:round/>
+                      <a:headEnd type="none" w="med" len="med"/>
+                      <a:tailEnd type="none" w="med" len="med"/>
+                    </a:lnT>
+                    <a:lnB w="6350" cap="flat" cmpd="sng" algn="ctr">
+                      <a:solidFill>
+                        <a:srgbClr val="D9DEE5"/>
+                      </a:solidFill>
+                      <a:prstDash val="solid"/>
+                      <a:round/>
+                      <a:headEnd type="none" w="med" len="med"/>
+                      <a:tailEnd type="none" w="med" len="med"/>
+                    </a:lnB>
+                    <a:solidFill>
+                      <a:srgbClr val="FFFFFF"/>
+                    </a:solidFill>
+                  </a:tcPr>
+                </a:tc>
+                <a:tc>
+                  <a:txBody>
+                    <a:bodyPr/>
+                    <a:lstStyle/>
+                    <a:p>
+                      <a:pPr indent="0" marL="0">
+                        <a:buNone/>
+                      </a:pPr>
+                      <a:r>
+                        <a:rPr lang="en-US" sz="1000" dirty="0">
+                          <a:solidFill>
+                            <a:srgbClr val="1B2333"/>
+                          </a:solidFill>
+                          <a:latin typeface="+mn-lt" pitchFamily="34" charset="0"/>
+                          <a:ea typeface="+mn-lt" pitchFamily="34" charset="-122"/>
+                          <a:cs typeface="+mn-lt" pitchFamily="34" charset="-120"/>
+                        </a:rPr>
+                        <a:t>0.16</a:t>
+                      </a:r>
+                      <a:endParaRPr lang="en-US" sz="1000" dirty="0">
+                        <a:latin typeface="+mn-lt" charset="0"/>
+                        <a:ea typeface="+mn-lt" charset="0"/>
+                        <a:cs typeface="+mn-lt" charset="0"/>
+                      </a:endParaRPr>
+                    </a:p>
+                  </a:txBody>
+                  <a:tcPr marL="91440" marR="91440" marT="45720" marB="45720">
+                    <a:lnL w="6350" cap="flat" cmpd="sng" algn="ctr">
+                      <a:solidFill>
+                        <a:srgbClr val="D9DEE5"/>
+                      </a:solidFill>
+                      <a:prstDash val="solid"/>
+                      <a:round/>
+                      <a:headEnd type="none" w="med" len="med"/>
+                      <a:tailEnd type="none" w="med" len="med"/>
+                    </a:lnL>
+                    <a:lnR w="6350" cap="flat" cmpd="sng" algn="ctr">
+                      <a:solidFill>
+                        <a:srgbClr val="D9DEE5"/>
+                      </a:solidFill>
+                      <a:prstDash val="solid"/>
+                      <a:round/>
+                      <a:headEnd type="none" w="med" len="med"/>
+                      <a:tailEnd type="none" w="med" len="med"/>
+                    </a:lnR>
+                    <a:lnT w="6350" cap="flat" cmpd="sng" algn="ctr">
+                      <a:solidFill>
+                        <a:srgbClr val="D9DEE5"/>
+                      </a:solidFill>
+                      <a:prstDash val="solid"/>
+                      <a:round/>
+                      <a:headEnd type="none" w="med" len="med"/>
+                      <a:tailEnd type="none" w="med" len="med"/>
+                    </a:lnT>
+                    <a:lnB w="6350" cap="flat" cmpd="sng" algn="ctr">
+                      <a:solidFill>
+                        <a:srgbClr val="D9DEE5"/>
+                      </a:solidFill>
+                      <a:prstDash val="solid"/>
+                      <a:round/>
+                      <a:headEnd type="none" w="med" len="med"/>
+                      <a:tailEnd type="none" w="med" len="med"/>
+                    </a:lnB>
+                    <a:solidFill>
+                      <a:srgbClr val="FFFFFF"/>
+                    </a:solidFill>
+                  </a:tcPr>
+                </a:tc>
+              </a:tr>
+            </a:tbl>
+          </a:graphicData>
+        </a:graphic>
+      </p:graphicFrame>
+      <p:sp>
+        <p:nvSpPr>
+          <p:cNvPr id="5" name="Tone caveat"/>
           <p:cNvSpPr txBox="1"/>
           <p:nvPr/>
         </p:nvSpPr>
         <p:spPr>
           <a:xfrm>
-            <a:off x="5806440" y="1188720"/>
-            <a:ext cx="2880360" cy="3383280"/>
+            <a:off x="5394960" y="3429000"/>
+            <a:ext cx="3291840" cy="1097280"/>
           </a:xfrm>
           <a:prstGeom prst="rect">
             <a:avLst/>
@@ -4362,79 +6097,21 @@
           <a:ln/>
         </p:spPr>
         <p:txBody>
-          <a:bodyPr wrap="square" rtlCol="0" anchor="t"/>
-          <a:lstStyle/>
-          <a:p>
-            <a:pPr marL="342900" indent="-342900">
-              <a:spcAft>
-                <a:spcPts val="800"/>
-              </a:spcAft>
-              <a:buSzPct val="100000"/>
-              <a:buChar char="•"/>
-            </a:pPr>
-            <a:r>
-              <a:rPr lang="en-US" sz="1300" dirty="0">
-                <a:solidFill>
-                  <a:schemeClr val="tx1"/>
-                </a:solidFill>
-              </a:rPr>
-              <a:t>SVM ranks better (AUC 0.726) and catches 92% of closures</a:t>
-            </a:r>
-            <a:endParaRPr lang="en-US" sz="1300" dirty="0"/>
-          </a:p>
-          <a:p>
-            <a:pPr marL="342900" indent="-342900">
-              <a:spcAft>
-                <a:spcPts val="800"/>
-              </a:spcAft>
-              <a:buSzPct val="100000"/>
-              <a:buChar char="•"/>
-            </a:pPr>
-            <a:r>
-              <a:rPr lang="en-US" sz="1300" dirty="0">
-                <a:solidFill>
-                  <a:schemeClr val="tx1"/>
-                </a:solidFill>
-              </a:rPr>
-              <a:t>…but at margin 0 it flags 66% of operating startups as closed</a:t>
-            </a:r>
-            <a:endParaRPr lang="en-US" sz="1300" dirty="0"/>
-          </a:p>
-          <a:p>
-            <a:pPr marL="342900" indent="-342900">
-              <a:spcAft>
-                <a:spcPts val="800"/>
-              </a:spcAft>
-              <a:buSzPct val="100000"/>
-              <a:buChar char="•"/>
-            </a:pPr>
-            <a:r>
-              <a:rPr lang="en-US" sz="1300" dirty="0">
-                <a:solidFill>
-                  <a:schemeClr val="tx1"/>
-                </a:solidFill>
-              </a:rPr>
-              <a:t>LR is better balanced and gives probabilities, so it powers the dashboard</a:t>
-            </a:r>
-            <a:endParaRPr lang="en-US" sz="1300" dirty="0"/>
-          </a:p>
-          <a:p>
-            <a:pPr marL="342900" indent="-342900">
-              <a:spcAft>
-                <a:spcPts val="800"/>
-              </a:spcAft>
-              <a:buSzPct val="100000"/>
-              <a:buChar char="•"/>
-            </a:pPr>
-            <a:r>
-              <a:rPr lang="en-US" sz="1300" dirty="0">
-                <a:solidFill>
-                  <a:schemeClr val="tx1"/>
-                </a:solidFill>
-              </a:rPr>
-              <a:t>Next: tune the threshold on a validation split (never on the test set)</a:t>
-            </a:r>
-            <a:endParaRPr lang="en-US" sz="1300" dirty="0"/>
+          <a:bodyPr wrap="square" lIns="0" tIns="0" rIns="0" bIns="0" rtlCol="0" anchor="t"/>
+          <a:lstStyle/>
+          <a:p>
+            <a:pPr indent="0" marL="0">
+              <a:buNone/>
+            </a:pPr>
+            <a:r>
+              <a:rPr lang="en-US" sz="1200" i="1" dirty="0">
+                <a:solidFill>
+                  <a:schemeClr val="tx2"/>
+                </a:solidFill>
+              </a:rPr>
+              <a:t>Tone helps in the same direction for both models, but only LR reaches p &lt; 0.05, and that does not survive correction for 8 tests.</a:t>
+            </a:r>
+            <a:endParaRPr lang="en-US" sz="1200" dirty="0"/>
           </a:p>
         </p:txBody>
       </p:sp>
@@ -4540,7 +6217,7 @@
                   <a:schemeClr val="tx2"/>
                 </a:solidFill>
               </a:rPr>
-              <a:t>A leakage path we found ourselves</a:t>
+              <a:t>Why the sentiment signal is weak</a:t>
             </a:r>
             <a:endParaRPr lang="en-US" sz="2800" dirty="0"/>
           </a:p>
@@ -4548,26 +6225,251 @@
       </p:sp>
       <p:sp>
         <p:nvSpPr>
-          <p:cNvPr id="3" name="Coefficient card"/>
+          <p:cNvPr id="3" name="Stat coverage number"/>
+          <p:cNvSpPr txBox="1"/>
+          <p:nvPr/>
+        </p:nvSpPr>
+        <p:spPr>
+          <a:xfrm>
+            <a:off x="457200" y="1234440"/>
+            <a:ext cx="2651760" cy="685800"/>
+          </a:xfrm>
+          <a:prstGeom prst="rect">
+            <a:avLst/>
+          </a:prstGeom>
+          <a:noFill/>
+          <a:ln/>
+        </p:spPr>
+        <p:txBody>
+          <a:bodyPr wrap="square" lIns="0" tIns="0" rIns="0" bIns="0" rtlCol="0" anchor="t"/>
+          <a:lstStyle/>
+          <a:p>
+            <a:pPr indent="0" marL="0">
+              <a:buNone/>
+            </a:pPr>
+            <a:r>
+              <a:rPr lang="en-US" sz="3600" b="1" dirty="0">
+                <a:solidFill>
+                  <a:schemeClr val="accent2"/>
+                </a:solidFill>
+                <a:latin typeface="Cambria" pitchFamily="34" charset="0"/>
+                <a:ea typeface="Cambria" pitchFamily="34" charset="-122"/>
+                <a:cs typeface="Cambria" pitchFamily="34" charset="-120"/>
+              </a:rPr>
+              <a:t>8.5%</a:t>
+            </a:r>
+            <a:endParaRPr lang="en-US" sz="3600" dirty="0"/>
+          </a:p>
+        </p:txBody>
+      </p:sp>
+      <p:sp>
+        <p:nvSpPr>
+          <p:cNvPr id="4" name="Stat coverage label"/>
+          <p:cNvSpPr txBox="1"/>
+          <p:nvPr/>
+        </p:nvSpPr>
+        <p:spPr>
+          <a:xfrm>
+            <a:off x="457200" y="1947672"/>
+            <a:ext cx="2651760" cy="548640"/>
+          </a:xfrm>
+          <a:prstGeom prst="rect">
+            <a:avLst/>
+          </a:prstGeom>
+          <a:noFill/>
+          <a:ln/>
+        </p:spPr>
+        <p:txBody>
+          <a:bodyPr wrap="square" lIns="0" tIns="0" rIns="0" bIns="0" rtlCol="0" anchor="t"/>
+          <a:lstStyle/>
+          <a:p>
+            <a:pPr indent="0" marL="0">
+              <a:buNone/>
+            </a:pPr>
+            <a:r>
+              <a:rPr lang="en-US" sz="1200" dirty="0">
+                <a:solidFill>
+                  <a:schemeClr val="tx1"/>
+                </a:solidFill>
+              </a:rPr>
+              <a:t>of startups have any matched pre-2013 news</a:t>
+            </a:r>
+            <a:endParaRPr lang="en-US" sz="1200" dirty="0"/>
+          </a:p>
+        </p:txBody>
+      </p:sp>
+      <p:sp>
+        <p:nvSpPr>
+          <p:cNvPr id="5" name="Stat precision number"/>
+          <p:cNvSpPr txBox="1"/>
+          <p:nvPr/>
+        </p:nvSpPr>
+        <p:spPr>
+          <a:xfrm>
+            <a:off x="3246120" y="1234440"/>
+            <a:ext cx="2651760" cy="685800"/>
+          </a:xfrm>
+          <a:prstGeom prst="rect">
+            <a:avLst/>
+          </a:prstGeom>
+          <a:noFill/>
+          <a:ln/>
+        </p:spPr>
+        <p:txBody>
+          <a:bodyPr wrap="square" lIns="0" tIns="0" rIns="0" bIns="0" rtlCol="0" anchor="t"/>
+          <a:lstStyle/>
+          <a:p>
+            <a:pPr indent="0" marL="0">
+              <a:buNone/>
+            </a:pPr>
+            <a:r>
+              <a:rPr lang="en-US" sz="3600" b="1" dirty="0">
+                <a:solidFill>
+                  <a:schemeClr val="accent2"/>
+                </a:solidFill>
+                <a:latin typeface="Cambria" pitchFamily="34" charset="0"/>
+                <a:ea typeface="Cambria" pitchFamily="34" charset="-122"/>
+                <a:cs typeface="Cambria" pitchFamily="34" charset="-120"/>
+              </a:rPr>
+              <a:t>29%</a:t>
+            </a:r>
+            <a:endParaRPr lang="en-US" sz="3600" dirty="0"/>
+          </a:p>
+        </p:txBody>
+      </p:sp>
+      <p:sp>
+        <p:nvSpPr>
+          <p:cNvPr id="6" name="Stat precision label"/>
+          <p:cNvSpPr txBox="1"/>
+          <p:nvPr/>
+        </p:nvSpPr>
+        <p:spPr>
+          <a:xfrm>
+            <a:off x="3246120" y="1947672"/>
+            <a:ext cx="2651760" cy="548640"/>
+          </a:xfrm>
+          <a:prstGeom prst="rect">
+            <a:avLst/>
+          </a:prstGeom>
+          <a:noFill/>
+          <a:ln/>
+        </p:spPr>
+        <p:txBody>
+          <a:bodyPr wrap="square" lIns="0" tIns="0" rIns="0" bIns="0" rtlCol="0" anchor="t"/>
+          <a:lstStyle/>
+          <a:p>
+            <a:pPr indent="0" marL="0">
+              <a:buNone/>
+            </a:pPr>
+            <a:r>
+              <a:rPr lang="en-US" sz="1200" dirty="0">
+                <a:solidFill>
+                  <a:schemeClr val="tx1"/>
+                </a:solidFill>
+              </a:rPr>
+              <a:t>of matched headlines are actually about the company</a:t>
+            </a:r>
+            <a:endParaRPr lang="en-US" sz="1200" dirty="0"/>
+          </a:p>
+        </p:txBody>
+      </p:sp>
+      <p:sp>
+        <p:nvSpPr>
+          <p:cNvPr id="7" name="Stat neutral number"/>
+          <p:cNvSpPr txBox="1"/>
+          <p:nvPr/>
+        </p:nvSpPr>
+        <p:spPr>
+          <a:xfrm>
+            <a:off x="6035040" y="1234440"/>
+            <a:ext cx="2651760" cy="685800"/>
+          </a:xfrm>
+          <a:prstGeom prst="rect">
+            <a:avLst/>
+          </a:prstGeom>
+          <a:noFill/>
+          <a:ln/>
+        </p:spPr>
+        <p:txBody>
+          <a:bodyPr wrap="square" lIns="0" tIns="0" rIns="0" bIns="0" rtlCol="0" anchor="t"/>
+          <a:lstStyle/>
+          <a:p>
+            <a:pPr indent="0" marL="0">
+              <a:buNone/>
+            </a:pPr>
+            <a:r>
+              <a:rPr lang="en-US" sz="3600" b="1" dirty="0">
+                <a:solidFill>
+                  <a:schemeClr val="accent2"/>
+                </a:solidFill>
+                <a:latin typeface="Cambria" pitchFamily="34" charset="0"/>
+                <a:ea typeface="Cambria" pitchFamily="34" charset="-122"/>
+                <a:cs typeface="Cambria" pitchFamily="34" charset="-120"/>
+              </a:rPr>
+              <a:t>87%</a:t>
+            </a:r>
+            <a:endParaRPr lang="en-US" sz="3600" dirty="0"/>
+          </a:p>
+        </p:txBody>
+      </p:sp>
+      <p:sp>
+        <p:nvSpPr>
+          <p:cNvPr id="8" name="Stat neutral label"/>
+          <p:cNvSpPr txBox="1"/>
+          <p:nvPr/>
+        </p:nvSpPr>
+        <p:spPr>
+          <a:xfrm>
+            <a:off x="6035040" y="1947672"/>
+            <a:ext cx="2651760" cy="548640"/>
+          </a:xfrm>
+          <a:prstGeom prst="rect">
+            <a:avLst/>
+          </a:prstGeom>
+          <a:noFill/>
+          <a:ln/>
+        </p:spPr>
+        <p:txBody>
+          <a:bodyPr wrap="square" lIns="0" tIns="0" rIns="0" bIns="0" rtlCol="0" anchor="t"/>
+          <a:lstStyle/>
+          <a:p>
+            <a:pPr indent="0" marL="0">
+              <a:buNone/>
+            </a:pPr>
+            <a:r>
+              <a:rPr lang="en-US" sz="1200" dirty="0">
+                <a:solidFill>
+                  <a:schemeClr val="tx1"/>
+                </a:solidFill>
+              </a:rPr>
+              <a:t>of matched headlines score Neutral</a:t>
+            </a:r>
+            <a:endParaRPr lang="en-US" sz="1200" dirty="0"/>
+          </a:p>
+        </p:txBody>
+      </p:sp>
+      <p:sp>
+        <p:nvSpPr>
+          <p:cNvPr id="9" name="Craigslist card"/>
           <p:cNvSpPr/>
           <p:nvPr/>
         </p:nvSpPr>
         <p:spPr>
           <a:xfrm>
-            <a:off x="457200" y="1188720"/>
-            <a:ext cx="3291840" cy="1920240"/>
+            <a:off x="457200" y="2834640"/>
+            <a:ext cx="8229600" cy="1691640"/>
           </a:xfrm>
           <a:prstGeom prst="roundRect">
             <a:avLst>
-              <a:gd name="adj" fmla="val 3810"/>
+              <a:gd name="adj" fmla="val 4324"/>
             </a:avLst>
           </a:prstGeom>
           <a:solidFill>
-            <a:srgbClr val="FBE5E3"/>
+            <a:schemeClr val="bg2"/>
           </a:solidFill>
           <a:ln w="12700">
             <a:solidFill>
-              <a:srgbClr val="FBE5E3"/>
+              <a:schemeClr val="bg2"/>
             </a:solidFill>
             <a:prstDash val="solid"/>
           </a:ln>
@@ -4575,14 +6477,14 @@
       </p:sp>
       <p:sp>
         <p:nvSpPr>
-          <p:cNvPr id="4" name="Stat coef number"/>
+          <p:cNvPr id="10" name="Craigslist title"/>
           <p:cNvSpPr txBox="1"/>
           <p:nvPr/>
         </p:nvSpPr>
         <p:spPr>
           <a:xfrm>
-            <a:off x="685800" y="1371600"/>
-            <a:ext cx="2834640" cy="685800"/>
+            <a:off x="685800" y="2971800"/>
+            <a:ext cx="7772400" cy="365760"/>
           </a:xfrm>
           <a:prstGeom prst="rect">
             <a:avLst/>
@@ -4598,30 +6500,27 @@
               <a:buNone/>
             </a:pPr>
             <a:r>
-              <a:rPr lang="en-US" sz="4000" b="1" dirty="0">
-                <a:solidFill>
-                  <a:schemeClr val="accent2"/>
-                </a:solidFill>
-                <a:latin typeface="Cambria" pitchFamily="34" charset="0"/>
-                <a:ea typeface="Cambria" pitchFamily="34" charset="-122"/>
-                <a:cs typeface="Cambria" pitchFamily="34" charset="-120"/>
-              </a:rPr>
-              <a:t>−1.26</a:t>
-            </a:r>
-            <a:endParaRPr lang="en-US" sz="4000" dirty="0"/>
-          </a:p>
-        </p:txBody>
-      </p:sp>
-      <p:sp>
-        <p:nvSpPr>
-          <p:cNvPr id="5" name="Stat coef label"/>
+              <a:rPr lang="en-US" sz="1700" b="1" dirty="0">
+                <a:solidFill>
+                  <a:schemeClr val="tx2"/>
+                </a:solidFill>
+              </a:rPr>
+              <a:t>A telling coefficient: negativeNewsCount = +0.41</a:t>
+            </a:r>
+            <a:endParaRPr lang="en-US" sz="1700" dirty="0"/>
+          </a:p>
+        </p:txBody>
+      </p:sp>
+      <p:sp>
+        <p:nvSpPr>
+          <p:cNvPr id="11" name="Craigslist body"/>
           <p:cNvSpPr txBox="1"/>
           <p:nvPr/>
         </p:nvSpPr>
         <p:spPr>
           <a:xfrm>
-            <a:off x="685800" y="2084832"/>
-            <a:ext cx="2834640" cy="548640"/>
+            <a:off x="685800" y="3383280"/>
+            <a:ext cx="7772400" cy="1051560"/>
           </a:xfrm>
           <a:prstGeom prst="rect">
             <a:avLst/>
@@ -4637,106 +6536,12 @@
               <a:buNone/>
             </a:pPr>
             <a:r>
-              <a:rPr lang="en-US" sz="1200" dirty="0">
+              <a:rPr lang="en-US" sz="1400" dirty="0">
                 <a:solidFill>
                   <a:schemeClr val="tx1"/>
                 </a:solidFill>
               </a:rPr>
-              <a:t>LR coefficient on fundingDataLeakageSafe, the largest in the model</a:t>
-            </a:r>
-            <a:endParaRPr lang="en-US" sz="1200" dirty="0"/>
-          </a:p>
-        </p:txBody>
-      </p:sp>
-      <p:sp>
-        <p:nvSpPr>
-          <p:cNvPr id="6" name="Text 4"/>
-          <p:cNvSpPr txBox="1"/>
-          <p:nvPr/>
-        </p:nvSpPr>
-        <p:spPr>
-          <a:xfrm>
-            <a:off x="4023360" y="1188720"/>
-            <a:ext cx="4663440" cy="3383280"/>
-          </a:xfrm>
-          <a:prstGeom prst="rect">
-            <a:avLst/>
-          </a:prstGeom>
-          <a:noFill/>
-          <a:ln/>
-        </p:spPr>
-        <p:txBody>
-          <a:bodyPr wrap="square" rtlCol="0" anchor="t"/>
-          <a:lstStyle/>
-          <a:p>
-            <a:pPr marL="342900" indent="-342900">
-              <a:spcAft>
-                <a:spcPts val="800"/>
-              </a:spcAft>
-              <a:buSzPct val="100000"/>
-              <a:buChar char="•"/>
-            </a:pPr>
-            <a:r>
-              <a:rPr lang="en-US" sz="1400" dirty="0">
-                <a:solidFill>
-                  <a:schemeClr val="tx1"/>
-                </a:solidFill>
-              </a:rPr>
-              <a:t>Flag = 0 means the last round was on or after the cutoff, i.e. the company was still raising money after 2013</a:t>
-            </a:r>
-            <a:endParaRPr lang="en-US" sz="1400" dirty="0"/>
-          </a:p>
-          <a:p>
-            <a:pPr marL="342900" indent="-342900">
-              <a:spcAft>
-                <a:spcPts val="800"/>
-              </a:spcAft>
-              <a:buSzPct val="100000"/>
-              <a:buChar char="•"/>
-            </a:pPr>
-            <a:r>
-              <a:rPr lang="en-US" sz="1400" dirty="0">
-                <a:solidFill>
-                  <a:schemeClr val="tx1"/>
-                </a:solidFill>
-              </a:rPr>
-              <a:t>The guard blocked post-cutoff amounts but exposed post-cutoff events</a:t>
-            </a:r>
-            <a:endParaRPr lang="en-US" sz="1400" dirty="0"/>
-          </a:p>
-          <a:p>
-            <a:pPr marL="342900" indent="-342900">
-              <a:spcAft>
-                <a:spcPts val="800"/>
-              </a:spcAft>
-              <a:buSzPct val="100000"/>
-              <a:buChar char="•"/>
-            </a:pPr>
-            <a:r>
-              <a:rPr lang="en-US" sz="1400" dirty="0">
-                <a:solidFill>
-                  <a:schemeClr val="tx1"/>
-                </a:solidFill>
-              </a:rPr>
-              <a:t>Absolute AUC is likely optimistic; the sentiment comparison is still fair because both sets share the flag</a:t>
-            </a:r>
-            <a:endParaRPr lang="en-US" sz="1400" dirty="0"/>
-          </a:p>
-          <a:p>
-            <a:pPr marL="342900" indent="-342900">
-              <a:spcAft>
-                <a:spcPts val="800"/>
-              </a:spcAft>
-              <a:buSzPct val="100000"/>
-              <a:buChar char="•"/>
-            </a:pPr>
-            <a:r>
-              <a:rPr lang="en-US" sz="1400" dirty="0">
-                <a:solidFill>
-                  <a:schemeClr val="tx1"/>
-                </a:solidFill>
-              </a:rPr>
-              <a:t>Fix: drop the flag and rebuild recency from round-level dates</a:t>
+              <a:t>Craigslist is operating, but its matched headlines are crime stories (“Craigslist killer jailed”). The lexicon correctly scores them negative, yet they say nothing about the business. Better matching, not a fancier model, is the next step.</a:t>
             </a:r>
             <a:endParaRPr lang="en-US" sz="1400" dirty="0"/>
           </a:p>
@@ -4923,7 +6728,7 @@
                   <a:schemeClr val="tx1"/>
                 </a:solidFill>
               </a:rPr>
-              <a:t>News for only 3 startups</a:t>
+              <a:t>815-startup cohort, limited by rate limits</a:t>
             </a:r>
             <a:endParaRPr lang="en-US" sz="1400" dirty="0"/>
           </a:p>
@@ -4941,7 +6746,7 @@
                   <a:schemeClr val="tx1"/>
                 </a:solidFill>
               </a:rPr>
-              <a:t>Leaky funding-recency indicator</a:t>
+              <a:t>29% matching precision (one annotator)</a:t>
             </a:r>
             <a:endParaRPr lang="en-US" sz="1400" dirty="0"/>
           </a:p>
@@ -4959,7 +6764,7 @@
                   <a:schemeClr val="tx1"/>
                 </a:solidFill>
               </a:rPr>
-              <a:t>Lexicon: no negation or stemming</a:t>
+              <a:t>Lexicon: mostly neutral, no negation</a:t>
             </a:r>
             <a:endParaRPr lang="en-US" sz="1400" dirty="0"/>
           </a:p>
@@ -4977,7 +6782,7 @@
                   <a:schemeClr val="tx1"/>
                 </a:solidFill>
               </a:rPr>
-              <a:t>Single split with no confidence intervals</a:t>
+              <a:t>One borderline p-value across 8 tests</a:t>
             </a:r>
             <a:endParaRPr lang="en-US" sz="1400" dirty="0"/>
           </a:p>
@@ -5074,7 +6879,7 @@
                   <a:schemeClr val="tx1"/>
                 </a:solidFill>
               </a:rPr>
-              <a:t>Batch news collection, then re-run E1–E4</a:t>
+              <a:t>Resume collection; it continues where it stopped</a:t>
             </a:r>
             <a:endParaRPr lang="en-US" sz="1400" dirty="0"/>
           </a:p>
@@ -5092,7 +6897,7 @@
                   <a:schemeClr val="tx1"/>
                 </a:solidFill>
               </a:rPr>
-              <a:t>Remove the flag and use round-level dates</a:t>
+              <a:t>Context-aware matching (domain, founder, verbs)</a:t>
             </a:r>
             <a:endParaRPr lang="en-US" sz="1400" dirty="0"/>
           </a:p>
@@ -5110,7 +6915,7 @@
                   <a:schemeClr val="tx1"/>
                 </a:solidFill>
               </a:rPr>
-              <a:t>Threshold tuning and k-fold cross-validation</a:t>
+              <a:t>Negation-aware or domain-tuned sentiment</a:t>
             </a:r>
             <a:endParaRPr lang="en-US" sz="1400" dirty="0"/>
           </a:p>
@@ -5128,7 +6933,7 @@
                   <a:schemeClr val="tx1"/>
                 </a:solidFill>
               </a:rPr>
-              <a:t>Ablation: coverage-only vs coverage plus tone</a:t>
+              <a:t>Round-level funding data, without leakage</a:t>
             </a:r>
             <a:endParaRPr lang="en-US" sz="1400" dirty="0"/>
           </a:p>
@@ -5146,7 +6951,7 @@
                   <a:schemeClr val="tx1"/>
                 </a:solidFill>
               </a:rPr>
-              <a:t>Negation-aware scoring</a:t>
+              <a:t>One pre-registered test on a new cohort</a:t>
             </a:r>
             <a:endParaRPr lang="en-US" sz="1400" dirty="0"/>
           </a:p>
@@ -5254,7 +7059,7 @@
                   <a:schemeClr val="bg1"/>
                 </a:solidFill>
               </a:rPr>
-              <a:t>A verified pipeline; an open question</a:t>
+              <a:t>A verified pipeline and an honest answer</a:t>
             </a:r>
             <a:endParaRPr lang="en-US" sz="3200" dirty="0"/>
           </a:p>
@@ -5292,7 +7097,7 @@
                   <a:schemeClr val="bg2"/>
                 </a:solidFill>
               </a:rPr>
-              <a:t>Financial data gives AUC ≈ 0.71–0.73. Sentiment's value remains untested at scale.</a:t>
+              <a:t>Leak-free AUC 0.679 · news tone +0.010 (borderline) · the bottleneck is data quality</a:t>
             </a:r>
             <a:endParaRPr lang="en-US" sz="1600" dirty="0"/>
           </a:p>
@@ -5377,7 +7182,7 @@
       </p:sp>
       <p:sp>
         <p:nvSpPr>
-          <p:cNvPr id="3" name="Card financial"/>
+          <p:cNvPr id="3" name="Card leakage"/>
           <p:cNvSpPr/>
           <p:nvPr/>
         </p:nvSpPr>
@@ -5404,7 +7209,7 @@
       </p:sp>
       <p:sp>
         <p:nvSpPr>
-          <p:cNvPr id="4" name="Card sentiment"/>
+          <p:cNvPr id="4" name="Card baseline"/>
           <p:cNvSpPr/>
           <p:nvPr/>
         </p:nvSpPr>
@@ -5431,7 +7236,7 @@
       </p:sp>
       <p:sp>
         <p:nvSpPr>
-          <p:cNvPr id="5" name="Card model"/>
+          <p:cNvPr id="5" name="Card tone"/>
           <p:cNvSpPr/>
           <p:nvPr/>
         </p:nvSpPr>
@@ -5458,7 +7263,7 @@
       </p:sp>
       <p:sp>
         <p:nvSpPr>
-          <p:cNvPr id="6" name="Stat AUC number"/>
+          <p:cNvPr id="6" name="Stat leak number"/>
           <p:cNvSpPr txBox="1"/>
           <p:nvPr/>
         </p:nvSpPr>
@@ -5481,23 +7286,23 @@
               <a:buNone/>
             </a:pPr>
             <a:r>
-              <a:rPr lang="en-US" sz="3000" b="1" dirty="0">
-                <a:solidFill>
-                  <a:schemeClr val="accent1"/>
+              <a:rPr lang="en-US" sz="3200" b="1" dirty="0">
+                <a:solidFill>
+                  <a:schemeClr val="accent2"/>
                 </a:solidFill>
                 <a:latin typeface="Cambria" pitchFamily="34" charset="0"/>
                 <a:ea typeface="Cambria" pitchFamily="34" charset="-122"/>
                 <a:cs typeface="Cambria" pitchFamily="34" charset="-120"/>
               </a:rPr>
-              <a:t>0.71–0.73</a:t>
-            </a:r>
-            <a:endParaRPr lang="en-US" sz="3000" dirty="0"/>
-          </a:p>
-        </p:txBody>
-      </p:sp>
-      <p:sp>
-        <p:nvSpPr>
-          <p:cNvPr id="7" name="Stat AUC label"/>
+              <a:t>−0.044</a:t>
+            </a:r>
+            <a:endParaRPr lang="en-US" sz="3200" dirty="0"/>
+          </a:p>
+        </p:txBody>
+      </p:sp>
+      <p:sp>
+        <p:nvSpPr>
+          <p:cNvPr id="7" name="Stat leak label"/>
           <p:cNvSpPr txBox="1"/>
           <p:nvPr/>
         </p:nvSpPr>
@@ -5525,7 +7330,7 @@
                   <a:schemeClr val="tx1"/>
                 </a:solidFill>
               </a:rPr>
-              <a:t>AUC from financial features alone: real but moderate signal</a:t>
+              <a:t>AUC that came from a leak we found and removed (p &lt; 0.001)</a:t>
             </a:r>
             <a:endParaRPr lang="en-US" sz="1200" dirty="0"/>
           </a:p>
@@ -5533,7 +7338,7 @@
       </p:sp>
       <p:sp>
         <p:nvSpPr>
-          <p:cNvPr id="8" name="Stat changed number"/>
+          <p:cNvPr id="8" name="Stat base number"/>
           <p:cNvSpPr txBox="1"/>
           <p:nvPr/>
         </p:nvSpPr>
@@ -5556,23 +7361,23 @@
               <a:buNone/>
             </a:pPr>
             <a:r>
-              <a:rPr lang="en-US" sz="3000" b="1" dirty="0">
-                <a:solidFill>
-                  <a:schemeClr val="accent2"/>
+              <a:rPr lang="en-US" sz="3200" b="1" dirty="0">
+                <a:solidFill>
+                  <a:schemeClr val="accent3"/>
                 </a:solidFill>
                 <a:latin typeface="Cambria" pitchFamily="34" charset="0"/>
                 <a:ea typeface="Cambria" pitchFamily="34" charset="-122"/>
                 <a:cs typeface="Cambria" pitchFamily="34" charset="-120"/>
               </a:rPr>
-              <a:t>2 / 8,686</a:t>
-            </a:r>
-            <a:endParaRPr lang="en-US" sz="3000" dirty="0"/>
-          </a:p>
-        </p:txBody>
-      </p:sp>
-      <p:sp>
-        <p:nvSpPr>
-          <p:cNvPr id="9" name="Stat changed label"/>
+              <a:t>0.679</a:t>
+            </a:r>
+            <a:endParaRPr lang="en-US" sz="3200" dirty="0"/>
+          </a:p>
+        </p:txBody>
+      </p:sp>
+      <p:sp>
+        <p:nvSpPr>
+          <p:cNvPr id="9" name="Stat base label"/>
           <p:cNvSpPr txBox="1"/>
           <p:nvPr/>
         </p:nvSpPr>
@@ -5600,7 +7405,7 @@
                   <a:schemeClr val="tx1"/>
                 </a:solidFill>
               </a:rPr>
-              <a:t>test predictions changed by adding sentiment</a:t>
+              <a:t>AUC from leak-free structural features, all 22,075 startups</a:t>
             </a:r>
             <a:endParaRPr lang="en-US" sz="1200" dirty="0"/>
           </a:p>
@@ -5608,7 +7413,7 @@
       </p:sp>
       <p:sp>
         <p:nvSpPr>
-          <p:cNvPr id="10" name="Stat model number"/>
+          <p:cNvPr id="10" name="Stat tone number"/>
           <p:cNvSpPr txBox="1"/>
           <p:nvPr/>
         </p:nvSpPr>
@@ -5631,23 +7436,23 @@
               <a:buNone/>
             </a:pPr>
             <a:r>
-              <a:rPr lang="en-US" sz="3000" b="1" dirty="0">
-                <a:solidFill>
-                  <a:schemeClr val="accent3"/>
+              <a:rPr lang="en-US" sz="3200" b="1" dirty="0">
+                <a:solidFill>
+                  <a:schemeClr val="accent1"/>
                 </a:solidFill>
                 <a:latin typeface="Cambria" pitchFamily="34" charset="0"/>
                 <a:ea typeface="Cambria" pitchFamily="34" charset="-122"/>
                 <a:cs typeface="Cambria" pitchFamily="34" charset="-120"/>
               </a:rPr>
-              <a:t>LR ≈ SVM</a:t>
-            </a:r>
-            <a:endParaRPr lang="en-US" sz="3000" dirty="0"/>
-          </a:p>
-        </p:txBody>
-      </p:sp>
-      <p:sp>
-        <p:nvSpPr>
-          <p:cNvPr id="11" name="Stat model label"/>
+              <a:t>+0.010</a:t>
+            </a:r>
+            <a:endParaRPr lang="en-US" sz="3200" dirty="0"/>
+          </a:p>
+        </p:txBody>
+      </p:sp>
+      <p:sp>
+        <p:nvSpPr>
+          <p:cNvPr id="11" name="Stat tone label"/>
           <p:cNvSpPr txBox="1"/>
           <p:nvPr/>
         </p:nvSpPr>
@@ -5675,7 +7480,7 @@
                   <a:schemeClr val="tx1"/>
                 </a:solidFill>
               </a:rPr>
-              <a:t>LR is better balanced; SVM ranks slightly better</a:t>
+              <a:t>AUC from news tone: consistent but borderline (p = 0.047)</a:t>
             </a:r>
             <a:endParaRPr lang="en-US" sz="1200" dirty="0"/>
           </a:p>
@@ -5711,7 +7516,7 @@
                   <a:schemeClr val="tx2"/>
                 </a:solidFill>
               </a:rPr>
-              <a:t>Sentiment's value is untested, not disproven: only 3 of 22,075 startups had matched pre-2013 news.</a:t>
+              <a:t>News volume adds nothing, and news tone adds a little. The limit is data quality: 8.5% coverage and 29% matching precision.</a:t>
             </a:r>
             <a:endParaRPr lang="en-US" sz="1800" dirty="0"/>
           </a:p>
@@ -6288,7 +8093,7 @@
                   <a:schemeClr val="tx1"/>
                 </a:solidFill>
               </a:rPr>
-              <a:t>Only data dated before T is allowed: eligibility, funding and news (filtered twice)</a:t>
+              <a:t>Only data dated before T is allowed; news is filtered twice (Hive check: 0 later items)</a:t>
             </a:r>
             <a:endParaRPr lang="en-US" sz="1500" dirty="0"/>
           </a:p>
@@ -6306,7 +8111,7 @@
                   <a:schemeClr val="tx1"/>
                 </a:solidFill>
               </a:rPr>
-              <a:t>Funding totals are used only when every round is provably before T</a:t>
+              <a:t>Every final feature is computable from pre-2013 information for every startup</a:t>
             </a:r>
             <a:endParaRPr lang="en-US" sz="1500" dirty="0"/>
           </a:p>
@@ -6853,7 +8658,7 @@
                   <a:schemeClr val="tx1"/>
                 </a:solidFill>
               </a:rPr>
-              <a:t>raw and processed storage</a:t>
+              <a:t>startups and collected news</a:t>
             </a:r>
             <a:endParaRPr lang="en-US" sz="1200" dirty="0"/>
           </a:p>
@@ -6980,7 +8785,7 @@
                   <a:schemeClr val="tx1"/>
                 </a:solidFill>
               </a:rPr>
-              <a:t>schema and SQL EDA</a:t>
+              <a:t>SQL over the same files</a:t>
             </a:r>
             <a:endParaRPr lang="en-US" sz="1200" dirty="0"/>
           </a:p>
@@ -7107,7 +8912,7 @@
                   <a:schemeClr val="tx1"/>
                 </a:solidFill>
               </a:rPr>
-              <a:t>match, score, features</a:t>
+              <a:t>collect, match, score</a:t>
             </a:r>
             <a:endParaRPr lang="en-US" sz="1200" dirty="0"/>
           </a:p>
@@ -7234,7 +9039,7 @@
                   <a:schemeClr val="tx1"/>
                 </a:solidFill>
               </a:rPr>
-              <a:t>key/value join, persist</a:t>
+              <a:t>textFile, joins, persist</a:t>
             </a:r>
             <a:endParaRPr lang="en-US" sz="1200" dirty="0"/>
           </a:p>
@@ -7361,7 +9166,7 @@
                   <a:schemeClr val="tx1"/>
                 </a:solidFill>
               </a:rPr>
-              <a:t>LR and SVM, 4 experiments</a:t>
+              <a:t>LR and SVM, 5-fold CV</a:t>
             </a:r>
             <a:endParaRPr lang="en-US" sz="1200" dirty="0"/>
           </a:p>
@@ -7419,7 +9224,7 @@
                   <a:schemeClr val="tx1"/>
                 </a:solidFill>
               </a:rPr>
-              <a:t>Python is used only for plots; every graded stage is Scala and Spark</a:t>
+              <a:t>31 ScalaTest unit tests; Python is used only for plots</a:t>
             </a:r>
             <a:endParaRPr lang="en-US" sz="1500" dirty="0"/>
           </a:p>
@@ -7527,7 +9332,7 @@
                   <a:schemeClr val="tx2"/>
                 </a:solidFill>
               </a:rPr>
-              <a:t>Two feature sets, one strict superset</a:t>
+              <a:t>Collecting pre-2013 news at scale</a:t>
             </a:r>
             <a:endParaRPr lang="en-US" sz="2800" dirty="0"/>
           </a:p>
@@ -7535,68 +9340,14 @@
       </p:sp>
       <p:sp>
         <p:nvSpPr>
-          <p:cNvPr id="3" name="Group A card"/>
-          <p:cNvSpPr/>
-          <p:nvPr/>
-        </p:nvSpPr>
-        <p:spPr>
-          <a:xfrm>
-            <a:off x="457200" y="1143000"/>
-            <a:ext cx="3977640" cy="3383280"/>
-          </a:xfrm>
-          <a:prstGeom prst="roundRect">
-            <a:avLst>
-              <a:gd name="adj" fmla="val 2162"/>
-            </a:avLst>
-          </a:prstGeom>
-          <a:solidFill>
-            <a:schemeClr val="bg2"/>
-          </a:solidFill>
-          <a:ln w="12700">
-            <a:solidFill>
-              <a:schemeClr val="bg2"/>
-            </a:solidFill>
-            <a:prstDash val="solid"/>
-          </a:ln>
-        </p:spPr>
-      </p:sp>
-      <p:sp>
-        <p:nvSpPr>
-          <p:cNvPr id="4" name="Group B card"/>
-          <p:cNvSpPr/>
-          <p:nvPr/>
-        </p:nvSpPr>
-        <p:spPr>
-          <a:xfrm>
-            <a:off x="4709160" y="1143000"/>
-            <a:ext cx="3977640" cy="3383280"/>
-          </a:xfrm>
-          <a:prstGeom prst="roundRect">
-            <a:avLst>
-              <a:gd name="adj" fmla="val 2162"/>
-            </a:avLst>
-          </a:prstGeom>
-          <a:solidFill>
-            <a:srgbClr val="E3F3EC"/>
-          </a:solidFill>
-          <a:ln w="12700">
-            <a:solidFill>
-              <a:srgbClr val="E3F3EC"/>
-            </a:solidFill>
-            <a:prstDash val="solid"/>
-          </a:ln>
-        </p:spPr>
-      </p:sp>
-      <p:sp>
-        <p:nvSpPr>
-          <p:cNvPr id="5" name="Group A title"/>
+          <p:cNvPr id="3" name="Stat cohort number"/>
           <p:cNvSpPr txBox="1"/>
           <p:nvPr/>
         </p:nvSpPr>
         <p:spPr>
           <a:xfrm>
-            <a:off x="685800" y="1280160"/>
-            <a:ext cx="3566160" cy="411480"/>
+            <a:off x="457200" y="1188720"/>
+            <a:ext cx="2651760" cy="685800"/>
           </a:xfrm>
           <a:prstGeom prst="rect">
             <a:avLst/>
@@ -7612,7 +9363,7 @@
               <a:buNone/>
             </a:pPr>
             <a:r>
-              <a:rPr lang="en-US" sz="1800" b="1" dirty="0">
+              <a:rPr lang="en-US" sz="4000" b="1" dirty="0">
                 <a:solidFill>
                   <a:schemeClr val="accent3"/>
                 </a:solidFill>
@@ -7620,22 +9371,208 @@
                 <a:ea typeface="Cambria" pitchFamily="34" charset="-122"/>
                 <a:cs typeface="Cambria" pitchFamily="34" charset="-120"/>
               </a:rPr>
-              <a:t>A · Financial (8)</a:t>
-            </a:r>
-            <a:endParaRPr lang="en-US" sz="1800" dirty="0"/>
-          </a:p>
-        </p:txBody>
-      </p:sp>
-      <p:sp>
-        <p:nvSpPr>
-          <p:cNvPr id="6" name="Text 4"/>
+              <a:t>815</a:t>
+            </a:r>
+            <a:endParaRPr lang="en-US" sz="4000" dirty="0"/>
+          </a:p>
+        </p:txBody>
+      </p:sp>
+      <p:sp>
+        <p:nvSpPr>
+          <p:cNvPr id="4" name="Stat cohort label"/>
           <p:cNvSpPr txBox="1"/>
           <p:nvPr/>
         </p:nvSpPr>
         <p:spPr>
           <a:xfrm>
-            <a:off x="685800" y="1783080"/>
-            <a:ext cx="3566160" cy="2651760"/>
+            <a:off x="457200" y="1901952"/>
+            <a:ext cx="2651760" cy="548640"/>
+          </a:xfrm>
+          <a:prstGeom prst="rect">
+            <a:avLst/>
+          </a:prstGeom>
+          <a:noFill/>
+          <a:ln/>
+        </p:spPr>
+        <p:txBody>
+          <a:bodyPr wrap="square" lIns="0" tIns="0" rIns="0" bIns="0" rtlCol="0" anchor="t"/>
+          <a:lstStyle/>
+          <a:p>
+            <a:pPr indent="0" marL="0">
+              <a:buNone/>
+            </a:pPr>
+            <a:r>
+              <a:rPr lang="en-US" sz="1200" dirty="0">
+                <a:solidFill>
+                  <a:schemeClr val="tx1"/>
+                </a:solidFill>
+              </a:rPr>
+              <a:t>startups queried: a balanced random cohort (408 closed)</a:t>
+            </a:r>
+            <a:endParaRPr lang="en-US" sz="1200" dirty="0"/>
+          </a:p>
+        </p:txBody>
+      </p:sp>
+      <p:sp>
+        <p:nvSpPr>
+          <p:cNvPr id="5" name="Stat headlines number"/>
+          <p:cNvSpPr txBox="1"/>
+          <p:nvPr/>
+        </p:nvSpPr>
+        <p:spPr>
+          <a:xfrm>
+            <a:off x="3246120" y="1188720"/>
+            <a:ext cx="2651760" cy="685800"/>
+          </a:xfrm>
+          <a:prstGeom prst="rect">
+            <a:avLst/>
+          </a:prstGeom>
+          <a:noFill/>
+          <a:ln/>
+        </p:spPr>
+        <p:txBody>
+          <a:bodyPr wrap="square" lIns="0" tIns="0" rIns="0" bIns="0" rtlCol="0" anchor="t"/>
+          <a:lstStyle/>
+          <a:p>
+            <a:pPr indent="0" marL="0">
+              <a:buNone/>
+            </a:pPr>
+            <a:r>
+              <a:rPr lang="en-US" sz="4000" b="1" dirty="0">
+                <a:solidFill>
+                  <a:schemeClr val="accent3"/>
+                </a:solidFill>
+                <a:latin typeface="Cambria" pitchFamily="34" charset="0"/>
+                <a:ea typeface="Cambria" pitchFamily="34" charset="-122"/>
+                <a:cs typeface="Cambria" pitchFamily="34" charset="-120"/>
+              </a:rPr>
+              <a:t>3,122</a:t>
+            </a:r>
+            <a:endParaRPr lang="en-US" sz="4000" dirty="0"/>
+          </a:p>
+        </p:txBody>
+      </p:sp>
+      <p:sp>
+        <p:nvSpPr>
+          <p:cNvPr id="6" name="Stat headlines label"/>
+          <p:cNvSpPr txBox="1"/>
+          <p:nvPr/>
+        </p:nvSpPr>
+        <p:spPr>
+          <a:xfrm>
+            <a:off x="3246120" y="1901952"/>
+            <a:ext cx="2651760" cy="548640"/>
+          </a:xfrm>
+          <a:prstGeom prst="rect">
+            <a:avLst/>
+          </a:prstGeom>
+          <a:noFill/>
+          <a:ln/>
+        </p:spPr>
+        <p:txBody>
+          <a:bodyPr wrap="square" lIns="0" tIns="0" rIns="0" bIns="0" rtlCol="0" anchor="t"/>
+          <a:lstStyle/>
+          <a:p>
+            <a:pPr indent="0" marL="0">
+              <a:buNone/>
+            </a:pPr>
+            <a:r>
+              <a:rPr lang="en-US" sz="1200" dirty="0">
+                <a:solidFill>
+                  <a:schemeClr val="tx1"/>
+                </a:solidFill>
+              </a:rPr>
+              <a:t>unique pre-2013 headlines, of which 378 matched the company name</a:t>
+            </a:r>
+            <a:endParaRPr lang="en-US" sz="1200" dirty="0"/>
+          </a:p>
+        </p:txBody>
+      </p:sp>
+      <p:sp>
+        <p:nvSpPr>
+          <p:cNvPr id="7" name="Stat covered number"/>
+          <p:cNvSpPr txBox="1"/>
+          <p:nvPr/>
+        </p:nvSpPr>
+        <p:spPr>
+          <a:xfrm>
+            <a:off x="6035040" y="1188720"/>
+            <a:ext cx="2651760" cy="685800"/>
+          </a:xfrm>
+          <a:prstGeom prst="rect">
+            <a:avLst/>
+          </a:prstGeom>
+          <a:noFill/>
+          <a:ln/>
+        </p:spPr>
+        <p:txBody>
+          <a:bodyPr wrap="square" lIns="0" tIns="0" rIns="0" bIns="0" rtlCol="0" anchor="t"/>
+          <a:lstStyle/>
+          <a:p>
+            <a:pPr indent="0" marL="0">
+              <a:buNone/>
+            </a:pPr>
+            <a:r>
+              <a:rPr lang="en-US" sz="4000" b="1" dirty="0">
+                <a:solidFill>
+                  <a:schemeClr val="accent2"/>
+                </a:solidFill>
+                <a:latin typeface="Cambria" pitchFamily="34" charset="0"/>
+                <a:ea typeface="Cambria" pitchFamily="34" charset="-122"/>
+                <a:cs typeface="Cambria" pitchFamily="34" charset="-120"/>
+              </a:rPr>
+              <a:t>69</a:t>
+            </a:r>
+            <a:endParaRPr lang="en-US" sz="4000" dirty="0"/>
+          </a:p>
+        </p:txBody>
+      </p:sp>
+      <p:sp>
+        <p:nvSpPr>
+          <p:cNvPr id="8" name="Stat covered label"/>
+          <p:cNvSpPr txBox="1"/>
+          <p:nvPr/>
+        </p:nvSpPr>
+        <p:spPr>
+          <a:xfrm>
+            <a:off x="6035040" y="1901952"/>
+            <a:ext cx="2651760" cy="548640"/>
+          </a:xfrm>
+          <a:prstGeom prst="rect">
+            <a:avLst/>
+          </a:prstGeom>
+          <a:noFill/>
+          <a:ln/>
+        </p:spPr>
+        <p:txBody>
+          <a:bodyPr wrap="square" lIns="0" tIns="0" rIns="0" bIns="0" rtlCol="0" anchor="t"/>
+          <a:lstStyle/>
+          <a:p>
+            <a:pPr indent="0" marL="0">
+              <a:buNone/>
+            </a:pPr>
+            <a:r>
+              <a:rPr lang="en-US" sz="1200" dirty="0">
+                <a:solidFill>
+                  <a:schemeClr val="tx1"/>
+                </a:solidFill>
+              </a:rPr>
+              <a:t>startups with matched news (8.5%): 6.1% of closed vs 10.8% of operating</a:t>
+            </a:r>
+            <a:endParaRPr lang="en-US" sz="1200" dirty="0"/>
+          </a:p>
+        </p:txBody>
+      </p:sp>
+      <p:sp>
+        <p:nvSpPr>
+          <p:cNvPr id="9" name="Text 7"/>
+          <p:cNvSpPr txBox="1"/>
+          <p:nvPr/>
+        </p:nvSpPr>
+        <p:spPr>
+          <a:xfrm>
+            <a:off x="457200" y="2834640"/>
+            <a:ext cx="8229600" cy="1737360"/>
           </a:xfrm>
           <a:prstGeom prst="rect">
             <a:avLst/>
@@ -7660,7 +9597,7 @@
                   <a:schemeClr val="tx1"/>
                 </a:solidFill>
               </a:rPr>
-              <a:t>Age at cutoff</a:t>
+              <a:t>Google News rate-limited us after 175 requests, so the collector became resumable and checkpointed</a:t>
             </a:r>
             <a:endParaRPr lang="en-US" sz="1400" dirty="0"/>
           </a:p>
@@ -7678,7 +9615,7 @@
                   <a:schemeClr val="tx1"/>
                 </a:solidFill>
               </a:rPr>
-              <a:t>Total funding and round count (leakage-guarded)</a:t>
+              <a:t>Balanced order: any stopping point is a 1:1 random sample, which maximises AUC precision per request</a:t>
             </a:r>
             <a:endParaRPr lang="en-US" sz="1400" dirty="0"/>
           </a:p>
@@ -7696,194 +9633,7 @@
                   <a:schemeClr val="tx1"/>
                 </a:solidFill>
               </a:rPr>
-              <a:t>Average round size, funding frequency</a:t>
-            </a:r>
-            <a:endParaRPr lang="en-US" sz="1400" dirty="0"/>
-          </a:p>
-          <a:p>
-            <a:pPr marL="342900" indent="-342900">
-              <a:spcAft>
-                <a:spcPts val="800"/>
-              </a:spcAft>
-              <a:buSzPct val="100000"/>
-              <a:buChar char="•"/>
-            </a:pPr>
-            <a:r>
-              <a:rPr lang="en-US" sz="1400" dirty="0">
-                <a:solidFill>
-                  <a:schemeClr val="tx1"/>
-                </a:solidFill>
-              </a:rPr>
-              <a:t>Days since last round</a:t>
-            </a:r>
-            <a:endParaRPr lang="en-US" sz="1400" dirty="0"/>
-          </a:p>
-          <a:p>
-            <a:pPr marL="342900" indent="-342900">
-              <a:spcAft>
-                <a:spcPts val="800"/>
-              </a:spcAft>
-              <a:buSzPct val="100000"/>
-              <a:buChar char="•"/>
-            </a:pPr>
-            <a:r>
-              <a:rPr lang="en-US" sz="1400" dirty="0">
-                <a:solidFill>
-                  <a:schemeClr val="tx1"/>
-                </a:solidFill>
-              </a:rPr>
-              <a:t>Two 0/1 indicator flags</a:t>
-            </a:r>
-            <a:endParaRPr lang="en-US" sz="1400" dirty="0"/>
-          </a:p>
-        </p:txBody>
-      </p:sp>
-      <p:sp>
-        <p:nvSpPr>
-          <p:cNvPr id="7" name="Group B title"/>
-          <p:cNvSpPr txBox="1"/>
-          <p:nvPr/>
-        </p:nvSpPr>
-        <p:spPr>
-          <a:xfrm>
-            <a:off x="4937760" y="1280160"/>
-            <a:ext cx="3566160" cy="411480"/>
-          </a:xfrm>
-          <a:prstGeom prst="rect">
-            <a:avLst/>
-          </a:prstGeom>
-          <a:noFill/>
-          <a:ln/>
-        </p:spPr>
-        <p:txBody>
-          <a:bodyPr wrap="square" lIns="0" tIns="0" rIns="0" bIns="0" rtlCol="0" anchor="t"/>
-          <a:lstStyle/>
-          <a:p>
-            <a:pPr indent="0" marL="0">
-              <a:buNone/>
-            </a:pPr>
-            <a:r>
-              <a:rPr lang="en-US" sz="1800" b="1" dirty="0">
-                <a:solidFill>
-                  <a:schemeClr val="accent1"/>
-                </a:solidFill>
-                <a:latin typeface="Cambria" pitchFamily="34" charset="0"/>
-                <a:ea typeface="Cambria" pitchFamily="34" charset="-122"/>
-                <a:cs typeface="Cambria" pitchFamily="34" charset="-120"/>
-              </a:rPr>
-              <a:t>B · A + Sentiment (+12)</a:t>
-            </a:r>
-            <a:endParaRPr lang="en-US" sz="1800" dirty="0"/>
-          </a:p>
-        </p:txBody>
-      </p:sp>
-      <p:sp>
-        <p:nvSpPr>
-          <p:cNvPr id="8" name="Text 6"/>
-          <p:cNvSpPr txBox="1"/>
-          <p:nvPr/>
-        </p:nvSpPr>
-        <p:spPr>
-          <a:xfrm>
-            <a:off x="4937760" y="1783080"/>
-            <a:ext cx="3566160" cy="2651760"/>
-          </a:xfrm>
-          <a:prstGeom prst="rect">
-            <a:avLst/>
-          </a:prstGeom>
-          <a:noFill/>
-          <a:ln/>
-        </p:spPr>
-        <p:txBody>
-          <a:bodyPr wrap="square" rtlCol="0" anchor="t"/>
-          <a:lstStyle/>
-          <a:p>
-            <a:pPr marL="342900" indent="-342900">
-              <a:spcAft>
-                <a:spcPts val="800"/>
-              </a:spcAft>
-              <a:buSzPct val="100000"/>
-              <a:buChar char="•"/>
-            </a:pPr>
-            <a:r>
-              <a:rPr lang="en-US" sz="1400" dirty="0">
-                <a:solidFill>
-                  <a:schemeClr val="tx1"/>
-                </a:solidFill>
-              </a:rPr>
-              <a:t>News count; positive, negative and neutral counts</a:t>
-            </a:r>
-            <a:endParaRPr lang="en-US" sz="1400" dirty="0"/>
-          </a:p>
-          <a:p>
-            <a:pPr marL="342900" indent="-342900">
-              <a:spcAft>
-                <a:spcPts val="800"/>
-              </a:spcAft>
-              <a:buSzPct val="100000"/>
-              <a:buChar char="•"/>
-            </a:pPr>
-            <a:r>
-              <a:rPr lang="en-US" sz="1400" dirty="0">
-                <a:solidFill>
-                  <a:schemeClr val="tx1"/>
-                </a:solidFill>
-              </a:rPr>
-              <a:t>Positive and negative ratios</a:t>
-            </a:r>
-            <a:endParaRPr lang="en-US" sz="1400" dirty="0"/>
-          </a:p>
-          <a:p>
-            <a:pPr marL="342900" indent="-342900">
-              <a:spcAft>
-                <a:spcPts val="800"/>
-              </a:spcAft>
-              <a:buSzPct val="100000"/>
-              <a:buChar char="•"/>
-            </a:pPr>
-            <a:r>
-              <a:rPr lang="en-US" sz="1400" dirty="0">
-                <a:solidFill>
-                  <a:schemeClr val="tx1"/>
-                </a:solidFill>
-              </a:rPr>
-              <a:t>Average and most recent sentiment</a:t>
-            </a:r>
-            <a:endParaRPr lang="en-US" sz="1400" dirty="0"/>
-          </a:p>
-          <a:p>
-            <a:pPr marL="342900" indent="-342900">
-              <a:spcAft>
-                <a:spcPts val="800"/>
-              </a:spcAft>
-              <a:buSzPct val="100000"/>
-              <a:buChar char="•"/>
-            </a:pPr>
-            <a:r>
-              <a:rPr lang="en-US" sz="1400" dirty="0">
-                <a:solidFill>
-                  <a:schemeClr val="tx1"/>
-                </a:solidFill>
-              </a:rPr>
-              <a:t>Trend, volatility and volume trend</a:t>
-            </a:r>
-            <a:endParaRPr lang="en-US" sz="1400" dirty="0"/>
-          </a:p>
-          <a:p>
-            <a:pPr marL="342900" indent="-342900">
-              <a:spcAft>
-                <a:spcPts val="800"/>
-              </a:spcAft>
-              <a:buSzPct val="100000"/>
-              <a:buChar char="•"/>
-            </a:pPr>
-            <a:r>
-              <a:rPr lang="en-US" sz="1400" dirty="0">
-                <a:solidFill>
-                  <a:schemeClr val="tx1"/>
-                </a:solidFill>
-              </a:rPr>
-              <a:t>Has-coverage indicator</a:t>
+              <a:t>Failed requests are retried, never counted as “no news”</a:t>
             </a:r>
             <a:endParaRPr lang="en-US" sz="1400" dirty="0"/>
           </a:p>
@@ -7991,49 +9741,38 @@
                   <a:schemeClr val="tx2"/>
                 </a:solidFill>
               </a:rPr>
-              <a:t>A transparent, explainable sentiment scorer</a:t>
+              <a:t>Is the headline about this company?</a:t>
             </a:r>
             <a:endParaRPr lang="en-US" sz="2800" dirty="0"/>
           </a:p>
         </p:txBody>
       </p:sp>
-      <p:sp>
-        <p:nvSpPr>
-          <p:cNvPr id="3" name="Headline card"/>
-          <p:cNvSpPr/>
-          <p:nvPr/>
-        </p:nvSpPr>
-        <p:spPr>
-          <a:xfrm>
-            <a:off x="457200" y="1143000"/>
-            <a:ext cx="8229600" cy="777240"/>
-          </a:xfrm>
-          <a:prstGeom prst="roundRect">
-            <a:avLst>
-              <a:gd name="adj" fmla="val 9412"/>
-            </a:avLst>
-          </a:prstGeom>
-          <a:solidFill>
-            <a:srgbClr val="DCE8F2"/>
-          </a:solidFill>
-          <a:ln w="12700">
-            <a:solidFill>
-              <a:srgbClr val="DCE8F2"/>
-            </a:solidFill>
-            <a:prstDash val="solid"/>
-          </a:ln>
-        </p:spPr>
-      </p:sp>
-      <p:sp>
-        <p:nvSpPr>
-          <p:cNvPr id="4" name="Example headline"/>
+      <p:graphicFrame>
+        <p:nvGraphicFramePr>
+          <p:cNvPr id="3" name="Audit chart" descr=""/>
+          <p:cNvGraphicFramePr/>
+          <p:nvPr/>
+        </p:nvGraphicFramePr>
+        <p:xfrm>
+          <a:off x="457200" y="1097280"/>
+          <a:ext cx="4206240" cy="3291840"/>
+        </p:xfrm>
+        <a:graphic xmlns:a="http://schemas.openxmlformats.org/drawingml/2006/main">
+          <a:graphicData uri="http://schemas.openxmlformats.org/drawingml/2006/chart">
+            <c:chart xmlns:c="http://schemas.openxmlformats.org/drawingml/2006/chart" r:id="rId1"/>
+          </a:graphicData>
+        </a:graphic>
+      </p:graphicFrame>
+      <p:sp>
+        <p:nvSpPr>
+          <p:cNvPr id="4" name="Fixes title"/>
           <p:cNvSpPr txBox="1"/>
           <p:nvPr/>
         </p:nvSpPr>
         <p:spPr>
           <a:xfrm>
-            <a:off x="685800" y="1143000"/>
-            <a:ext cx="7772400" cy="777240"/>
+            <a:off x="4937760" y="1143000"/>
+            <a:ext cx="3749040" cy="365760"/>
           </a:xfrm>
           <a:prstGeom prst="rect">
             <a:avLst/>
@@ -8042,566 +9781,34 @@
           <a:ln/>
         </p:spPr>
         <p:txBody>
-          <a:bodyPr wrap="square" lIns="0" tIns="0" rIns="0" bIns="0" rtlCol="0" anchor="ctr"/>
+          <a:bodyPr wrap="square" lIns="0" tIns="0" rIns="0" bIns="0" rtlCol="0" anchor="t"/>
           <a:lstStyle/>
           <a:p>
             <a:pPr indent="0" marL="0">
               <a:buNone/>
             </a:pPr>
             <a:r>
-              <a:rPr lang="en-US" sz="1800" i="1" dirty="0">
+              <a:rPr lang="en-US" sz="1600" b="1" dirty="0">
                 <a:solidFill>
                   <a:schemeClr val="tx2"/>
                 </a:solidFill>
               </a:rPr>
-              <a:t>“Startup X raises major funding and expands into new markets”</a:t>
-            </a:r>
-            <a:endParaRPr lang="en-US" sz="1800" dirty="0"/>
-          </a:p>
-        </p:txBody>
-      </p:sp>
-      <p:sp>
-        <p:nvSpPr>
-          <p:cNvPr id="5" name="Step dot 1"/>
-          <p:cNvSpPr/>
-          <p:nvPr/>
-        </p:nvSpPr>
-        <p:spPr>
-          <a:xfrm>
-            <a:off x="457200" y="2377440"/>
-            <a:ext cx="457200" cy="457200"/>
-          </a:xfrm>
-          <a:prstGeom prst="ellipse">
-            <a:avLst/>
-          </a:prstGeom>
-          <a:solidFill>
-            <a:schemeClr val="accent1"/>
-          </a:solidFill>
-          <a:ln w="12700">
-            <a:solidFill>
-              <a:srgbClr val="1F9E74"/>
-            </a:solidFill>
-            <a:prstDash val="solid"/>
-          </a:ln>
-        </p:spPr>
-      </p:sp>
-      <p:sp>
-        <p:nvSpPr>
-          <p:cNvPr id="6" name="Step num 1"/>
+              <a:t>Fixes, each from a real error</a:t>
+            </a:r>
+            <a:endParaRPr lang="en-US" sz="1600" dirty="0"/>
+          </a:p>
+        </p:txBody>
+      </p:sp>
+      <p:sp>
+        <p:nvSpPr>
+          <p:cNvPr id="5" name="Text 2"/>
           <p:cNvSpPr txBox="1"/>
           <p:nvPr/>
         </p:nvSpPr>
         <p:spPr>
           <a:xfrm>
-            <a:off x="457200" y="2377440"/>
-            <a:ext cx="457200" cy="457200"/>
-          </a:xfrm>
-          <a:prstGeom prst="rect">
-            <a:avLst/>
-          </a:prstGeom>
-          <a:noFill/>
-          <a:ln/>
-        </p:spPr>
-        <p:txBody>
-          <a:bodyPr wrap="square" lIns="0" tIns="0" rIns="0" bIns="0" rtlCol="0" anchor="ctr"/>
-          <a:lstStyle/>
-          <a:p>
-            <a:pPr algn="ctr" indent="0" marL="0">
-              <a:buNone/>
-            </a:pPr>
-            <a:r>
-              <a:rPr lang="en-US" sz="1600" b="1" dirty="0">
-                <a:solidFill>
-                  <a:schemeClr val="bg1"/>
-                </a:solidFill>
-              </a:rPr>
-              <a:t>1</a:t>
-            </a:r>
-            <a:endParaRPr lang="en-US" sz="1600" dirty="0"/>
-          </a:p>
-        </p:txBody>
-      </p:sp>
-      <p:sp>
-        <p:nvSpPr>
-          <p:cNvPr id="7" name="Step title 1"/>
-          <p:cNvSpPr txBox="1"/>
-          <p:nvPr/>
-        </p:nvSpPr>
-        <p:spPr>
-          <a:xfrm>
-            <a:off x="1005840" y="2359152"/>
-            <a:ext cx="1463040" cy="274320"/>
-          </a:xfrm>
-          <a:prstGeom prst="rect">
-            <a:avLst/>
-          </a:prstGeom>
-          <a:noFill/>
-          <a:ln/>
-        </p:spPr>
-        <p:txBody>
-          <a:bodyPr wrap="square" lIns="0" tIns="0" rIns="0" bIns="0" rtlCol="0" anchor="t"/>
-          <a:lstStyle/>
-          <a:p>
-            <a:pPr indent="0" marL="0">
-              <a:buNone/>
-            </a:pPr>
-            <a:r>
-              <a:rPr lang="en-US" sz="1500" b="1" dirty="0">
-                <a:solidFill>
-                  <a:schemeClr val="tx2"/>
-                </a:solidFill>
-              </a:rPr>
-              <a:t>Normalise</a:t>
-            </a:r>
-            <a:endParaRPr lang="en-US" sz="1500" dirty="0"/>
-          </a:p>
-        </p:txBody>
-      </p:sp>
-      <p:sp>
-        <p:nvSpPr>
-          <p:cNvPr id="8" name="Step desc 1"/>
-          <p:cNvSpPr txBox="1"/>
-          <p:nvPr/>
-        </p:nvSpPr>
-        <p:spPr>
-          <a:xfrm>
-            <a:off x="1005840" y="2651760"/>
-            <a:ext cx="1463040" cy="457200"/>
-          </a:xfrm>
-          <a:prstGeom prst="rect">
-            <a:avLst/>
-          </a:prstGeom>
-          <a:noFill/>
-          <a:ln/>
-        </p:spPr>
-        <p:txBody>
-          <a:bodyPr wrap="square" lIns="0" tIns="0" rIns="0" bIns="0" rtlCol="0" anchor="t"/>
-          <a:lstStyle/>
-          <a:p>
-            <a:pPr indent="0" marL="0">
-              <a:buNone/>
-            </a:pPr>
-            <a:r>
-              <a:rPr lang="en-US" sz="1200" dirty="0">
-                <a:solidFill>
-                  <a:schemeClr val="tx1"/>
-                </a:solidFill>
-              </a:rPr>
-              <a:t>lowercase, tokenise</a:t>
-            </a:r>
-            <a:endParaRPr lang="en-US" sz="1200" dirty="0"/>
-          </a:p>
-        </p:txBody>
-      </p:sp>
-      <p:sp>
-        <p:nvSpPr>
-          <p:cNvPr id="9" name="Step dot 2"/>
-          <p:cNvSpPr/>
-          <p:nvPr/>
-        </p:nvSpPr>
-        <p:spPr>
-          <a:xfrm>
-            <a:off x="2560320" y="2377440"/>
-            <a:ext cx="457200" cy="457200"/>
-          </a:xfrm>
-          <a:prstGeom prst="ellipse">
-            <a:avLst/>
-          </a:prstGeom>
-          <a:solidFill>
-            <a:schemeClr val="accent1"/>
-          </a:solidFill>
-          <a:ln w="12700">
-            <a:solidFill>
-              <a:srgbClr val="1F9E74"/>
-            </a:solidFill>
-            <a:prstDash val="solid"/>
-          </a:ln>
-        </p:spPr>
-      </p:sp>
-      <p:sp>
-        <p:nvSpPr>
-          <p:cNvPr id="10" name="Step num 2"/>
-          <p:cNvSpPr txBox="1"/>
-          <p:nvPr/>
-        </p:nvSpPr>
-        <p:spPr>
-          <a:xfrm>
-            <a:off x="2560320" y="2377440"/>
-            <a:ext cx="457200" cy="457200"/>
-          </a:xfrm>
-          <a:prstGeom prst="rect">
-            <a:avLst/>
-          </a:prstGeom>
-          <a:noFill/>
-          <a:ln/>
-        </p:spPr>
-        <p:txBody>
-          <a:bodyPr wrap="square" lIns="0" tIns="0" rIns="0" bIns="0" rtlCol="0" anchor="ctr"/>
-          <a:lstStyle/>
-          <a:p>
-            <a:pPr algn="ctr" indent="0" marL="0">
-              <a:buNone/>
-            </a:pPr>
-            <a:r>
-              <a:rPr lang="en-US" sz="1600" b="1" dirty="0">
-                <a:solidFill>
-                  <a:schemeClr val="bg1"/>
-                </a:solidFill>
-              </a:rPr>
-              <a:t>2</a:t>
-            </a:r>
-            <a:endParaRPr lang="en-US" sz="1600" dirty="0"/>
-          </a:p>
-        </p:txBody>
-      </p:sp>
-      <p:sp>
-        <p:nvSpPr>
-          <p:cNvPr id="11" name="Step title 2"/>
-          <p:cNvSpPr txBox="1"/>
-          <p:nvPr/>
-        </p:nvSpPr>
-        <p:spPr>
-          <a:xfrm>
-            <a:off x="3108960" y="2359152"/>
-            <a:ext cx="1463040" cy="274320"/>
-          </a:xfrm>
-          <a:prstGeom prst="rect">
-            <a:avLst/>
-          </a:prstGeom>
-          <a:noFill/>
-          <a:ln/>
-        </p:spPr>
-        <p:txBody>
-          <a:bodyPr wrap="square" lIns="0" tIns="0" rIns="0" bIns="0" rtlCol="0" anchor="t"/>
-          <a:lstStyle/>
-          <a:p>
-            <a:pPr indent="0" marL="0">
-              <a:buNone/>
-            </a:pPr>
-            <a:r>
-              <a:rPr lang="en-US" sz="1500" b="1" dirty="0">
-                <a:solidFill>
-                  <a:schemeClr val="tx2"/>
-                </a:solidFill>
-              </a:rPr>
-              <a:t>Filter</a:t>
-            </a:r>
-            <a:endParaRPr lang="en-US" sz="1500" dirty="0"/>
-          </a:p>
-        </p:txBody>
-      </p:sp>
-      <p:sp>
-        <p:nvSpPr>
-          <p:cNvPr id="12" name="Step desc 2"/>
-          <p:cNvSpPr txBox="1"/>
-          <p:nvPr/>
-        </p:nvSpPr>
-        <p:spPr>
-          <a:xfrm>
-            <a:off x="3108960" y="2651760"/>
-            <a:ext cx="1463040" cy="457200"/>
-          </a:xfrm>
-          <a:prstGeom prst="rect">
-            <a:avLst/>
-          </a:prstGeom>
-          <a:noFill/>
-          <a:ln/>
-        </p:spPr>
-        <p:txBody>
-          <a:bodyPr wrap="square" lIns="0" tIns="0" rIns="0" bIns="0" rtlCol="0" anchor="t"/>
-          <a:lstStyle/>
-          <a:p>
-            <a:pPr indent="0" marL="0">
-              <a:buNone/>
-            </a:pPr>
-            <a:r>
-              <a:rPr lang="en-US" sz="1200" dirty="0">
-                <a:solidFill>
-                  <a:schemeClr val="tx1"/>
-                </a:solidFill>
-              </a:rPr>
-              <a:t>remove stopwords</a:t>
-            </a:r>
-            <a:endParaRPr lang="en-US" sz="1200" dirty="0"/>
-          </a:p>
-        </p:txBody>
-      </p:sp>
-      <p:sp>
-        <p:nvSpPr>
-          <p:cNvPr id="13" name="Step dot 3"/>
-          <p:cNvSpPr/>
-          <p:nvPr/>
-        </p:nvSpPr>
-        <p:spPr>
-          <a:xfrm>
-            <a:off x="4663440" y="2377440"/>
-            <a:ext cx="457200" cy="457200"/>
-          </a:xfrm>
-          <a:prstGeom prst="ellipse">
-            <a:avLst/>
-          </a:prstGeom>
-          <a:solidFill>
-            <a:schemeClr val="accent1"/>
-          </a:solidFill>
-          <a:ln w="12700">
-            <a:solidFill>
-              <a:srgbClr val="1F9E74"/>
-            </a:solidFill>
-            <a:prstDash val="solid"/>
-          </a:ln>
-        </p:spPr>
-      </p:sp>
-      <p:sp>
-        <p:nvSpPr>
-          <p:cNvPr id="14" name="Step num 3"/>
-          <p:cNvSpPr txBox="1"/>
-          <p:nvPr/>
-        </p:nvSpPr>
-        <p:spPr>
-          <a:xfrm>
-            <a:off x="4663440" y="2377440"/>
-            <a:ext cx="457200" cy="457200"/>
-          </a:xfrm>
-          <a:prstGeom prst="rect">
-            <a:avLst/>
-          </a:prstGeom>
-          <a:noFill/>
-          <a:ln/>
-        </p:spPr>
-        <p:txBody>
-          <a:bodyPr wrap="square" lIns="0" tIns="0" rIns="0" bIns="0" rtlCol="0" anchor="ctr"/>
-          <a:lstStyle/>
-          <a:p>
-            <a:pPr algn="ctr" indent="0" marL="0">
-              <a:buNone/>
-            </a:pPr>
-            <a:r>
-              <a:rPr lang="en-US" sz="1600" b="1" dirty="0">
-                <a:solidFill>
-                  <a:schemeClr val="bg1"/>
-                </a:solidFill>
-              </a:rPr>
-              <a:t>3</a:t>
-            </a:r>
-            <a:endParaRPr lang="en-US" sz="1600" dirty="0"/>
-          </a:p>
-        </p:txBody>
-      </p:sp>
-      <p:sp>
-        <p:nvSpPr>
-          <p:cNvPr id="15" name="Step title 3"/>
-          <p:cNvSpPr txBox="1"/>
-          <p:nvPr/>
-        </p:nvSpPr>
-        <p:spPr>
-          <a:xfrm>
-            <a:off x="5212080" y="2359152"/>
-            <a:ext cx="1463040" cy="274320"/>
-          </a:xfrm>
-          <a:prstGeom prst="rect">
-            <a:avLst/>
-          </a:prstGeom>
-          <a:noFill/>
-          <a:ln/>
-        </p:spPr>
-        <p:txBody>
-          <a:bodyPr wrap="square" lIns="0" tIns="0" rIns="0" bIns="0" rtlCol="0" anchor="t"/>
-          <a:lstStyle/>
-          <a:p>
-            <a:pPr indent="0" marL="0">
-              <a:buNone/>
-            </a:pPr>
-            <a:r>
-              <a:rPr lang="en-US" sz="1500" b="1" dirty="0">
-                <a:solidFill>
-                  <a:schemeClr val="tx2"/>
-                </a:solidFill>
-              </a:rPr>
-              <a:t>Match</a:t>
-            </a:r>
-            <a:endParaRPr lang="en-US" sz="1500" dirty="0"/>
-          </a:p>
-        </p:txBody>
-      </p:sp>
-      <p:sp>
-        <p:nvSpPr>
-          <p:cNvPr id="16" name="Step desc 3"/>
-          <p:cNvSpPr txBox="1"/>
-          <p:nvPr/>
-        </p:nvSpPr>
-        <p:spPr>
-          <a:xfrm>
-            <a:off x="5212080" y="2651760"/>
-            <a:ext cx="1463040" cy="457200"/>
-          </a:xfrm>
-          <a:prstGeom prst="rect">
-            <a:avLst/>
-          </a:prstGeom>
-          <a:noFill/>
-          <a:ln/>
-        </p:spPr>
-        <p:txBody>
-          <a:bodyPr wrap="square" lIns="0" tIns="0" rIns="0" bIns="0" rtlCol="0" anchor="t"/>
-          <a:lstStyle/>
-          <a:p>
-            <a:pPr indent="0" marL="0">
-              <a:buNone/>
-            </a:pPr>
-            <a:r>
-              <a:rPr lang="en-US" sz="1200" dirty="0">
-                <a:solidFill>
-                  <a:schemeClr val="tx1"/>
-                </a:solidFill>
-              </a:rPr>
-              <a:t>foldLeft over lexicon</a:t>
-            </a:r>
-            <a:endParaRPr lang="en-US" sz="1200" dirty="0"/>
-          </a:p>
-        </p:txBody>
-      </p:sp>
-      <p:sp>
-        <p:nvSpPr>
-          <p:cNvPr id="17" name="Step dot 4"/>
-          <p:cNvSpPr/>
-          <p:nvPr/>
-        </p:nvSpPr>
-        <p:spPr>
-          <a:xfrm>
-            <a:off x="6766560" y="2377440"/>
-            <a:ext cx="457200" cy="457200"/>
-          </a:xfrm>
-          <a:prstGeom prst="ellipse">
-            <a:avLst/>
-          </a:prstGeom>
-          <a:solidFill>
-            <a:schemeClr val="accent1"/>
-          </a:solidFill>
-          <a:ln w="12700">
-            <a:solidFill>
-              <a:srgbClr val="1F9E74"/>
-            </a:solidFill>
-            <a:prstDash val="solid"/>
-          </a:ln>
-        </p:spPr>
-      </p:sp>
-      <p:sp>
-        <p:nvSpPr>
-          <p:cNvPr id="18" name="Step num 4"/>
-          <p:cNvSpPr txBox="1"/>
-          <p:nvPr/>
-        </p:nvSpPr>
-        <p:spPr>
-          <a:xfrm>
-            <a:off x="6766560" y="2377440"/>
-            <a:ext cx="457200" cy="457200"/>
-          </a:xfrm>
-          <a:prstGeom prst="rect">
-            <a:avLst/>
-          </a:prstGeom>
-          <a:noFill/>
-          <a:ln/>
-        </p:spPr>
-        <p:txBody>
-          <a:bodyPr wrap="square" lIns="0" tIns="0" rIns="0" bIns="0" rtlCol="0" anchor="ctr"/>
-          <a:lstStyle/>
-          <a:p>
-            <a:pPr algn="ctr" indent="0" marL="0">
-              <a:buNone/>
-            </a:pPr>
-            <a:r>
-              <a:rPr lang="en-US" sz="1600" b="1" dirty="0">
-                <a:solidFill>
-                  <a:schemeClr val="bg1"/>
-                </a:solidFill>
-              </a:rPr>
-              <a:t>4</a:t>
-            </a:r>
-            <a:endParaRPr lang="en-US" sz="1600" dirty="0"/>
-          </a:p>
-        </p:txBody>
-      </p:sp>
-      <p:sp>
-        <p:nvSpPr>
-          <p:cNvPr id="19" name="Step title 4"/>
-          <p:cNvSpPr txBox="1"/>
-          <p:nvPr/>
-        </p:nvSpPr>
-        <p:spPr>
-          <a:xfrm>
-            <a:off x="7315200" y="2359152"/>
-            <a:ext cx="1463040" cy="274320"/>
-          </a:xfrm>
-          <a:prstGeom prst="rect">
-            <a:avLst/>
-          </a:prstGeom>
-          <a:noFill/>
-          <a:ln/>
-        </p:spPr>
-        <p:txBody>
-          <a:bodyPr wrap="square" lIns="0" tIns="0" rIns="0" bIns="0" rtlCol="0" anchor="t"/>
-          <a:lstStyle/>
-          <a:p>
-            <a:pPr indent="0" marL="0">
-              <a:buNone/>
-            </a:pPr>
-            <a:r>
-              <a:rPr lang="en-US" sz="1500" b="1" dirty="0">
-                <a:solidFill>
-                  <a:schemeClr val="tx2"/>
-                </a:solidFill>
-              </a:rPr>
-              <a:t>Score</a:t>
-            </a:r>
-            <a:endParaRPr lang="en-US" sz="1500" dirty="0"/>
-          </a:p>
-        </p:txBody>
-      </p:sp>
-      <p:sp>
-        <p:nvSpPr>
-          <p:cNvPr id="20" name="Step desc 4"/>
-          <p:cNvSpPr txBox="1"/>
-          <p:nvPr/>
-        </p:nvSpPr>
-        <p:spPr>
-          <a:xfrm>
-            <a:off x="7315200" y="2651760"/>
-            <a:ext cx="1463040" cy="457200"/>
-          </a:xfrm>
-          <a:prstGeom prst="rect">
-            <a:avLst/>
-          </a:prstGeom>
-          <a:noFill/>
-          <a:ln/>
-        </p:spPr>
-        <p:txBody>
-          <a:bodyPr wrap="square" lIns="0" tIns="0" rIns="0" bIns="0" rtlCol="0" anchor="t"/>
-          <a:lstStyle/>
-          <a:p>
-            <a:pPr indent="0" marL="0">
-              <a:buNone/>
-            </a:pPr>
-            <a:r>
-              <a:rPr lang="en-US" sz="1200" dirty="0">
-                <a:solidFill>
-                  <a:schemeClr val="tx1"/>
-                </a:solidFill>
-              </a:rPr>
-              <a:t>+3 → Positive</a:t>
-            </a:r>
-            <a:endParaRPr lang="en-US" sz="1200" dirty="0"/>
-          </a:p>
-        </p:txBody>
-      </p:sp>
-      <p:sp>
-        <p:nvSpPr>
-          <p:cNvPr id="21" name="Text 19"/>
-          <p:cNvSpPr txBox="1"/>
-          <p:nvPr/>
-        </p:nvSpPr>
-        <p:spPr>
-          <a:xfrm>
-            <a:off x="457200" y="3337560"/>
-            <a:ext cx="8229600" cy="1371600"/>
+            <a:off x="4937760" y="1600200"/>
+            <a:ext cx="3749040" cy="2926080"/>
           </a:xfrm>
           <a:prstGeom prst="rect">
             <a:avLst/>
@@ -8621,14 +9828,14 @@
               <a:buChar char="•"/>
             </a:pPr>
             <a:r>
-              <a:rPr lang="en-US" sz="1400" dirty="0">
+              <a:rPr lang="en-US" sz="1300" dirty="0">
                 <a:solidFill>
                   <a:schemeClr val="tx1"/>
                 </a:solidFill>
               </a:rPr>
-              <a:t>The lexicon is specific to startup news, because general lexicons misread business text (Loughran &amp; McDonald, 2011)</a:t>
-            </a:r>
-            <a:endParaRPr lang="en-US" sz="1400" dirty="0"/>
+              <a:t>“Quorum” matched votes on a quorum, so ordinary dictionary words are now ambiguous</a:t>
+            </a:r>
+            <a:endParaRPr lang="en-US" sz="1300" dirty="0"/>
           </a:p>
           <a:p>
             <a:pPr marL="342900" indent="-342900">
@@ -8639,14 +9846,14 @@
               <a:buChar char="•"/>
             </a:pPr>
             <a:r>
-              <a:rPr lang="en-US" sz="1400" dirty="0">
+              <a:rPr lang="en-US" sz="1300" dirty="0">
                 <a:solidFill>
                   <a:schemeClr val="tx1"/>
                 </a:solidFill>
               </a:rPr>
-              <a:t>Name matching rejects false hits, e.g. “tomato barons…” returned for Kabbage</a:t>
-            </a:r>
-            <a:endParaRPr lang="en-US" sz="1400" dirty="0"/>
+              <a:t>“Wireless Tech” matched any “wireless” headline, so partial matches need a distinctive word</a:t>
+            </a:r>
+            <a:endParaRPr lang="en-US" sz="1300" dirty="0"/>
           </a:p>
           <a:p>
             <a:pPr marL="342900" indent="-342900">
@@ -8657,14 +9864,14 @@
               <a:buChar char="•"/>
             </a:pPr>
             <a:r>
-              <a:rPr lang="en-US" sz="1400" dirty="0">
+              <a:rPr lang="en-US" sz="1300" dirty="0">
                 <a:solidFill>
                   <a:schemeClr val="tx1"/>
                 </a:solidFill>
               </a:rPr>
-              <a:t>Known limits: no negation (“can't buy success” scores Neutral), no stemming</a:t>
-            </a:r>
-            <a:endParaRPr lang="en-US" sz="1400" dirty="0"/>
+              <a:t>“… - Seeking Alpha” matched the startup Seeking Alpha, so outlet suffixes are stripped</a:t>
+            </a:r>
+            <a:endParaRPr lang="en-US" sz="1300" dirty="0"/>
           </a:p>
         </p:txBody>
       </p:sp>
@@ -8770,7 +9977,7 @@
                   <a:schemeClr val="tx2"/>
                 </a:solidFill>
               </a:rPr>
-              <a:t>Why leftOuterJoin, not join</a:t>
+              <a:t>A transparent, explainable sentiment scorer</a:t>
             </a:r>
             <a:endParaRPr lang="en-US" sz="2800" dirty="0"/>
           </a:p>
@@ -8778,26 +9985,26 @@
       </p:sp>
       <p:sp>
         <p:nvSpPr>
-          <p:cNvPr id="3" name="Inner join card"/>
+          <p:cNvPr id="3" name="Headline card"/>
           <p:cNvSpPr/>
           <p:nvPr/>
         </p:nvSpPr>
         <p:spPr>
           <a:xfrm>
-            <a:off x="457200" y="1188720"/>
-            <a:ext cx="3977640" cy="1828800"/>
+            <a:off x="457200" y="1143000"/>
+            <a:ext cx="8229600" cy="777240"/>
           </a:xfrm>
           <a:prstGeom prst="roundRect">
             <a:avLst>
-              <a:gd name="adj" fmla="val 4000"/>
+              <a:gd name="adj" fmla="val 9412"/>
             </a:avLst>
           </a:prstGeom>
           <a:solidFill>
-            <a:srgbClr val="FBE5E3"/>
+            <a:srgbClr val="DCE8F2"/>
           </a:solidFill>
           <a:ln w="12700">
             <a:solidFill>
-              <a:srgbClr val="FBE5E3"/>
+              <a:srgbClr val="DCE8F2"/>
             </a:solidFill>
             <a:prstDash val="solid"/>
           </a:ln>
@@ -8805,26 +10012,60 @@
       </p:sp>
       <p:sp>
         <p:nvSpPr>
-          <p:cNvPr id="4" name="Left join card"/>
+          <p:cNvPr id="4" name="Example headline"/>
+          <p:cNvSpPr txBox="1"/>
+          <p:nvPr/>
+        </p:nvSpPr>
+        <p:spPr>
+          <a:xfrm>
+            <a:off x="685800" y="1143000"/>
+            <a:ext cx="7772400" cy="777240"/>
+          </a:xfrm>
+          <a:prstGeom prst="rect">
+            <a:avLst/>
+          </a:prstGeom>
+          <a:noFill/>
+          <a:ln/>
+        </p:spPr>
+        <p:txBody>
+          <a:bodyPr wrap="square" lIns="0" tIns="0" rIns="0" bIns="0" rtlCol="0" anchor="ctr"/>
+          <a:lstStyle/>
+          <a:p>
+            <a:pPr indent="0" marL="0">
+              <a:buNone/>
+            </a:pPr>
+            <a:r>
+              <a:rPr lang="en-US" sz="1800" i="1" dirty="0">
+                <a:solidFill>
+                  <a:schemeClr val="tx2"/>
+                </a:solidFill>
+              </a:rPr>
+              <a:t>“Startup X raises major funding and expands into new markets”</a:t>
+            </a:r>
+            <a:endParaRPr lang="en-US" sz="1800" dirty="0"/>
+          </a:p>
+        </p:txBody>
+      </p:sp>
+      <p:sp>
+        <p:nvSpPr>
+          <p:cNvPr id="5" name="Step dot 1"/>
           <p:cNvSpPr/>
           <p:nvPr/>
         </p:nvSpPr>
         <p:spPr>
           <a:xfrm>
-            <a:off x="4709160" y="1188720"/>
-            <a:ext cx="3977640" cy="1828800"/>
-          </a:xfrm>
-          <a:prstGeom prst="roundRect">
-            <a:avLst>
-              <a:gd name="adj" fmla="val 4000"/>
-            </a:avLst>
+            <a:off x="457200" y="2377440"/>
+            <a:ext cx="457200" cy="457200"/>
+          </a:xfrm>
+          <a:prstGeom prst="ellipse">
+            <a:avLst/>
           </a:prstGeom>
           <a:solidFill>
-            <a:srgbClr val="E3F3EC"/>
+            <a:schemeClr val="accent1"/>
           </a:solidFill>
           <a:ln w="12700">
             <a:solidFill>
-              <a:srgbClr val="E3F3EC"/>
+              <a:srgbClr val="1F9E74"/>
             </a:solidFill>
             <a:prstDash val="solid"/>
           </a:ln>
@@ -8832,14 +10073,14 @@
       </p:sp>
       <p:sp>
         <p:nvSpPr>
-          <p:cNvPr id="5" name="Stat inner number"/>
+          <p:cNvPr id="6" name="Step num 1"/>
           <p:cNvSpPr txBox="1"/>
           <p:nvPr/>
         </p:nvSpPr>
         <p:spPr>
           <a:xfrm>
-            <a:off x="685800" y="1371600"/>
-            <a:ext cx="3566160" cy="685800"/>
+            <a:off x="457200" y="2377440"/>
+            <a:ext cx="457200" cy="457200"/>
           </a:xfrm>
           <a:prstGeom prst="rect">
             <a:avLst/>
@@ -8848,6 +10089,42 @@
           <a:ln/>
         </p:spPr>
         <p:txBody>
+          <a:bodyPr wrap="square" lIns="0" tIns="0" rIns="0" bIns="0" rtlCol="0" anchor="ctr"/>
+          <a:lstStyle/>
+          <a:p>
+            <a:pPr algn="ctr" indent="0" marL="0">
+              <a:buNone/>
+            </a:pPr>
+            <a:r>
+              <a:rPr lang="en-US" sz="1600" b="1" dirty="0">
+                <a:solidFill>
+                  <a:schemeClr val="bg1"/>
+                </a:solidFill>
+              </a:rPr>
+              <a:t>1</a:t>
+            </a:r>
+            <a:endParaRPr lang="en-US" sz="1600" dirty="0"/>
+          </a:p>
+        </p:txBody>
+      </p:sp>
+      <p:sp>
+        <p:nvSpPr>
+          <p:cNvPr id="7" name="Step title 1"/>
+          <p:cNvSpPr txBox="1"/>
+          <p:nvPr/>
+        </p:nvSpPr>
+        <p:spPr>
+          <a:xfrm>
+            <a:off x="1005840" y="2359152"/>
+            <a:ext cx="1463040" cy="274320"/>
+          </a:xfrm>
+          <a:prstGeom prst="rect">
+            <a:avLst/>
+          </a:prstGeom>
+          <a:noFill/>
+          <a:ln/>
+        </p:spPr>
+        <p:txBody>
           <a:bodyPr wrap="square" lIns="0" tIns="0" rIns="0" bIns="0" rtlCol="0" anchor="t"/>
           <a:lstStyle/>
           <a:p>
@@ -8855,30 +10132,27 @@
               <a:buNone/>
             </a:pPr>
             <a:r>
-              <a:rPr lang="en-US" sz="4000" b="1" dirty="0">
-                <a:solidFill>
-                  <a:schemeClr val="accent2"/>
-                </a:solidFill>
-                <a:latin typeface="Cambria" pitchFamily="34" charset="0"/>
-                <a:ea typeface="Cambria" pitchFamily="34" charset="-122"/>
-                <a:cs typeface="Cambria" pitchFamily="34" charset="-120"/>
-              </a:rPr>
-              <a:t>3</a:t>
-            </a:r>
-            <a:endParaRPr lang="en-US" sz="4000" dirty="0"/>
-          </a:p>
-        </p:txBody>
-      </p:sp>
-      <p:sp>
-        <p:nvSpPr>
-          <p:cNvPr id="6" name="Stat inner label"/>
+              <a:rPr lang="en-US" sz="1500" b="1" dirty="0">
+                <a:solidFill>
+                  <a:schemeClr val="tx2"/>
+                </a:solidFill>
+              </a:rPr>
+              <a:t>Normalise</a:t>
+            </a:r>
+            <a:endParaRPr lang="en-US" sz="1500" dirty="0"/>
+          </a:p>
+        </p:txBody>
+      </p:sp>
+      <p:sp>
+        <p:nvSpPr>
+          <p:cNvPr id="8" name="Step desc 1"/>
           <p:cNvSpPr txBox="1"/>
           <p:nvPr/>
         </p:nvSpPr>
         <p:spPr>
           <a:xfrm>
-            <a:off x="685800" y="2084832"/>
-            <a:ext cx="3566160" cy="548640"/>
+            <a:off x="1005840" y="2651760"/>
+            <a:ext cx="1463040" cy="457200"/>
           </a:xfrm>
           <a:prstGeom prst="rect">
             <a:avLst/>
@@ -8899,7 +10173,7 @@
                   <a:schemeClr val="tx1"/>
                 </a:solidFill>
               </a:rPr>
-              <a:t>startups kept by an inner join: only those with news, and biased to well-funded companies</a:t>
+              <a:t>lowercase, tokenise</a:t>
             </a:r>
             <a:endParaRPr lang="en-US" sz="1200" dirty="0"/>
           </a:p>
@@ -8907,14 +10181,39 @@
       </p:sp>
       <p:sp>
         <p:nvSpPr>
-          <p:cNvPr id="7" name="Stat left number"/>
+          <p:cNvPr id="9" name="Step dot 2"/>
+          <p:cNvSpPr/>
+          <p:nvPr/>
+        </p:nvSpPr>
+        <p:spPr>
+          <a:xfrm>
+            <a:off x="2560320" y="2377440"/>
+            <a:ext cx="457200" cy="457200"/>
+          </a:xfrm>
+          <a:prstGeom prst="ellipse">
+            <a:avLst/>
+          </a:prstGeom>
+          <a:solidFill>
+            <a:schemeClr val="accent1"/>
+          </a:solidFill>
+          <a:ln w="12700">
+            <a:solidFill>
+              <a:srgbClr val="1F9E74"/>
+            </a:solidFill>
+            <a:prstDash val="solid"/>
+          </a:ln>
+        </p:spPr>
+      </p:sp>
+      <p:sp>
+        <p:nvSpPr>
+          <p:cNvPr id="10" name="Step num 2"/>
           <p:cNvSpPr txBox="1"/>
           <p:nvPr/>
         </p:nvSpPr>
         <p:spPr>
           <a:xfrm>
-            <a:off x="4937760" y="1371600"/>
-            <a:ext cx="3566160" cy="685800"/>
+            <a:off x="2560320" y="2377440"/>
+            <a:ext cx="457200" cy="457200"/>
           </a:xfrm>
           <a:prstGeom prst="rect">
             <a:avLst/>
@@ -8923,6 +10222,42 @@
           <a:ln/>
         </p:spPr>
         <p:txBody>
+          <a:bodyPr wrap="square" lIns="0" tIns="0" rIns="0" bIns="0" rtlCol="0" anchor="ctr"/>
+          <a:lstStyle/>
+          <a:p>
+            <a:pPr algn="ctr" indent="0" marL="0">
+              <a:buNone/>
+            </a:pPr>
+            <a:r>
+              <a:rPr lang="en-US" sz="1600" b="1" dirty="0">
+                <a:solidFill>
+                  <a:schemeClr val="bg1"/>
+                </a:solidFill>
+              </a:rPr>
+              <a:t>2</a:t>
+            </a:r>
+            <a:endParaRPr lang="en-US" sz="1600" dirty="0"/>
+          </a:p>
+        </p:txBody>
+      </p:sp>
+      <p:sp>
+        <p:nvSpPr>
+          <p:cNvPr id="11" name="Step title 2"/>
+          <p:cNvSpPr txBox="1"/>
+          <p:nvPr/>
+        </p:nvSpPr>
+        <p:spPr>
+          <a:xfrm>
+            <a:off x="3108960" y="2359152"/>
+            <a:ext cx="1463040" cy="274320"/>
+          </a:xfrm>
+          <a:prstGeom prst="rect">
+            <a:avLst/>
+          </a:prstGeom>
+          <a:noFill/>
+          <a:ln/>
+        </p:spPr>
+        <p:txBody>
           <a:bodyPr wrap="square" lIns="0" tIns="0" rIns="0" bIns="0" rtlCol="0" anchor="t"/>
           <a:lstStyle/>
           <a:p>
@@ -8930,30 +10265,27 @@
               <a:buNone/>
             </a:pPr>
             <a:r>
-              <a:rPr lang="en-US" sz="4000" b="1" dirty="0">
-                <a:solidFill>
-                  <a:schemeClr val="accent1"/>
-                </a:solidFill>
-                <a:latin typeface="Cambria" pitchFamily="34" charset="0"/>
-                <a:ea typeface="Cambria" pitchFamily="34" charset="-122"/>
-                <a:cs typeface="Cambria" pitchFamily="34" charset="-120"/>
-              </a:rPr>
-              <a:t>22,075</a:t>
-            </a:r>
-            <a:endParaRPr lang="en-US" sz="4000" dirty="0"/>
-          </a:p>
-        </p:txBody>
-      </p:sp>
-      <p:sp>
-        <p:nvSpPr>
-          <p:cNvPr id="8" name="Stat left label"/>
+              <a:rPr lang="en-US" sz="1500" b="1" dirty="0">
+                <a:solidFill>
+                  <a:schemeClr val="tx2"/>
+                </a:solidFill>
+              </a:rPr>
+              <a:t>Filter</a:t>
+            </a:r>
+            <a:endParaRPr lang="en-US" sz="1500" dirty="0"/>
+          </a:p>
+        </p:txBody>
+      </p:sp>
+      <p:sp>
+        <p:nvSpPr>
+          <p:cNvPr id="12" name="Step desc 2"/>
           <p:cNvSpPr txBox="1"/>
           <p:nvPr/>
         </p:nvSpPr>
         <p:spPr>
           <a:xfrm>
-            <a:off x="4937760" y="2084832"/>
-            <a:ext cx="3566160" cy="548640"/>
+            <a:off x="3108960" y="2651760"/>
+            <a:ext cx="1463040" cy="457200"/>
           </a:xfrm>
           <a:prstGeom prst="rect">
             <a:avLst/>
@@ -8974,7 +10306,7 @@
                   <a:schemeClr val="tx1"/>
                 </a:solidFill>
               </a:rPr>
-              <a:t>startups kept by leftOuterJoin: those without news get a zero-baseline record</a:t>
+              <a:t>remove stopwords</a:t>
             </a:r>
             <a:endParaRPr lang="en-US" sz="1200" dirty="0"/>
           </a:p>
@@ -8982,14 +10314,280 @@
       </p:sp>
       <p:sp>
         <p:nvSpPr>
-          <p:cNvPr id="9" name="Text 7"/>
+          <p:cNvPr id="13" name="Step dot 3"/>
+          <p:cNvSpPr/>
+          <p:nvPr/>
+        </p:nvSpPr>
+        <p:spPr>
+          <a:xfrm>
+            <a:off x="4663440" y="2377440"/>
+            <a:ext cx="457200" cy="457200"/>
+          </a:xfrm>
+          <a:prstGeom prst="ellipse">
+            <a:avLst/>
+          </a:prstGeom>
+          <a:solidFill>
+            <a:schemeClr val="accent1"/>
+          </a:solidFill>
+          <a:ln w="12700">
+            <a:solidFill>
+              <a:srgbClr val="1F9E74"/>
+            </a:solidFill>
+            <a:prstDash val="solid"/>
+          </a:ln>
+        </p:spPr>
+      </p:sp>
+      <p:sp>
+        <p:nvSpPr>
+          <p:cNvPr id="14" name="Step num 3"/>
           <p:cNvSpPr txBox="1"/>
           <p:nvPr/>
         </p:nvSpPr>
         <p:spPr>
           <a:xfrm>
+            <a:off x="4663440" y="2377440"/>
+            <a:ext cx="457200" cy="457200"/>
+          </a:xfrm>
+          <a:prstGeom prst="rect">
+            <a:avLst/>
+          </a:prstGeom>
+          <a:noFill/>
+          <a:ln/>
+        </p:spPr>
+        <p:txBody>
+          <a:bodyPr wrap="square" lIns="0" tIns="0" rIns="0" bIns="0" rtlCol="0" anchor="ctr"/>
+          <a:lstStyle/>
+          <a:p>
+            <a:pPr algn="ctr" indent="0" marL="0">
+              <a:buNone/>
+            </a:pPr>
+            <a:r>
+              <a:rPr lang="en-US" sz="1600" b="1" dirty="0">
+                <a:solidFill>
+                  <a:schemeClr val="bg1"/>
+                </a:solidFill>
+              </a:rPr>
+              <a:t>3</a:t>
+            </a:r>
+            <a:endParaRPr lang="en-US" sz="1600" dirty="0"/>
+          </a:p>
+        </p:txBody>
+      </p:sp>
+      <p:sp>
+        <p:nvSpPr>
+          <p:cNvPr id="15" name="Step title 3"/>
+          <p:cNvSpPr txBox="1"/>
+          <p:nvPr/>
+        </p:nvSpPr>
+        <p:spPr>
+          <a:xfrm>
+            <a:off x="5212080" y="2359152"/>
+            <a:ext cx="1463040" cy="274320"/>
+          </a:xfrm>
+          <a:prstGeom prst="rect">
+            <a:avLst/>
+          </a:prstGeom>
+          <a:noFill/>
+          <a:ln/>
+        </p:spPr>
+        <p:txBody>
+          <a:bodyPr wrap="square" lIns="0" tIns="0" rIns="0" bIns="0" rtlCol="0" anchor="t"/>
+          <a:lstStyle/>
+          <a:p>
+            <a:pPr indent="0" marL="0">
+              <a:buNone/>
+            </a:pPr>
+            <a:r>
+              <a:rPr lang="en-US" sz="1500" b="1" dirty="0">
+                <a:solidFill>
+                  <a:schemeClr val="tx2"/>
+                </a:solidFill>
+              </a:rPr>
+              <a:t>Match</a:t>
+            </a:r>
+            <a:endParaRPr lang="en-US" sz="1500" dirty="0"/>
+          </a:p>
+        </p:txBody>
+      </p:sp>
+      <p:sp>
+        <p:nvSpPr>
+          <p:cNvPr id="16" name="Step desc 3"/>
+          <p:cNvSpPr txBox="1"/>
+          <p:nvPr/>
+        </p:nvSpPr>
+        <p:spPr>
+          <a:xfrm>
+            <a:off x="5212080" y="2651760"/>
+            <a:ext cx="1463040" cy="457200"/>
+          </a:xfrm>
+          <a:prstGeom prst="rect">
+            <a:avLst/>
+          </a:prstGeom>
+          <a:noFill/>
+          <a:ln/>
+        </p:spPr>
+        <p:txBody>
+          <a:bodyPr wrap="square" lIns="0" tIns="0" rIns="0" bIns="0" rtlCol="0" anchor="t"/>
+          <a:lstStyle/>
+          <a:p>
+            <a:pPr indent="0" marL="0">
+              <a:buNone/>
+            </a:pPr>
+            <a:r>
+              <a:rPr lang="en-US" sz="1200" dirty="0">
+                <a:solidFill>
+                  <a:schemeClr val="tx1"/>
+                </a:solidFill>
+              </a:rPr>
+              <a:t>foldLeft over lexicon</a:t>
+            </a:r>
+            <a:endParaRPr lang="en-US" sz="1200" dirty="0"/>
+          </a:p>
+        </p:txBody>
+      </p:sp>
+      <p:sp>
+        <p:nvSpPr>
+          <p:cNvPr id="17" name="Step dot 4"/>
+          <p:cNvSpPr/>
+          <p:nvPr/>
+        </p:nvSpPr>
+        <p:spPr>
+          <a:xfrm>
+            <a:off x="6766560" y="2377440"/>
+            <a:ext cx="457200" cy="457200"/>
+          </a:xfrm>
+          <a:prstGeom prst="ellipse">
+            <a:avLst/>
+          </a:prstGeom>
+          <a:solidFill>
+            <a:schemeClr val="accent1"/>
+          </a:solidFill>
+          <a:ln w="12700">
+            <a:solidFill>
+              <a:srgbClr val="1F9E74"/>
+            </a:solidFill>
+            <a:prstDash val="solid"/>
+          </a:ln>
+        </p:spPr>
+      </p:sp>
+      <p:sp>
+        <p:nvSpPr>
+          <p:cNvPr id="18" name="Step num 4"/>
+          <p:cNvSpPr txBox="1"/>
+          <p:nvPr/>
+        </p:nvSpPr>
+        <p:spPr>
+          <a:xfrm>
+            <a:off x="6766560" y="2377440"/>
+            <a:ext cx="457200" cy="457200"/>
+          </a:xfrm>
+          <a:prstGeom prst="rect">
+            <a:avLst/>
+          </a:prstGeom>
+          <a:noFill/>
+          <a:ln/>
+        </p:spPr>
+        <p:txBody>
+          <a:bodyPr wrap="square" lIns="0" tIns="0" rIns="0" bIns="0" rtlCol="0" anchor="ctr"/>
+          <a:lstStyle/>
+          <a:p>
+            <a:pPr algn="ctr" indent="0" marL="0">
+              <a:buNone/>
+            </a:pPr>
+            <a:r>
+              <a:rPr lang="en-US" sz="1600" b="1" dirty="0">
+                <a:solidFill>
+                  <a:schemeClr val="bg1"/>
+                </a:solidFill>
+              </a:rPr>
+              <a:t>4</a:t>
+            </a:r>
+            <a:endParaRPr lang="en-US" sz="1600" dirty="0"/>
+          </a:p>
+        </p:txBody>
+      </p:sp>
+      <p:sp>
+        <p:nvSpPr>
+          <p:cNvPr id="19" name="Step title 4"/>
+          <p:cNvSpPr txBox="1"/>
+          <p:nvPr/>
+        </p:nvSpPr>
+        <p:spPr>
+          <a:xfrm>
+            <a:off x="7315200" y="2359152"/>
+            <a:ext cx="1463040" cy="274320"/>
+          </a:xfrm>
+          <a:prstGeom prst="rect">
+            <a:avLst/>
+          </a:prstGeom>
+          <a:noFill/>
+          <a:ln/>
+        </p:spPr>
+        <p:txBody>
+          <a:bodyPr wrap="square" lIns="0" tIns="0" rIns="0" bIns="0" rtlCol="0" anchor="t"/>
+          <a:lstStyle/>
+          <a:p>
+            <a:pPr indent="0" marL="0">
+              <a:buNone/>
+            </a:pPr>
+            <a:r>
+              <a:rPr lang="en-US" sz="1500" b="1" dirty="0">
+                <a:solidFill>
+                  <a:schemeClr val="tx2"/>
+                </a:solidFill>
+              </a:rPr>
+              <a:t>Score</a:t>
+            </a:r>
+            <a:endParaRPr lang="en-US" sz="1500" dirty="0"/>
+          </a:p>
+        </p:txBody>
+      </p:sp>
+      <p:sp>
+        <p:nvSpPr>
+          <p:cNvPr id="20" name="Step desc 4"/>
+          <p:cNvSpPr txBox="1"/>
+          <p:nvPr/>
+        </p:nvSpPr>
+        <p:spPr>
+          <a:xfrm>
+            <a:off x="7315200" y="2651760"/>
+            <a:ext cx="1463040" cy="457200"/>
+          </a:xfrm>
+          <a:prstGeom prst="rect">
+            <a:avLst/>
+          </a:prstGeom>
+          <a:noFill/>
+          <a:ln/>
+        </p:spPr>
+        <p:txBody>
+          <a:bodyPr wrap="square" lIns="0" tIns="0" rIns="0" bIns="0" rtlCol="0" anchor="t"/>
+          <a:lstStyle/>
+          <a:p>
+            <a:pPr indent="0" marL="0">
+              <a:buNone/>
+            </a:pPr>
+            <a:r>
+              <a:rPr lang="en-US" sz="1200" dirty="0">
+                <a:solidFill>
+                  <a:schemeClr val="tx1"/>
+                </a:solidFill>
+              </a:rPr>
+              <a:t>+3 → Positive</a:t>
+            </a:r>
+            <a:endParaRPr lang="en-US" sz="1200" dirty="0"/>
+          </a:p>
+        </p:txBody>
+      </p:sp>
+      <p:sp>
+        <p:nvSpPr>
+          <p:cNvPr id="21" name="Text 19"/>
+          <p:cNvSpPr txBox="1"/>
+          <p:nvPr/>
+        </p:nvSpPr>
+        <p:spPr>
+          <a:xfrm>
             <a:off x="457200" y="3337560"/>
-            <a:ext cx="8229600" cy="1097280"/>
+            <a:ext cx="8229600" cy="1371600"/>
           </a:xfrm>
           <a:prstGeom prst="rect">
             <a:avLst/>
@@ -9009,14 +10607,14 @@
               <a:buChar char="•"/>
             </a:pPr>
             <a:r>
-              <a:rPr lang="en-US" sz="1500" dirty="0">
+              <a:rPr lang="en-US" sz="1400" dirty="0">
                 <a:solidFill>
                   <a:schemeClr val="tx1"/>
                 </a:solidFill>
               </a:rPr>
-              <a:t>Startup RDD (k = permalink) ⟕ News RDD, after groupByKey per startup</a:t>
-            </a:r>
-            <a:endParaRPr lang="en-US" sz="1500" dirty="0"/>
+              <a:t>The lexicon is specific to startup news (Loughran &amp; McDonald, 2011)</a:t>
+            </a:r>
+            <a:endParaRPr lang="en-US" sz="1400" dirty="0"/>
           </a:p>
           <a:p>
             <a:pPr marL="342900" indent="-342900">
@@ -9027,14 +10625,32 @@
               <a:buChar char="•"/>
             </a:pPr>
             <a:r>
-              <a:rPr lang="en-US" sz="1500" dirty="0">
+              <a:rPr lang="en-US" sz="1400" dirty="0">
                 <a:solidFill>
                   <a:schemeClr val="tx1"/>
                 </a:solidFill>
               </a:rPr>
-              <a:t>reduceByKey for label counts; the joined RDD is persisted because it feeds both feature sets</a:t>
-            </a:r>
-            <a:endParaRPr lang="en-US" sz="1500" dirty="0"/>
+              <a:t>Every score is explained by its matched words</a:t>
+            </a:r>
+            <a:endParaRPr lang="en-US" sz="1400" dirty="0"/>
+          </a:p>
+          <a:p>
+            <a:pPr marL="342900" indent="-342900">
+              <a:spcAft>
+                <a:spcPts val="800"/>
+              </a:spcAft>
+              <a:buSzPct val="100000"/>
+              <a:buChar char="•"/>
+            </a:pPr>
+            <a:r>
+              <a:rPr lang="en-US" sz="1400" dirty="0">
+                <a:solidFill>
+                  <a:schemeClr val="tx1"/>
+                </a:solidFill>
+              </a:rPr>
+              <a:t>Measured limit: 87% of matched headlines score Neutral; there is no negation handling</a:t>
+            </a:r>
+            <a:endParaRPr lang="en-US" sz="1400" dirty="0"/>
           </a:p>
         </p:txBody>
       </p:sp>
@@ -9140,7 +10756,7 @@
                   <a:schemeClr val="tx2"/>
                 </a:solidFill>
               </a:rPr>
-              <a:t>Accuracy is the wrong yardstick here</a:t>
+              <a:t>Nested feature sets isolate each effect</a:t>
             </a:r>
             <a:endParaRPr lang="en-US" sz="2800" dirty="0"/>
           </a:p>
@@ -9148,14 +10764,41 @@
       </p:sp>
       <p:sp>
         <p:nvSpPr>
-          <p:cNvPr id="3" name="Stat trivial number"/>
+          <p:cNvPr id="3" name="Set Leak-free"/>
+          <p:cNvSpPr/>
+          <p:nvPr/>
+        </p:nvSpPr>
+        <p:spPr>
+          <a:xfrm>
+            <a:off x="457200" y="1188720"/>
+            <a:ext cx="8229600" cy="914400"/>
+          </a:xfrm>
+          <a:prstGeom prst="roundRect">
+            <a:avLst>
+              <a:gd name="adj" fmla="val 8000"/>
+            </a:avLst>
+          </a:prstGeom>
+          <a:solidFill>
+            <a:srgbClr val="DCE8F2"/>
+          </a:solidFill>
+          <a:ln w="12700">
+            <a:solidFill>
+              <a:srgbClr val="DCE8F2"/>
+            </a:solidFill>
+            <a:prstDash val="solid"/>
+          </a:ln>
+        </p:spPr>
+      </p:sp>
+      <p:sp>
+        <p:nvSpPr>
+          <p:cNvPr id="4" name="Set title 1"/>
           <p:cNvSpPr txBox="1"/>
           <p:nvPr/>
         </p:nvSpPr>
         <p:spPr>
           <a:xfrm>
-            <a:off x="457200" y="1280160"/>
-            <a:ext cx="2651760" cy="685800"/>
+            <a:off x="685800" y="1325880"/>
+            <a:ext cx="1828800" cy="365760"/>
           </a:xfrm>
           <a:prstGeom prst="rect">
             <a:avLst/>
@@ -9171,30 +10814,30 @@
               <a:buNone/>
             </a:pPr>
             <a:r>
-              <a:rPr lang="en-US" sz="3600" b="1" dirty="0">
-                <a:solidFill>
-                  <a:schemeClr val="accent5"/>
+              <a:rPr lang="en-US" sz="1700" b="1" dirty="0">
+                <a:solidFill>
+                  <a:schemeClr val="accent3"/>
                 </a:solidFill>
                 <a:latin typeface="Cambria" pitchFamily="34" charset="0"/>
                 <a:ea typeface="Cambria" pitchFamily="34" charset="-122"/>
                 <a:cs typeface="Cambria" pitchFamily="34" charset="-120"/>
               </a:rPr>
-              <a:t>87.2%</a:t>
-            </a:r>
-            <a:endParaRPr lang="en-US" sz="3600" dirty="0"/>
-          </a:p>
-        </p:txBody>
-      </p:sp>
-      <p:sp>
-        <p:nvSpPr>
-          <p:cNvPr id="4" name="Stat trivial label"/>
+              <a:t>Leak-free</a:t>
+            </a:r>
+            <a:endParaRPr lang="en-US" sz="1700" dirty="0"/>
+          </a:p>
+        </p:txBody>
+      </p:sp>
+      <p:sp>
+        <p:nvSpPr>
+          <p:cNvPr id="5" name="Set desc 1"/>
           <p:cNvSpPr txBox="1"/>
           <p:nvPr/>
         </p:nvSpPr>
         <p:spPr>
           <a:xfrm>
-            <a:off x="457200" y="1993392"/>
-            <a:ext cx="2651760" cy="548640"/>
+            <a:off x="2606040" y="1371600"/>
+            <a:ext cx="5852160" cy="594360"/>
           </a:xfrm>
           <a:prstGeom prst="rect">
             <a:avLst/>
@@ -9210,27 +10853,54 @@
               <a:buNone/>
             </a:pPr>
             <a:r>
-              <a:rPr lang="en-US" sz="1200" dirty="0">
+              <a:rPr lang="en-US" sz="1300" dirty="0">
                 <a:solidFill>
                   <a:schemeClr val="tx1"/>
                 </a:solidFill>
               </a:rPr>
-              <a:t>accuracy of always predicting “operating”, which is useless</a:t>
-            </a:r>
-            <a:endParaRPr lang="en-US" sz="1200" dirty="0"/>
-          </a:p>
-        </p:txBody>
-      </p:sp>
-      <p:sp>
-        <p:nvSpPr>
-          <p:cNvPr id="5" name="Stat collapse number"/>
+              <a:t>Age, years since first funding, founding → funding gap, 20 categories, 10 countries</a:t>
+            </a:r>
+            <a:endParaRPr lang="en-US" sz="1300" dirty="0"/>
+          </a:p>
+        </p:txBody>
+      </p:sp>
+      <p:sp>
+        <p:nvSpPr>
+          <p:cNvPr id="6" name="Set + Coverage"/>
+          <p:cNvSpPr/>
+          <p:nvPr/>
+        </p:nvSpPr>
+        <p:spPr>
+          <a:xfrm>
+            <a:off x="822960" y="2286000"/>
+            <a:ext cx="7863840" cy="914400"/>
+          </a:xfrm>
+          <a:prstGeom prst="roundRect">
+            <a:avLst>
+              <a:gd name="adj" fmla="val 8000"/>
+            </a:avLst>
+          </a:prstGeom>
+          <a:solidFill>
+            <a:srgbClr val="FDF1D6"/>
+          </a:solidFill>
+          <a:ln w="12700">
+            <a:solidFill>
+              <a:srgbClr val="FDF1D6"/>
+            </a:solidFill>
+            <a:prstDash val="solid"/>
+          </a:ln>
+        </p:spPr>
+      </p:sp>
+      <p:sp>
+        <p:nvSpPr>
+          <p:cNvPr id="7" name="Set title 2"/>
           <p:cNvSpPr txBox="1"/>
           <p:nvPr/>
         </p:nvSpPr>
         <p:spPr>
           <a:xfrm>
-            <a:off x="3246120" y="1280160"/>
-            <a:ext cx="2651760" cy="685800"/>
+            <a:off x="1051560" y="2423160"/>
+            <a:ext cx="1828800" cy="365760"/>
           </a:xfrm>
           <a:prstGeom prst="rect">
             <a:avLst/>
@@ -9246,30 +10916,30 @@
               <a:buNone/>
             </a:pPr>
             <a:r>
-              <a:rPr lang="en-US" sz="3600" b="1" dirty="0">
-                <a:solidFill>
-                  <a:schemeClr val="accent2"/>
+              <a:rPr lang="en-US" sz="1700" b="1" dirty="0">
+                <a:solidFill>
+                  <a:schemeClr val="accent4"/>
                 </a:solidFill>
                 <a:latin typeface="Cambria" pitchFamily="34" charset="0"/>
                 <a:ea typeface="Cambria" pitchFamily="34" charset="-122"/>
                 <a:cs typeface="Cambria" pitchFamily="34" charset="-120"/>
               </a:rPr>
-              <a:t>TN = 0</a:t>
-            </a:r>
-            <a:endParaRPr lang="en-US" sz="3600" dirty="0"/>
-          </a:p>
-        </p:txBody>
-      </p:sp>
-      <p:sp>
-        <p:nvSpPr>
-          <p:cNvPr id="6" name="Stat collapse label"/>
+              <a:t>+ Coverage</a:t>
+            </a:r>
+            <a:endParaRPr lang="en-US" sz="1700" dirty="0"/>
+          </a:p>
+        </p:txBody>
+      </p:sp>
+      <p:sp>
+        <p:nvSpPr>
+          <p:cNvPr id="8" name="Set desc 2"/>
           <p:cNvSpPr txBox="1"/>
           <p:nvPr/>
         </p:nvSpPr>
         <p:spPr>
           <a:xfrm>
-            <a:off x="3246120" y="1993392"/>
-            <a:ext cx="2651760" cy="548640"/>
+            <a:off x="2971800" y="2468880"/>
+            <a:ext cx="5486400" cy="594360"/>
           </a:xfrm>
           <a:prstGeom prst="rect">
             <a:avLst/>
@@ -9285,27 +10955,54 @@
               <a:buNone/>
             </a:pPr>
             <a:r>
-              <a:rPr lang="en-US" sz="1200" dirty="0">
+              <a:rPr lang="en-US" sz="1300" dirty="0">
                 <a:solidFill>
                   <a:schemeClr val="tx1"/>
                 </a:solidFill>
               </a:rPr>
-              <a:t>first unweighted SVM run: it never caught a closure</a:t>
-            </a:r>
-            <a:endParaRPr lang="en-US" sz="1200" dirty="0"/>
-          </a:p>
-        </p:txBody>
-      </p:sp>
-      <p:sp>
-        <p:nvSpPr>
-          <p:cNvPr id="7" name="Stat weights number"/>
+              <a:t>How much news: log news count, has-coverage flag</a:t>
+            </a:r>
+            <a:endParaRPr lang="en-US" sz="1300" dirty="0"/>
+          </a:p>
+        </p:txBody>
+      </p:sp>
+      <p:sp>
+        <p:nvSpPr>
+          <p:cNvPr id="9" name="Set + Sentiment"/>
+          <p:cNvSpPr/>
+          <p:nvPr/>
+        </p:nvSpPr>
+        <p:spPr>
+          <a:xfrm>
+            <a:off x="1188720" y="3383280"/>
+            <a:ext cx="7498080" cy="914400"/>
+          </a:xfrm>
+          <a:prstGeom prst="roundRect">
+            <a:avLst>
+              <a:gd name="adj" fmla="val 8000"/>
+            </a:avLst>
+          </a:prstGeom>
+          <a:solidFill>
+            <a:srgbClr val="E3F3EC"/>
+          </a:solidFill>
+          <a:ln w="12700">
+            <a:solidFill>
+              <a:srgbClr val="E3F3EC"/>
+            </a:solidFill>
+            <a:prstDash val="solid"/>
+          </a:ln>
+        </p:spPr>
+      </p:sp>
+      <p:sp>
+        <p:nvSpPr>
+          <p:cNvPr id="10" name="Set title 3"/>
           <p:cNvSpPr txBox="1"/>
           <p:nvPr/>
         </p:nvSpPr>
         <p:spPr>
           <a:xfrm>
-            <a:off x="6035040" y="1280160"/>
-            <a:ext cx="2651760" cy="685800"/>
+            <a:off x="1417320" y="3520440"/>
+            <a:ext cx="1828800" cy="365760"/>
           </a:xfrm>
           <a:prstGeom prst="rect">
             <a:avLst/>
@@ -9321,7 +11018,7 @@
               <a:buNone/>
             </a:pPr>
             <a:r>
-              <a:rPr lang="en-US" sz="3600" b="1" dirty="0">
+              <a:rPr lang="en-US" sz="1700" b="1" dirty="0">
                 <a:solidFill>
                   <a:schemeClr val="accent1"/>
                 </a:solidFill>
@@ -9329,22 +11026,22 @@
                 <a:ea typeface="Cambria" pitchFamily="34" charset="-122"/>
                 <a:cs typeface="Cambria" pitchFamily="34" charset="-120"/>
               </a:rPr>
-              <a:t>×3.78</a:t>
-            </a:r>
-            <a:endParaRPr lang="en-US" sz="3600" dirty="0"/>
-          </a:p>
-        </p:txBody>
-      </p:sp>
-      <p:sp>
-        <p:nvSpPr>
-          <p:cNvPr id="8" name="Stat weights label"/>
+              <a:t>+ Sentiment</a:t>
+            </a:r>
+            <a:endParaRPr lang="en-US" sz="1700" dirty="0"/>
+          </a:p>
+        </p:txBody>
+      </p:sp>
+      <p:sp>
+        <p:nvSpPr>
+          <p:cNvPr id="11" name="Set desc 3"/>
           <p:cNvSpPr txBox="1"/>
           <p:nvPr/>
         </p:nvSpPr>
         <p:spPr>
           <a:xfrm>
-            <a:off x="6035040" y="1993392"/>
-            <a:ext cx="2651760" cy="548640"/>
+            <a:off x="3337560" y="3566160"/>
+            <a:ext cx="5120640" cy="594360"/>
           </a:xfrm>
           <a:prstGeom prst="rect">
             <a:avLst/>
@@ -9360,27 +11057,27 @@
               <a:buNone/>
             </a:pPr>
             <a:r>
-              <a:rPr lang="en-US" sz="1200" dirty="0">
+              <a:rPr lang="en-US" sz="1300" dirty="0">
                 <a:solidFill>
                   <a:schemeClr val="tx1"/>
                 </a:solidFill>
               </a:rPr>
-              <a:t>weight on each closed startup (operating ×0.58), from the training split only</a:t>
-            </a:r>
-            <a:endParaRPr lang="en-US" sz="1200" dirty="0"/>
-          </a:p>
-        </p:txBody>
-      </p:sp>
-      <p:sp>
-        <p:nvSpPr>
-          <p:cNvPr id="9" name="Text 7"/>
+              <a:t>What it says: counts by class, ratios, average, recent, trend, volatility</a:t>
+            </a:r>
+            <a:endParaRPr lang="en-US" sz="1300" dirty="0"/>
+          </a:p>
+        </p:txBody>
+      </p:sp>
+      <p:sp>
+        <p:nvSpPr>
+          <p:cNvPr id="12" name="Nested note"/>
           <p:cNvSpPr txBox="1"/>
           <p:nvPr/>
         </p:nvSpPr>
         <p:spPr>
           <a:xfrm>
-            <a:off x="457200" y="2880360"/>
-            <a:ext cx="8229600" cy="1737360"/>
+            <a:off x="457200" y="4526280"/>
+            <a:ext cx="8229600" cy="274320"/>
           </a:xfrm>
           <a:prstGeom prst="rect">
             <a:avLst/>
@@ -9389,61 +11086,21 @@
           <a:ln/>
         </p:spPr>
         <p:txBody>
-          <a:bodyPr wrap="square" rtlCol="0" anchor="t"/>
-          <a:lstStyle/>
-          <a:p>
-            <a:pPr marL="342900" indent="-342900">
-              <a:spcAft>
-                <a:spcPts val="800"/>
-              </a:spcAft>
-              <a:buSzPct val="100000"/>
-              <a:buChar char="•"/>
-            </a:pPr>
-            <a:r>
-              <a:rPr lang="en-US" sz="1400" dirty="0">
-                <a:solidFill>
-                  <a:schemeClr val="tx1"/>
-                </a:solidFill>
-              </a:rPr>
-              <a:t>Balanced weights: w_c = N / (2·N_c), so both classes contribute equally to the loss</a:t>
-            </a:r>
-            <a:endParaRPr lang="en-US" sz="1400" dirty="0"/>
-          </a:p>
-          <a:p>
-            <a:pPr marL="342900" indent="-342900">
-              <a:spcAft>
-                <a:spcPts val="800"/>
-              </a:spcAft>
-              <a:buSzPct val="100000"/>
-              <a:buChar char="•"/>
-            </a:pPr>
-            <a:r>
-              <a:rPr lang="en-US" sz="1400" dirty="0">
-                <a:solidFill>
-                  <a:schemeClr val="tx1"/>
-                </a:solidFill>
-              </a:rPr>
-              <a:t>Primary metrics: AUC-ROC and closed-class F1; accuracy is reported only for completeness</a:t>
-            </a:r>
-            <a:endParaRPr lang="en-US" sz="1400" dirty="0"/>
-          </a:p>
-          <a:p>
-            <a:pPr marL="342900" indent="-342900">
-              <a:spcAft>
-                <a:spcPts val="800"/>
-              </a:spcAft>
-              <a:buSzPct val="100000"/>
-              <a:buChar char="•"/>
-            </a:pPr>
-            <a:r>
-              <a:rPr lang="en-US" sz="1400" dirty="0">
-                <a:solidFill>
-                  <a:schemeClr val="tx1"/>
-                </a:solidFill>
-              </a:rPr>
-              <a:t>Both models: L2 λ = 0.01, 100 iterations, 80/20 split, seed 42, the same split for all four experiments</a:t>
-            </a:r>
-            <a:endParaRPr lang="en-US" sz="1400" dirty="0"/>
+          <a:bodyPr wrap="square" lIns="0" tIns="0" rIns="0" bIns="0" rtlCol="0" anchor="t"/>
+          <a:lstStyle/>
+          <a:p>
+            <a:pPr indent="0" marL="0">
+              <a:buNone/>
+            </a:pPr>
+            <a:r>
+              <a:rPr lang="en-US" sz="1200" i="1" dirty="0">
+                <a:solidFill>
+                  <a:schemeClr val="accent5"/>
+                </a:solidFill>
+              </a:rPr>
+              <a:t>Each set is a strict superset of the previous one, so a difference can only come from the added group.</a:t>
+            </a:r>
+            <a:endParaRPr lang="en-US" sz="1200" dirty="0"/>
           </a:p>
         </p:txBody>
       </p:sp>
